--- a/assets/peptidos-clase-90min-presentacion.pptx
+++ b/assets/peptidos-clase-90min-presentacion.pptx
@@ -54,6 +54,8 @@
     <p:sldId id="302" r:id="rId54"/>
     <p:sldId id="303" r:id="rId55"/>
     <p:sldId id="304" r:id="rId56"/>
+    <p:sldId id="305" r:id="rId57"/>
+    <p:sldId id="306" r:id="rId58"/>
   </p:sldIdLst>
   <p:sldSz cx="12191695" cy="6858000" type="screen4x3"/>
   <p:notesSz cx="6858000" cy="9144000"/>
@@ -2720,7 +2722,7 @@
           <a:lstStyle/>
           <a:p>
             <a:r>
-              <a:t>Se dejan fuera «purgar», «desintoxicar con sueroterapia», homeopatía y GHK-Cu: no tienen respaldo para esta indicación.</a:t>
+              <a:t>Espacio reservado para el material del Dr. Marco sobre los péptidos similares a la hormona de crecimiento que no tienen registro sanitario. Lo presenta él desde su archivo original (diap. 42 a 46, 82, 89 y 90) y aclara su estatus regulatorio. Esta presentación no reproduce dosis ni ciclos de péptidos sin registro.</a:t>
             </a:r>
           </a:p>
         </p:txBody>
@@ -2790,7 +2792,7 @@
           <a:lstStyle/>
           <a:p>
             <a:r>
-              <a:t>Módulo 3. Casi todo lo de este bloque está sin aprobación regulatoria: no hay dosis ni protocolos en esta clase.</a:t>
+              <a:t>Se dejan fuera «purgar», «desintoxicar con sueroterapia», homeopatía y GHK-Cu: no tienen respaldo para esta indicación.</a:t>
             </a:r>
           </a:p>
         </p:txBody>
@@ -2930,7 +2932,7 @@
           <a:lstStyle/>
           <a:p>
             <a:r>
-              <a:t>Diapositiva 94: el módulo reúne 8 péptidos de reparación; es uno de los campos con más péptidos sin aprobación.</a:t>
+              <a:t>Módulo 3. Casi todo lo de este bloque está sin aprobación regulatoria: no hay dosis ni protocolos en esta clase.</a:t>
             </a:r>
           </a:p>
         </p:txBody>
@@ -3000,7 +3002,7 @@
           <a:lstStyle/>
           <a:p>
             <a:r>
-              <a:t>Un exceso de inflamación es problemático; por eso se estudian péptidos que modulan la respuesta, no que la eliminen.</a:t>
+              <a:t>Diapositiva 94: el módulo reúne 8 péptidos de reparación; es uno de los campos con más péptidos sin aprobación.</a:t>
             </a:r>
           </a:p>
         </p:txBody>
@@ -3070,7 +3072,7 @@
           <a:lstStyle/>
           <a:p>
             <a:r>
-              <a:t>No se dan dosis ni protocolos. Los datos humanos son muy limitados y hay preocupación por la pureza en el mercado de investigación.</a:t>
+              <a:t>Un exceso de inflamación es problemático; por eso se estudian péptidos que modulan la respuesta, no que la eliminen.</a:t>
             </a:r>
           </a:p>
         </p:txBody>
@@ -3140,7 +3142,7 @@
           <a:lstStyle/>
           <a:p>
             <a:r>
-              <a:t>Es la razón por la que no se recomienda su uso fuera de estudios aprobados.</a:t>
+              <a:t>No se dan dosis ni protocolos. Los datos humanos son muy limitados y hay preocupación por la pureza en el mercado de investigación.</a:t>
             </a:r>
           </a:p>
         </p:txBody>
@@ -3210,7 +3212,7 @@
           <a:lstStyle/>
           <a:p>
             <a:r>
-              <a:t>Cierre de seguridad.</a:t>
+              <a:t>Espacio reservado para el material del Dr. Marco sobre BPC-157, TB-500, GHK-Cu y KPV, que no tienen registro sanitario. Lo presenta él desde su archivo original y aclara su estatus. Esta presentación no reproduce dosis ni ciclos.</a:t>
             </a:r>
           </a:p>
         </p:txBody>
@@ -3280,7 +3282,7 @@
           <a:lstStyle/>
           <a:p>
             <a:r>
-              <a:t>Evaluación previa obligatoria antes de cualquier tratamiento con péptidos.</a:t>
+              <a:t>Es la razón por la que no se recomienda su uso fuera de estudios aprobados.</a:t>
             </a:r>
           </a:p>
         </p:txBody>
@@ -3350,7 +3352,7 @@
           <a:lstStyle/>
           <a:p>
             <a:r>
-              <a:t>Contraindicaciones absolutas generales que propone Marco.</a:t>
+              <a:t>Cierre de seguridad.</a:t>
             </a:r>
           </a:p>
         </p:txBody>
@@ -3420,7 +3422,7 @@
           <a:lstStyle/>
           <a:p>
             <a:r>
-              <a:t>Varias son urgencias: manejo inmediato y derivación.</a:t>
+              <a:t>Evaluación previa obligatoria antes de cualquier tratamiento con péptidos.</a:t>
             </a:r>
           </a:p>
         </p:txBody>
@@ -3490,7 +3492,7 @@
           <a:lstStyle/>
           <a:p>
             <a:r>
-              <a:t>Cerrar con calma. Después, preguntas del público.</a:t>
+              <a:t>Contraindicaciones absolutas generales que propone Marco.</a:t>
             </a:r>
           </a:p>
         </p:txBody>
@@ -3560,7 +3562,7 @@
           <a:lstStyle/>
           <a:p>
             <a:r>
-              <a:t>Invitar a la siguiente actividad y leer la declaración sin prisa.</a:t>
+              <a:t>Varias son urgencias: manejo inmediato y derivación.</a:t>
             </a:r>
           </a:p>
         </p:txBody>
@@ -3631,6 +3633,146 @@
           <a:p>
             <a:r>
               <a:t>Módulo 1: generalidades y bases científicas.</a:t>
+            </a:r>
+          </a:p>
+        </p:txBody>
+      </p:sp>
+      <p:sp>
+        <p:nvSpPr>
+          <p:cNvPr id="4" name="Slide Number Placeholder 3"/>
+          <p:cNvSpPr>
+            <a:spLocks noGrp="1"/>
+          </p:cNvSpPr>
+          <p:nvPr>
+            <p:ph type="sldNum" idx="5" sz="quarter"/>
+          </p:nvPr>
+        </p:nvSpPr>
+        <p:spPr/>
+      </p:sp>
+    </p:spTree>
+  </p:cSld>
+  <p:clrMapOvr>
+    <a:masterClrMapping/>
+  </p:clrMapOvr>
+</p:notes>
+</file>
+
+<file path=ppt/notesSlides/notesSlide50.xml><?xml version="1.0" encoding="utf-8"?>
+<p:notes xmlns:a="http://schemas.openxmlformats.org/drawingml/2006/main" xmlns:p="http://schemas.openxmlformats.org/presentationml/2006/main" xmlns:r="http://schemas.openxmlformats.org/officeDocument/2006/relationships">
+  <p:cSld>
+    <p:spTree>
+      <p:nvGrpSpPr>
+        <p:cNvPr id="1" name=""/>
+        <p:cNvGrpSpPr/>
+        <p:nvPr/>
+      </p:nvGrpSpPr>
+      <p:grpSpPr>
+        <a:xfrm>
+          <a:off x="0" y="0"/>
+          <a:ext cx="0" cy="0"/>
+          <a:chOff x="0" y="0"/>
+          <a:chExt cx="0" cy="0"/>
+        </a:xfrm>
+      </p:grpSpPr>
+      <p:sp>
+        <p:nvSpPr>
+          <p:cNvPr id="2" name="Slide Image Placeholder 1"/>
+          <p:cNvSpPr>
+            <a:spLocks noGrp="1"/>
+          </p:cNvSpPr>
+          <p:nvPr>
+            <p:ph type="sldImg" idx="2"/>
+          </p:nvPr>
+        </p:nvSpPr>
+        <p:spPr/>
+      </p:sp>
+      <p:sp>
+        <p:nvSpPr>
+          <p:cNvPr id="3" name="Notes Placeholder 2"/>
+          <p:cNvSpPr>
+            <a:spLocks noGrp="1"/>
+          </p:cNvSpPr>
+          <p:nvPr>
+            <p:ph type="body" idx="3" sz="quarter"/>
+          </p:nvPr>
+        </p:nvSpPr>
+        <p:spPr/>
+        <p:txBody>
+          <a:bodyPr/>
+          <a:lstStyle/>
+          <a:p>
+            <a:r>
+              <a:t>Cerrar con calma. Después, preguntas del público.</a:t>
+            </a:r>
+          </a:p>
+        </p:txBody>
+      </p:sp>
+      <p:sp>
+        <p:nvSpPr>
+          <p:cNvPr id="4" name="Slide Number Placeholder 3"/>
+          <p:cNvSpPr>
+            <a:spLocks noGrp="1"/>
+          </p:cNvSpPr>
+          <p:nvPr>
+            <p:ph type="sldNum" idx="5" sz="quarter"/>
+          </p:nvPr>
+        </p:nvSpPr>
+        <p:spPr/>
+      </p:sp>
+    </p:spTree>
+  </p:cSld>
+  <p:clrMapOvr>
+    <a:masterClrMapping/>
+  </p:clrMapOvr>
+</p:notes>
+</file>
+
+<file path=ppt/notesSlides/notesSlide51.xml><?xml version="1.0" encoding="utf-8"?>
+<p:notes xmlns:a="http://schemas.openxmlformats.org/drawingml/2006/main" xmlns:p="http://schemas.openxmlformats.org/presentationml/2006/main" xmlns:r="http://schemas.openxmlformats.org/officeDocument/2006/relationships">
+  <p:cSld>
+    <p:spTree>
+      <p:nvGrpSpPr>
+        <p:cNvPr id="1" name=""/>
+        <p:cNvGrpSpPr/>
+        <p:nvPr/>
+      </p:nvGrpSpPr>
+      <p:grpSpPr>
+        <a:xfrm>
+          <a:off x="0" y="0"/>
+          <a:ext cx="0" cy="0"/>
+          <a:chOff x="0" y="0"/>
+          <a:chExt cx="0" cy="0"/>
+        </a:xfrm>
+      </p:grpSpPr>
+      <p:sp>
+        <p:nvSpPr>
+          <p:cNvPr id="2" name="Slide Image Placeholder 1"/>
+          <p:cNvSpPr>
+            <a:spLocks noGrp="1"/>
+          </p:cNvSpPr>
+          <p:nvPr>
+            <p:ph type="sldImg" idx="2"/>
+          </p:nvPr>
+        </p:nvSpPr>
+        <p:spPr/>
+      </p:sp>
+      <p:sp>
+        <p:nvSpPr>
+          <p:cNvPr id="3" name="Notes Placeholder 2"/>
+          <p:cNvSpPr>
+            <a:spLocks noGrp="1"/>
+          </p:cNvSpPr>
+          <p:nvPr>
+            <p:ph type="body" idx="3" sz="quarter"/>
+          </p:nvPr>
+        </p:nvSpPr>
+        <p:spPr/>
+        <p:txBody>
+          <a:bodyPr/>
+          <a:lstStyle/>
+          <a:p>
+            <a:r>
+              <a:t>Invitar a la siguiente actividad y leer la declaración sin prisa.</a:t>
             </a:r>
           </a:p>
         </p:txBody>
@@ -7767,7 +7909,7 @@
                 </a:solidFill>
                 <a:latin typeface="Archivo"/>
               </a:rPr>
-              <a:t>10 / 49</a:t>
+              <a:t>10 / 51</a:t>
             </a:r>
           </a:p>
         </p:txBody>
@@ -8818,7 +8960,7 @@
                 </a:solidFill>
                 <a:latin typeface="Archivo"/>
               </a:rPr>
-              <a:t>11 / 49</a:t>
+              <a:t>11 / 51</a:t>
             </a:r>
           </a:p>
         </p:txBody>
@@ -9526,7 +9668,7 @@
                 </a:solidFill>
                 <a:latin typeface="Archivo"/>
               </a:rPr>
-              <a:t>12 / 49</a:t>
+              <a:t>12 / 51</a:t>
             </a:r>
           </a:p>
         </p:txBody>
@@ -9980,7 +10122,7 @@
                 </a:solidFill>
                 <a:latin typeface="Archivo"/>
               </a:rPr>
-              <a:t>13 / 49</a:t>
+              <a:t>13 / 51</a:t>
             </a:r>
           </a:p>
         </p:txBody>
@@ -10688,7 +10830,7 @@
                 </a:solidFill>
                 <a:latin typeface="Archivo"/>
               </a:rPr>
-              <a:t>14 / 49</a:t>
+              <a:t>14 / 51</a:t>
             </a:r>
           </a:p>
         </p:txBody>
@@ -11510,7 +11652,7 @@
                 </a:solidFill>
                 <a:latin typeface="Archivo"/>
               </a:rPr>
-              <a:t>15 / 49</a:t>
+              <a:t>15 / 51</a:t>
             </a:r>
           </a:p>
         </p:txBody>
@@ -12091,7 +12233,7 @@
                 </a:solidFill>
                 <a:latin typeface="Archivo"/>
               </a:rPr>
-              <a:t>16 / 49</a:t>
+              <a:t>16 / 51</a:t>
             </a:r>
           </a:p>
         </p:txBody>
@@ -12382,7 +12524,7 @@
                 </a:solidFill>
                 <a:latin typeface="Archivo"/>
               </a:rPr>
-              <a:t>17 / 49</a:t>
+              <a:t>17 / 51</a:t>
             </a:r>
           </a:p>
         </p:txBody>
@@ -13129,7 +13271,7 @@
                 </a:solidFill>
                 <a:latin typeface="Archivo"/>
               </a:rPr>
-              <a:t>18 / 49</a:t>
+              <a:t>18 / 51</a:t>
             </a:r>
           </a:p>
         </p:txBody>
@@ -14028,7 +14170,7 @@
                 </a:solidFill>
                 <a:latin typeface="Archivo"/>
               </a:rPr>
-              <a:t>19 / 49</a:t>
+              <a:t>19 / 51</a:t>
             </a:r>
           </a:p>
         </p:txBody>
@@ -14307,7 +14449,7 @@
                 </a:solidFill>
                 <a:latin typeface="Archivo"/>
               </a:rPr>
-              <a:t>2 / 49</a:t>
+              <a:t>2 / 51</a:t>
             </a:r>
           </a:p>
         </p:txBody>
@@ -15005,7 +15147,7 @@
                 </a:solidFill>
                 <a:latin typeface="Archivo"/>
               </a:rPr>
-              <a:t>20 / 49</a:t>
+              <a:t>20 / 51</a:t>
             </a:r>
           </a:p>
         </p:txBody>
@@ -15284,7 +15426,7 @@
                 </a:solidFill>
                 <a:latin typeface="Archivo"/>
               </a:rPr>
-              <a:t>21 / 49</a:t>
+              <a:t>21 / 51</a:t>
             </a:r>
           </a:p>
         </p:txBody>
@@ -16230,7 +16372,7 @@
                 </a:solidFill>
                 <a:latin typeface="Archivo"/>
               </a:rPr>
-              <a:t>22 / 49</a:t>
+              <a:t>22 / 51</a:t>
             </a:r>
           </a:p>
         </p:txBody>
@@ -16509,7 +16651,7 @@
                 </a:solidFill>
                 <a:latin typeface="Archivo"/>
               </a:rPr>
-              <a:t>23 / 49</a:t>
+              <a:t>23 / 51</a:t>
             </a:r>
           </a:p>
         </p:txBody>
@@ -17536,7 +17678,7 @@
                 </a:solidFill>
                 <a:latin typeface="Archivo"/>
               </a:rPr>
-              <a:t>24 / 49</a:t>
+              <a:t>24 / 51</a:t>
             </a:r>
           </a:p>
         </p:txBody>
@@ -18606,7 +18748,7 @@
                 </a:solidFill>
                 <a:latin typeface="Archivo"/>
               </a:rPr>
-              <a:t>25 / 49</a:t>
+              <a:t>25 / 51</a:t>
             </a:r>
           </a:p>
         </p:txBody>
@@ -18897,7 +19039,7 @@
                 </a:solidFill>
                 <a:latin typeface="Archivo"/>
               </a:rPr>
-              <a:t>26 / 49</a:t>
+              <a:t>26 / 51</a:t>
             </a:r>
           </a:p>
         </p:txBody>
@@ -19905,7 +20047,7 @@
                 </a:solidFill>
                 <a:latin typeface="Archivo"/>
               </a:rPr>
-              <a:t>27 / 49</a:t>
+              <a:t>27 / 51</a:t>
             </a:r>
           </a:p>
         </p:txBody>
@@ -20661,7 +20803,7 @@
                 </a:solidFill>
                 <a:latin typeface="Archivo"/>
               </a:rPr>
-              <a:t>28 / 49</a:t>
+              <a:t>28 / 51</a:t>
             </a:r>
           </a:p>
         </p:txBody>
@@ -21483,7 +21625,7 @@
                 </a:solidFill>
                 <a:latin typeface="Archivo"/>
               </a:rPr>
-              <a:t>29 / 49</a:t>
+              <a:t>29 / 51</a:t>
             </a:r>
           </a:p>
         </p:txBody>
@@ -22266,7 +22408,7 @@
                 </a:solidFill>
                 <a:latin typeface="Archivo"/>
               </a:rPr>
-              <a:t>3 / 49</a:t>
+              <a:t>3 / 51</a:t>
             </a:r>
           </a:p>
         </p:txBody>
@@ -22964,7 +23106,7 @@
                 </a:solidFill>
                 <a:latin typeface="Archivo"/>
               </a:rPr>
-              <a:t>30 / 49</a:t>
+              <a:t>30 / 51</a:t>
             </a:r>
           </a:p>
         </p:txBody>
@@ -23662,7 +23804,7 @@
                 </a:solidFill>
                 <a:latin typeface="Archivo"/>
               </a:rPr>
-              <a:t>31 / 49</a:t>
+              <a:t>31 / 51</a:t>
             </a:r>
           </a:p>
         </p:txBody>
@@ -24360,7 +24502,7 @@
                 </a:solidFill>
                 <a:latin typeface="Archivo"/>
               </a:rPr>
-              <a:t>32 / 49</a:t>
+              <a:t>32 / 51</a:t>
             </a:r>
           </a:p>
         </p:txBody>
@@ -25182,7 +25324,7 @@
                 </a:solidFill>
                 <a:latin typeface="Archivo"/>
               </a:rPr>
-              <a:t>33 / 49</a:t>
+              <a:t>33 / 51</a:t>
             </a:r>
           </a:p>
         </p:txBody>
@@ -26252,7 +26394,7 @@
                 </a:solidFill>
                 <a:latin typeface="Archivo"/>
               </a:rPr>
-              <a:t>34 / 49</a:t>
+              <a:t>34 / 51</a:t>
             </a:r>
           </a:p>
         </p:txBody>
@@ -27056,7 +27198,7 @@
                 </a:solidFill>
                 <a:latin typeface="Archivo"/>
               </a:rPr>
-              <a:t>35 / 49</a:t>
+              <a:t>35 / 51</a:t>
             </a:r>
           </a:p>
         </p:txBody>
@@ -27335,7 +27477,7 @@
                 </a:solidFill>
                 <a:latin typeface="Archivo"/>
               </a:rPr>
-              <a:t>36 / 49</a:t>
+              <a:t>36 / 51</a:t>
             </a:r>
           </a:p>
         </p:txBody>
@@ -28033,7 +28175,7 @@
                 </a:solidFill>
                 <a:latin typeface="Archivo"/>
               </a:rPr>
-              <a:t>37 / 49</a:t>
+              <a:t>37 / 51</a:t>
             </a:r>
           </a:p>
         </p:txBody>
@@ -28047,6 +28189,285 @@
 </file>
 
 <file path=ppt/slides/slide38.xml><?xml version="1.0" encoding="utf-8"?>
+<p:sld xmlns:a="http://schemas.openxmlformats.org/drawingml/2006/main" xmlns:p="http://schemas.openxmlformats.org/presentationml/2006/main" xmlns:r="http://schemas.openxmlformats.org/officeDocument/2006/relationships">
+  <p:cSld>
+    <p:bg>
+      <p:bgPr>
+        <a:solidFill>
+          <a:srgbClr val="1F5142"/>
+        </a:solidFill>
+        <a:effectLst/>
+      </p:bgPr>
+    </p:bg>
+    <p:spTree>
+      <p:nvGrpSpPr>
+        <p:cNvPr id="1" name=""/>
+        <p:cNvGrpSpPr/>
+        <p:nvPr/>
+      </p:nvGrpSpPr>
+      <p:grpSpPr/>
+      <p:sp>
+        <p:nvSpPr>
+          <p:cNvPr id="2" name="Rectangle 1"/>
+          <p:cNvSpPr/>
+          <p:nvPr/>
+        </p:nvSpPr>
+        <p:spPr>
+          <a:xfrm>
+            <a:off x="640080" y="1737360"/>
+            <a:ext cx="82296" cy="2743200"/>
+          </a:xfrm>
+          <a:prstGeom prst="rect">
+            <a:avLst/>
+          </a:prstGeom>
+          <a:solidFill>
+            <a:srgbClr val="E4AA18"/>
+          </a:solidFill>
+          <a:ln>
+            <a:noFill/>
+          </a:ln>
+          <a:effectLst/>
+        </p:spPr>
+        <p:style>
+          <a:lnRef idx="1">
+            <a:schemeClr val="accent1"/>
+          </a:lnRef>
+          <a:fillRef idx="3">
+            <a:schemeClr val="accent1"/>
+          </a:fillRef>
+          <a:effectRef idx="2">
+            <a:schemeClr val="accent1"/>
+          </a:effectRef>
+          <a:fontRef idx="minor">
+            <a:schemeClr val="lt1"/>
+          </a:fontRef>
+        </p:style>
+        <p:txBody>
+          <a:bodyPr rtlCol="0" anchor="ctr"/>
+          <a:lstStyle/>
+          <a:p>
+            <a:pPr algn="ctr"/>
+          </a:p>
+        </p:txBody>
+      </p:sp>
+      <p:sp>
+        <p:nvSpPr>
+          <p:cNvPr id="3" name="TextBox 2"/>
+          <p:cNvSpPr txBox="1"/>
+          <p:nvPr/>
+        </p:nvSpPr>
+        <p:spPr>
+          <a:xfrm>
+            <a:off x="1097280" y="1554480"/>
+            <a:ext cx="10241280" cy="3291840"/>
+          </a:xfrm>
+          <a:prstGeom prst="rect">
+            <a:avLst/>
+          </a:prstGeom>
+          <a:noFill/>
+        </p:spPr>
+        <p:txBody>
+          <a:bodyPr wrap="square" lIns="0" rIns="0" tIns="0" bIns="0" anchor="ctr">
+            <a:spAutoFit/>
+          </a:bodyPr>
+          <a:lstStyle/>
+          <a:p>
+            <a:pPr algn="l">
+              <a:lnSpc>
+                <a:spcPct val="108000"/>
+              </a:lnSpc>
+            </a:pPr>
+            <a:r>
+              <a:rPr sz="4000" b="1" i="0">
+                <a:solidFill>
+                  <a:srgbClr val="FFF9EE"/>
+                </a:solidFill>
+                <a:latin typeface="Fraunces"/>
+              </a:rPr>
+              <a:t>Aquí el Dr. Marco </a:t>
+            </a:r>
+            <a:r>
+              <a:rPr sz="4000" b="1" i="0">
+                <a:solidFill>
+                  <a:srgbClr val="E4AA18"/>
+                </a:solidFill>
+                <a:latin typeface="Fraunces"/>
+              </a:rPr>
+              <a:t>proyecta sus propias diapositivas</a:t>
+            </a:r>
+            <a:r>
+              <a:rPr sz="4000" b="1" i="0">
+                <a:solidFill>
+                  <a:srgbClr val="FFF9EE"/>
+                </a:solidFill>
+                <a:latin typeface="Fraunces"/>
+              </a:rPr>
+              <a:t>.</a:t>
+            </a:r>
+          </a:p>
+        </p:txBody>
+      </p:sp>
+      <p:sp>
+        <p:nvSpPr>
+          <p:cNvPr id="4" name="TextBox 3"/>
+          <p:cNvSpPr txBox="1"/>
+          <p:nvPr/>
+        </p:nvSpPr>
+        <p:spPr>
+          <a:xfrm>
+            <a:off x="1097280" y="4983480"/>
+            <a:ext cx="9875520" cy="1005840"/>
+          </a:xfrm>
+          <a:prstGeom prst="rect">
+            <a:avLst/>
+          </a:prstGeom>
+          <a:noFill/>
+        </p:spPr>
+        <p:txBody>
+          <a:bodyPr wrap="square" lIns="0" rIns="0" tIns="0" bIns="0" anchor="t">
+            <a:spAutoFit/>
+          </a:bodyPr>
+          <a:lstStyle/>
+          <a:p>
+            <a:pPr algn="l">
+              <a:lnSpc>
+                <a:spcPct val="125000"/>
+              </a:lnSpc>
+            </a:pPr>
+            <a:r>
+              <a:rPr sz="1800" b="0" i="0">
+                <a:solidFill>
+                  <a:srgbClr val="9BAFA4"/>
+                </a:solidFill>
+                <a:latin typeface="Archivo"/>
+              </a:rPr>
+              <a:t>Péptidos del eje de la hormona de crecimiento sin registro: diapositivas 42 a 46, 82 y 89 a 90 de su archivo.</a:t>
+            </a:r>
+          </a:p>
+        </p:txBody>
+      </p:sp>
+      <p:cxnSp>
+        <p:nvCxnSpPr>
+          <p:cNvPr id="5" name="Connector 4"/>
+          <p:cNvCxnSpPr/>
+          <p:nvPr/>
+        </p:nvCxnSpPr>
+        <p:spPr>
+          <a:xfrm>
+            <a:off x="640080" y="6400800"/>
+            <a:ext cx="10911535" cy="0"/>
+          </a:xfrm>
+          <a:prstGeom prst="line">
+            <a:avLst/>
+          </a:prstGeom>
+          <a:ln w="6350">
+            <a:solidFill>
+              <a:srgbClr val="607E70"/>
+            </a:solidFill>
+          </a:ln>
+        </p:spPr>
+        <p:style>
+          <a:lnRef idx="2">
+            <a:schemeClr val="accent1"/>
+          </a:lnRef>
+          <a:fillRef idx="0">
+            <a:schemeClr val="accent1"/>
+          </a:fillRef>
+          <a:effectRef idx="1">
+            <a:schemeClr val="accent1"/>
+          </a:effectRef>
+          <a:fontRef idx="minor">
+            <a:schemeClr val="tx1"/>
+          </a:fontRef>
+        </p:style>
+      </p:cxnSp>
+      <p:sp>
+        <p:nvSpPr>
+          <p:cNvPr id="6" name="TextBox 5"/>
+          <p:cNvSpPr txBox="1"/>
+          <p:nvPr/>
+        </p:nvSpPr>
+        <p:spPr>
+          <a:xfrm>
+            <a:off x="640080" y="6473952"/>
+            <a:ext cx="7772400" cy="256032"/>
+          </a:xfrm>
+          <a:prstGeom prst="rect">
+            <a:avLst/>
+          </a:prstGeom>
+          <a:noFill/>
+        </p:spPr>
+        <p:txBody>
+          <a:bodyPr wrap="square" lIns="0" rIns="0" tIns="0" bIns="0" anchor="ctr">
+            <a:spAutoFit/>
+          </a:bodyPr>
+          <a:lstStyle/>
+          <a:p>
+            <a:pPr algn="l">
+              <a:lnSpc>
+                <a:spcPct val="100000"/>
+              </a:lnSpc>
+            </a:pPr>
+            <a:r>
+              <a:rPr sz="950" b="0" i="0">
+                <a:solidFill>
+                  <a:srgbClr val="9BAFA4"/>
+                </a:solidFill>
+                <a:latin typeface="Archivo"/>
+              </a:rPr>
+              <a:t>Dr. Marco Sosa · Péptidos: qué son y para qué se usan</a:t>
+            </a:r>
+          </a:p>
+        </p:txBody>
+      </p:sp>
+      <p:sp>
+        <p:nvSpPr>
+          <p:cNvPr id="7" name="TextBox 6"/>
+          <p:cNvSpPr txBox="1"/>
+          <p:nvPr/>
+        </p:nvSpPr>
+        <p:spPr>
+          <a:xfrm>
+            <a:off x="10454335" y="6473952"/>
+            <a:ext cx="1097280" cy="256032"/>
+          </a:xfrm>
+          <a:prstGeom prst="rect">
+            <a:avLst/>
+          </a:prstGeom>
+          <a:noFill/>
+        </p:spPr>
+        <p:txBody>
+          <a:bodyPr wrap="square" lIns="0" rIns="0" tIns="0" bIns="0" anchor="ctr">
+            <a:spAutoFit/>
+          </a:bodyPr>
+          <a:lstStyle/>
+          <a:p>
+            <a:pPr algn="r">
+              <a:lnSpc>
+                <a:spcPct val="100000"/>
+              </a:lnSpc>
+            </a:pPr>
+            <a:r>
+              <a:rPr sz="950" b="0" i="0">
+                <a:solidFill>
+                  <a:srgbClr val="9BAFA4"/>
+                </a:solidFill>
+                <a:latin typeface="Archivo"/>
+              </a:rPr>
+              <a:t>38 / 51</a:t>
+            </a:r>
+          </a:p>
+        </p:txBody>
+      </p:sp>
+    </p:spTree>
+  </p:cSld>
+  <p:clrMapOvr>
+    <a:masterClrMapping/>
+  </p:clrMapOvr>
+</p:sld>
+</file>
+
+<file path=ppt/slides/slide39.xml><?xml version="1.0" encoding="utf-8"?>
 <p:sld xmlns:a="http://schemas.openxmlformats.org/drawingml/2006/main" xmlns:p="http://schemas.openxmlformats.org/presentationml/2006/main" xmlns:r="http://schemas.openxmlformats.org/officeDocument/2006/relationships">
   <p:cSld>
     <p:bg>
@@ -28855,298 +29276,7 @@
                 </a:solidFill>
                 <a:latin typeface="Archivo"/>
               </a:rPr>
-              <a:t>38 / 49</a:t>
-            </a:r>
-          </a:p>
-        </p:txBody>
-      </p:sp>
-    </p:spTree>
-  </p:cSld>
-  <p:clrMapOvr>
-    <a:masterClrMapping/>
-  </p:clrMapOvr>
-</p:sld>
-</file>
-
-<file path=ppt/slides/slide39.xml><?xml version="1.0" encoding="utf-8"?>
-<p:sld xmlns:a="http://schemas.openxmlformats.org/drawingml/2006/main" xmlns:p="http://schemas.openxmlformats.org/presentationml/2006/main" xmlns:r="http://schemas.openxmlformats.org/officeDocument/2006/relationships">
-  <p:cSld>
-    <p:bg>
-      <p:bgPr>
-        <a:solidFill>
-          <a:srgbClr val="1F5142"/>
-        </a:solidFill>
-        <a:effectLst/>
-      </p:bgPr>
-    </p:bg>
-    <p:spTree>
-      <p:nvGrpSpPr>
-        <p:cNvPr id="1" name=""/>
-        <p:cNvGrpSpPr/>
-        <p:nvPr/>
-      </p:nvGrpSpPr>
-      <p:grpSpPr/>
-      <p:sp>
-        <p:nvSpPr>
-          <p:cNvPr id="2" name="TextBox 1"/>
-          <p:cNvSpPr txBox="1"/>
-          <p:nvPr/>
-        </p:nvSpPr>
-        <p:spPr>
-          <a:xfrm>
-            <a:off x="640080" y="1463040"/>
-            <a:ext cx="3291840" cy="3108960"/>
-          </a:xfrm>
-          <a:prstGeom prst="rect">
-            <a:avLst/>
-          </a:prstGeom>
-          <a:noFill/>
-        </p:spPr>
-        <p:txBody>
-          <a:bodyPr wrap="square" lIns="0" rIns="0" tIns="0" bIns="0" anchor="ctr">
-            <a:spAutoFit/>
-          </a:bodyPr>
-          <a:lstStyle/>
-          <a:p>
-            <a:pPr algn="l">
-              <a:lnSpc>
-                <a:spcPct val="90000"/>
-              </a:lnSpc>
-            </a:pPr>
-            <a:r>
-              <a:rPr sz="19000" b="1" i="0">
-                <a:solidFill>
-                  <a:srgbClr val="E4AA18"/>
-                </a:solidFill>
-                <a:latin typeface="Fraunces"/>
-              </a:rPr>
-              <a:t>4</a:t>
-            </a:r>
-          </a:p>
-        </p:txBody>
-      </p:sp>
-      <p:cxnSp>
-        <p:nvCxnSpPr>
-          <p:cNvPr id="3" name="Connector 2"/>
-          <p:cNvCxnSpPr/>
-          <p:nvPr/>
-        </p:nvCxnSpPr>
-        <p:spPr>
-          <a:xfrm>
-            <a:off x="4160520" y="1737360"/>
-            <a:ext cx="0" cy="3383280"/>
-          </a:xfrm>
-          <a:prstGeom prst="line">
-            <a:avLst/>
-          </a:prstGeom>
-          <a:ln w="19050">
-            <a:solidFill>
-              <a:srgbClr val="607E70"/>
-            </a:solidFill>
-          </a:ln>
-        </p:spPr>
-        <p:style>
-          <a:lnRef idx="2">
-            <a:schemeClr val="accent1"/>
-          </a:lnRef>
-          <a:fillRef idx="0">
-            <a:schemeClr val="accent1"/>
-          </a:fillRef>
-          <a:effectRef idx="1">
-            <a:schemeClr val="accent1"/>
-          </a:effectRef>
-          <a:fontRef idx="minor">
-            <a:schemeClr val="tx1"/>
-          </a:fontRef>
-        </p:style>
-      </p:cxnSp>
-      <p:sp>
-        <p:nvSpPr>
-          <p:cNvPr id="4" name="TextBox 3"/>
-          <p:cNvSpPr txBox="1"/>
-          <p:nvPr/>
-        </p:nvSpPr>
-        <p:spPr>
-          <a:xfrm>
-            <a:off x="4572000" y="1737360"/>
-            <a:ext cx="6949440" cy="2194560"/>
-          </a:xfrm>
-          <a:prstGeom prst="rect">
-            <a:avLst/>
-          </a:prstGeom>
-          <a:noFill/>
-        </p:spPr>
-        <p:txBody>
-          <a:bodyPr wrap="square" lIns="0" rIns="0" tIns="0" bIns="0" anchor="ctr">
-            <a:spAutoFit/>
-          </a:bodyPr>
-          <a:lstStyle/>
-          <a:p>
-            <a:pPr algn="l">
-              <a:lnSpc>
-                <a:spcPct val="102000"/>
-              </a:lnSpc>
-            </a:pPr>
-            <a:r>
-              <a:rPr sz="4200" b="1" i="0">
-                <a:solidFill>
-                  <a:srgbClr val="FFF9EE"/>
-                </a:solidFill>
-                <a:latin typeface="Fraunces"/>
-              </a:rPr>
-              <a:t>Reparación y protección</a:t>
-            </a:r>
-          </a:p>
-        </p:txBody>
-      </p:sp>
-      <p:sp>
-        <p:nvSpPr>
-          <p:cNvPr id="5" name="TextBox 4"/>
-          <p:cNvSpPr txBox="1"/>
-          <p:nvPr/>
-        </p:nvSpPr>
-        <p:spPr>
-          <a:xfrm>
-            <a:off x="4572000" y="4069080"/>
-            <a:ext cx="6766560" cy="1280160"/>
-          </a:xfrm>
-          <a:prstGeom prst="rect">
-            <a:avLst/>
-          </a:prstGeom>
-          <a:noFill/>
-        </p:spPr>
-        <p:txBody>
-          <a:bodyPr wrap="square" lIns="0" rIns="0" tIns="0" bIns="0" anchor="t">
-            <a:spAutoFit/>
-          </a:bodyPr>
-          <a:lstStyle/>
-          <a:p>
-            <a:pPr algn="l">
-              <a:lnSpc>
-                <a:spcPct val="125000"/>
-              </a:lnSpc>
-            </a:pPr>
-            <a:r>
-              <a:rPr sz="1800" b="0" i="0">
-                <a:solidFill>
-                  <a:srgbClr val="9BAFA4"/>
-                </a:solidFill>
-                <a:latin typeface="Archivo"/>
-              </a:rPr>
-              <a:t>Solo concepto, evidencia y estatus.</a:t>
-            </a:r>
-          </a:p>
-        </p:txBody>
-      </p:sp>
-      <p:cxnSp>
-        <p:nvCxnSpPr>
-          <p:cNvPr id="6" name="Connector 5"/>
-          <p:cNvCxnSpPr/>
-          <p:nvPr/>
-        </p:nvCxnSpPr>
-        <p:spPr>
-          <a:xfrm>
-            <a:off x="640080" y="6400800"/>
-            <a:ext cx="10911535" cy="0"/>
-          </a:xfrm>
-          <a:prstGeom prst="line">
-            <a:avLst/>
-          </a:prstGeom>
-          <a:ln w="6350">
-            <a:solidFill>
-              <a:srgbClr val="607E70"/>
-            </a:solidFill>
-          </a:ln>
-        </p:spPr>
-        <p:style>
-          <a:lnRef idx="2">
-            <a:schemeClr val="accent1"/>
-          </a:lnRef>
-          <a:fillRef idx="0">
-            <a:schemeClr val="accent1"/>
-          </a:fillRef>
-          <a:effectRef idx="1">
-            <a:schemeClr val="accent1"/>
-          </a:effectRef>
-          <a:fontRef idx="minor">
-            <a:schemeClr val="tx1"/>
-          </a:fontRef>
-        </p:style>
-      </p:cxnSp>
-      <p:sp>
-        <p:nvSpPr>
-          <p:cNvPr id="7" name="TextBox 6"/>
-          <p:cNvSpPr txBox="1"/>
-          <p:nvPr/>
-        </p:nvSpPr>
-        <p:spPr>
-          <a:xfrm>
-            <a:off x="640080" y="6473952"/>
-            <a:ext cx="7772400" cy="256032"/>
-          </a:xfrm>
-          <a:prstGeom prst="rect">
-            <a:avLst/>
-          </a:prstGeom>
-          <a:noFill/>
-        </p:spPr>
-        <p:txBody>
-          <a:bodyPr wrap="square" lIns="0" rIns="0" tIns="0" bIns="0" anchor="ctr">
-            <a:spAutoFit/>
-          </a:bodyPr>
-          <a:lstStyle/>
-          <a:p>
-            <a:pPr algn="l">
-              <a:lnSpc>
-                <a:spcPct val="100000"/>
-              </a:lnSpc>
-            </a:pPr>
-            <a:r>
-              <a:rPr sz="950" b="0" i="0">
-                <a:solidFill>
-                  <a:srgbClr val="9BAFA4"/>
-                </a:solidFill>
-                <a:latin typeface="Archivo"/>
-              </a:rPr>
-              <a:t>Dr. Marco Sosa · Péptidos: qué son y para qué se usan</a:t>
-            </a:r>
-          </a:p>
-        </p:txBody>
-      </p:sp>
-      <p:sp>
-        <p:nvSpPr>
-          <p:cNvPr id="8" name="TextBox 7"/>
-          <p:cNvSpPr txBox="1"/>
-          <p:nvPr/>
-        </p:nvSpPr>
-        <p:spPr>
-          <a:xfrm>
-            <a:off x="10454335" y="6473952"/>
-            <a:ext cx="1097280" cy="256032"/>
-          </a:xfrm>
-          <a:prstGeom prst="rect">
-            <a:avLst/>
-          </a:prstGeom>
-          <a:noFill/>
-        </p:spPr>
-        <p:txBody>
-          <a:bodyPr wrap="square" lIns="0" rIns="0" tIns="0" bIns="0" anchor="ctr">
-            <a:spAutoFit/>
-          </a:bodyPr>
-          <a:lstStyle/>
-          <a:p>
-            <a:pPr algn="r">
-              <a:lnSpc>
-                <a:spcPct val="100000"/>
-              </a:lnSpc>
-            </a:pPr>
-            <a:r>
-              <a:rPr sz="950" b="0" i="0">
-                <a:solidFill>
-                  <a:srgbClr val="9BAFA4"/>
-                </a:solidFill>
-                <a:latin typeface="Archivo"/>
-              </a:rPr>
-              <a:t>39 / 49</a:t>
+              <a:t>39 / 51</a:t>
             </a:r>
           </a:p>
         </p:txBody>
@@ -29922,7 +30052,7 @@
                 </a:solidFill>
                 <a:latin typeface="Archivo"/>
               </a:rPr>
-              <a:t>4 / 49</a:t>
+              <a:t>4 / 51</a:t>
             </a:r>
           </a:p>
         </p:txBody>
@@ -29936,6 +30066,297 @@
 </file>
 
 <file path=ppt/slides/slide40.xml><?xml version="1.0" encoding="utf-8"?>
+<p:sld xmlns:a="http://schemas.openxmlformats.org/drawingml/2006/main" xmlns:p="http://schemas.openxmlformats.org/presentationml/2006/main" xmlns:r="http://schemas.openxmlformats.org/officeDocument/2006/relationships">
+  <p:cSld>
+    <p:bg>
+      <p:bgPr>
+        <a:solidFill>
+          <a:srgbClr val="1F5142"/>
+        </a:solidFill>
+        <a:effectLst/>
+      </p:bgPr>
+    </p:bg>
+    <p:spTree>
+      <p:nvGrpSpPr>
+        <p:cNvPr id="1" name=""/>
+        <p:cNvGrpSpPr/>
+        <p:nvPr/>
+      </p:nvGrpSpPr>
+      <p:grpSpPr/>
+      <p:sp>
+        <p:nvSpPr>
+          <p:cNvPr id="2" name="TextBox 1"/>
+          <p:cNvSpPr txBox="1"/>
+          <p:nvPr/>
+        </p:nvSpPr>
+        <p:spPr>
+          <a:xfrm>
+            <a:off x="640080" y="1463040"/>
+            <a:ext cx="3291840" cy="3108960"/>
+          </a:xfrm>
+          <a:prstGeom prst="rect">
+            <a:avLst/>
+          </a:prstGeom>
+          <a:noFill/>
+        </p:spPr>
+        <p:txBody>
+          <a:bodyPr wrap="square" lIns="0" rIns="0" tIns="0" bIns="0" anchor="ctr">
+            <a:spAutoFit/>
+          </a:bodyPr>
+          <a:lstStyle/>
+          <a:p>
+            <a:pPr algn="l">
+              <a:lnSpc>
+                <a:spcPct val="90000"/>
+              </a:lnSpc>
+            </a:pPr>
+            <a:r>
+              <a:rPr sz="19000" b="1" i="0">
+                <a:solidFill>
+                  <a:srgbClr val="E4AA18"/>
+                </a:solidFill>
+                <a:latin typeface="Fraunces"/>
+              </a:rPr>
+              <a:t>4</a:t>
+            </a:r>
+          </a:p>
+        </p:txBody>
+      </p:sp>
+      <p:cxnSp>
+        <p:nvCxnSpPr>
+          <p:cNvPr id="3" name="Connector 2"/>
+          <p:cNvCxnSpPr/>
+          <p:nvPr/>
+        </p:nvCxnSpPr>
+        <p:spPr>
+          <a:xfrm>
+            <a:off x="4160520" y="1737360"/>
+            <a:ext cx="0" cy="3383280"/>
+          </a:xfrm>
+          <a:prstGeom prst="line">
+            <a:avLst/>
+          </a:prstGeom>
+          <a:ln w="19050">
+            <a:solidFill>
+              <a:srgbClr val="607E70"/>
+            </a:solidFill>
+          </a:ln>
+        </p:spPr>
+        <p:style>
+          <a:lnRef idx="2">
+            <a:schemeClr val="accent1"/>
+          </a:lnRef>
+          <a:fillRef idx="0">
+            <a:schemeClr val="accent1"/>
+          </a:fillRef>
+          <a:effectRef idx="1">
+            <a:schemeClr val="accent1"/>
+          </a:effectRef>
+          <a:fontRef idx="minor">
+            <a:schemeClr val="tx1"/>
+          </a:fontRef>
+        </p:style>
+      </p:cxnSp>
+      <p:sp>
+        <p:nvSpPr>
+          <p:cNvPr id="4" name="TextBox 3"/>
+          <p:cNvSpPr txBox="1"/>
+          <p:nvPr/>
+        </p:nvSpPr>
+        <p:spPr>
+          <a:xfrm>
+            <a:off x="4572000" y="1737360"/>
+            <a:ext cx="6949440" cy="2194560"/>
+          </a:xfrm>
+          <a:prstGeom prst="rect">
+            <a:avLst/>
+          </a:prstGeom>
+          <a:noFill/>
+        </p:spPr>
+        <p:txBody>
+          <a:bodyPr wrap="square" lIns="0" rIns="0" tIns="0" bIns="0" anchor="ctr">
+            <a:spAutoFit/>
+          </a:bodyPr>
+          <a:lstStyle/>
+          <a:p>
+            <a:pPr algn="l">
+              <a:lnSpc>
+                <a:spcPct val="102000"/>
+              </a:lnSpc>
+            </a:pPr>
+            <a:r>
+              <a:rPr sz="4200" b="1" i="0">
+                <a:solidFill>
+                  <a:srgbClr val="FFF9EE"/>
+                </a:solidFill>
+                <a:latin typeface="Fraunces"/>
+              </a:rPr>
+              <a:t>Reparación y protección</a:t>
+            </a:r>
+          </a:p>
+        </p:txBody>
+      </p:sp>
+      <p:sp>
+        <p:nvSpPr>
+          <p:cNvPr id="5" name="TextBox 4"/>
+          <p:cNvSpPr txBox="1"/>
+          <p:nvPr/>
+        </p:nvSpPr>
+        <p:spPr>
+          <a:xfrm>
+            <a:off x="4572000" y="4069080"/>
+            <a:ext cx="6766560" cy="1280160"/>
+          </a:xfrm>
+          <a:prstGeom prst="rect">
+            <a:avLst/>
+          </a:prstGeom>
+          <a:noFill/>
+        </p:spPr>
+        <p:txBody>
+          <a:bodyPr wrap="square" lIns="0" rIns="0" tIns="0" bIns="0" anchor="t">
+            <a:spAutoFit/>
+          </a:bodyPr>
+          <a:lstStyle/>
+          <a:p>
+            <a:pPr algn="l">
+              <a:lnSpc>
+                <a:spcPct val="125000"/>
+              </a:lnSpc>
+            </a:pPr>
+            <a:r>
+              <a:rPr sz="1800" b="0" i="0">
+                <a:solidFill>
+                  <a:srgbClr val="9BAFA4"/>
+                </a:solidFill>
+                <a:latin typeface="Archivo"/>
+              </a:rPr>
+              <a:t>Solo concepto, evidencia y estatus.</a:t>
+            </a:r>
+          </a:p>
+        </p:txBody>
+      </p:sp>
+      <p:cxnSp>
+        <p:nvCxnSpPr>
+          <p:cNvPr id="6" name="Connector 5"/>
+          <p:cNvCxnSpPr/>
+          <p:nvPr/>
+        </p:nvCxnSpPr>
+        <p:spPr>
+          <a:xfrm>
+            <a:off x="640080" y="6400800"/>
+            <a:ext cx="10911535" cy="0"/>
+          </a:xfrm>
+          <a:prstGeom prst="line">
+            <a:avLst/>
+          </a:prstGeom>
+          <a:ln w="6350">
+            <a:solidFill>
+              <a:srgbClr val="607E70"/>
+            </a:solidFill>
+          </a:ln>
+        </p:spPr>
+        <p:style>
+          <a:lnRef idx="2">
+            <a:schemeClr val="accent1"/>
+          </a:lnRef>
+          <a:fillRef idx="0">
+            <a:schemeClr val="accent1"/>
+          </a:fillRef>
+          <a:effectRef idx="1">
+            <a:schemeClr val="accent1"/>
+          </a:effectRef>
+          <a:fontRef idx="minor">
+            <a:schemeClr val="tx1"/>
+          </a:fontRef>
+        </p:style>
+      </p:cxnSp>
+      <p:sp>
+        <p:nvSpPr>
+          <p:cNvPr id="7" name="TextBox 6"/>
+          <p:cNvSpPr txBox="1"/>
+          <p:nvPr/>
+        </p:nvSpPr>
+        <p:spPr>
+          <a:xfrm>
+            <a:off x="640080" y="6473952"/>
+            <a:ext cx="7772400" cy="256032"/>
+          </a:xfrm>
+          <a:prstGeom prst="rect">
+            <a:avLst/>
+          </a:prstGeom>
+          <a:noFill/>
+        </p:spPr>
+        <p:txBody>
+          <a:bodyPr wrap="square" lIns="0" rIns="0" tIns="0" bIns="0" anchor="ctr">
+            <a:spAutoFit/>
+          </a:bodyPr>
+          <a:lstStyle/>
+          <a:p>
+            <a:pPr algn="l">
+              <a:lnSpc>
+                <a:spcPct val="100000"/>
+              </a:lnSpc>
+            </a:pPr>
+            <a:r>
+              <a:rPr sz="950" b="0" i="0">
+                <a:solidFill>
+                  <a:srgbClr val="9BAFA4"/>
+                </a:solidFill>
+                <a:latin typeface="Archivo"/>
+              </a:rPr>
+              <a:t>Dr. Marco Sosa · Péptidos: qué son y para qué se usan</a:t>
+            </a:r>
+          </a:p>
+        </p:txBody>
+      </p:sp>
+      <p:sp>
+        <p:nvSpPr>
+          <p:cNvPr id="8" name="TextBox 7"/>
+          <p:cNvSpPr txBox="1"/>
+          <p:nvPr/>
+        </p:nvSpPr>
+        <p:spPr>
+          <a:xfrm>
+            <a:off x="10454335" y="6473952"/>
+            <a:ext cx="1097280" cy="256032"/>
+          </a:xfrm>
+          <a:prstGeom prst="rect">
+            <a:avLst/>
+          </a:prstGeom>
+          <a:noFill/>
+        </p:spPr>
+        <p:txBody>
+          <a:bodyPr wrap="square" lIns="0" rIns="0" tIns="0" bIns="0" anchor="ctr">
+            <a:spAutoFit/>
+          </a:bodyPr>
+          <a:lstStyle/>
+          <a:p>
+            <a:pPr algn="r">
+              <a:lnSpc>
+                <a:spcPct val="100000"/>
+              </a:lnSpc>
+            </a:pPr>
+            <a:r>
+              <a:rPr sz="950" b="0" i="0">
+                <a:solidFill>
+                  <a:srgbClr val="9BAFA4"/>
+                </a:solidFill>
+                <a:latin typeface="Archivo"/>
+              </a:rPr>
+              <a:t>40 / 51</a:t>
+            </a:r>
+          </a:p>
+        </p:txBody>
+      </p:sp>
+    </p:spTree>
+  </p:cSld>
+  <p:clrMapOvr>
+    <a:masterClrMapping/>
+  </p:clrMapOvr>
+</p:sld>
+</file>
+
+<file path=ppt/slides/slide41.xml><?xml version="1.0" encoding="utf-8"?>
 <p:sld xmlns:a="http://schemas.openxmlformats.org/drawingml/2006/main" xmlns:p="http://schemas.openxmlformats.org/presentationml/2006/main" xmlns:r="http://schemas.openxmlformats.org/officeDocument/2006/relationships">
   <p:cSld>
     <p:bg>
@@ -30201,829 +30622,7 @@
                 </a:solidFill>
                 <a:latin typeface="Archivo"/>
               </a:rPr>
-              <a:t>40 / 49</a:t>
-            </a:r>
-          </a:p>
-        </p:txBody>
-      </p:sp>
-    </p:spTree>
-  </p:cSld>
-  <p:clrMapOvr>
-    <a:masterClrMapping/>
-  </p:clrMapOvr>
-</p:sld>
-</file>
-
-<file path=ppt/slides/slide41.xml><?xml version="1.0" encoding="utf-8"?>
-<p:sld xmlns:a="http://schemas.openxmlformats.org/drawingml/2006/main" xmlns:p="http://schemas.openxmlformats.org/presentationml/2006/main" xmlns:r="http://schemas.openxmlformats.org/officeDocument/2006/relationships">
-  <p:cSld>
-    <p:bg>
-      <p:bgPr>
-        <a:solidFill>
-          <a:srgbClr val="F7F1E5"/>
-        </a:solidFill>
-        <a:effectLst/>
-      </p:bgPr>
-    </p:bg>
-    <p:spTree>
-      <p:nvGrpSpPr>
-        <p:cNvPr id="1" name=""/>
-        <p:cNvGrpSpPr/>
-        <p:nvPr/>
-      </p:nvGrpSpPr>
-      <p:grpSpPr/>
-      <p:sp>
-        <p:nvSpPr>
-          <p:cNvPr id="2" name="Rounded Rectangle 1"/>
-          <p:cNvSpPr/>
-          <p:nvPr/>
-        </p:nvSpPr>
-        <p:spPr>
-          <a:xfrm>
-            <a:off x="640080" y="502920"/>
-            <a:ext cx="1628912" cy="310896"/>
-          </a:xfrm>
-          <a:prstGeom prst="roundRect">
-            <a:avLst>
-              <a:gd name="adj" fmla="val 11764"/>
-            </a:avLst>
-          </a:prstGeom>
-          <a:solidFill>
-            <a:srgbClr val="E4AA18"/>
-          </a:solidFill>
-          <a:ln>
-            <a:noFill/>
-          </a:ln>
-          <a:effectLst/>
-        </p:spPr>
-        <p:style>
-          <a:lnRef idx="1">
-            <a:schemeClr val="accent1"/>
-          </a:lnRef>
-          <a:fillRef idx="3">
-            <a:schemeClr val="accent1"/>
-          </a:fillRef>
-          <a:effectRef idx="2">
-            <a:schemeClr val="accent1"/>
-          </a:effectRef>
-          <a:fontRef idx="minor">
-            <a:schemeClr val="lt1"/>
-          </a:fontRef>
-        </p:style>
-        <p:txBody>
-          <a:bodyPr rtlCol="0" anchor="ctr"/>
-          <a:lstStyle/>
-          <a:p>
-            <a:pPr algn="ctr"/>
-          </a:p>
-        </p:txBody>
-      </p:sp>
-      <p:sp>
-        <p:nvSpPr>
-          <p:cNvPr id="3" name="TextBox 2"/>
-          <p:cNvSpPr txBox="1"/>
-          <p:nvPr/>
-        </p:nvSpPr>
-        <p:spPr>
-          <a:xfrm>
-            <a:off x="640080" y="502920"/>
-            <a:ext cx="1628912" cy="310896"/>
-          </a:xfrm>
-          <a:prstGeom prst="rect">
-            <a:avLst/>
-          </a:prstGeom>
-          <a:noFill/>
-        </p:spPr>
-        <p:txBody>
-          <a:bodyPr wrap="square" lIns="0" rIns="0" tIns="0" bIns="0" anchor="ctr">
-            <a:spAutoFit/>
-          </a:bodyPr>
-          <a:lstStyle/>
-          <a:p>
-            <a:pPr algn="ctr">
-              <a:lnSpc>
-                <a:spcPct val="110000"/>
-              </a:lnSpc>
-            </a:pPr>
-            <a:r>
-              <a:rPr sz="1100" b="1" i="0" spc="80">
-                <a:solidFill>
-                  <a:srgbClr val="173F33"/>
-                </a:solidFill>
-                <a:latin typeface="Archivo"/>
-              </a:rPr>
-              <a:t>CICATRIZACIÓN</a:t>
-            </a:r>
-          </a:p>
-        </p:txBody>
-      </p:sp>
-      <p:sp>
-        <p:nvSpPr>
-          <p:cNvPr id="4" name="TextBox 3"/>
-          <p:cNvSpPr txBox="1"/>
-          <p:nvPr/>
-        </p:nvSpPr>
-        <p:spPr>
-          <a:xfrm>
-            <a:off x="640080" y="932688"/>
-            <a:ext cx="10911535" cy="1097280"/>
-          </a:xfrm>
-          <a:prstGeom prst="rect">
-            <a:avLst/>
-          </a:prstGeom>
-          <a:noFill/>
-        </p:spPr>
-        <p:txBody>
-          <a:bodyPr wrap="square" lIns="0" rIns="0" tIns="0" bIns="0" anchor="t">
-            <a:spAutoFit/>
-          </a:bodyPr>
-          <a:lstStyle/>
-          <a:p>
-            <a:pPr algn="l">
-              <a:lnSpc>
-                <a:spcPct val="100000"/>
-              </a:lnSpc>
-            </a:pPr>
-            <a:r>
-              <a:rPr sz="3200" b="1" i="0">
-                <a:solidFill>
-                  <a:srgbClr val="15261F"/>
-                </a:solidFill>
-                <a:latin typeface="Fraunces"/>
-              </a:rPr>
-              <a:t>Cuatro fases superpuestas</a:t>
-            </a:r>
-          </a:p>
-        </p:txBody>
-      </p:sp>
-      <p:sp>
-        <p:nvSpPr>
-          <p:cNvPr id="5" name="Rounded Rectangle 4"/>
-          <p:cNvSpPr/>
-          <p:nvPr/>
-        </p:nvSpPr>
-        <p:spPr>
-          <a:xfrm>
-            <a:off x="640080" y="2240280"/>
-            <a:ext cx="5327751" cy="1700784"/>
-          </a:xfrm>
-          <a:prstGeom prst="roundRect">
-            <a:avLst>
-              <a:gd name="adj" fmla="val 4301"/>
-            </a:avLst>
-          </a:prstGeom>
-          <a:solidFill>
-            <a:srgbClr val="E4EDE7"/>
-          </a:solidFill>
-          <a:ln>
-            <a:noFill/>
-          </a:ln>
-          <a:effectLst/>
-        </p:spPr>
-        <p:style>
-          <a:lnRef idx="1">
-            <a:schemeClr val="accent1"/>
-          </a:lnRef>
-          <a:fillRef idx="3">
-            <a:schemeClr val="accent1"/>
-          </a:fillRef>
-          <a:effectRef idx="2">
-            <a:schemeClr val="accent1"/>
-          </a:effectRef>
-          <a:fontRef idx="minor">
-            <a:schemeClr val="lt1"/>
-          </a:fontRef>
-        </p:style>
-        <p:txBody>
-          <a:bodyPr rtlCol="0" anchor="ctr"/>
-          <a:lstStyle/>
-          <a:p>
-            <a:pPr algn="ctr"/>
-          </a:p>
-        </p:txBody>
-      </p:sp>
-      <p:sp>
-        <p:nvSpPr>
-          <p:cNvPr id="6" name="TextBox 5"/>
-          <p:cNvSpPr txBox="1"/>
-          <p:nvPr/>
-        </p:nvSpPr>
-        <p:spPr>
-          <a:xfrm>
-            <a:off x="896112" y="2468880"/>
-            <a:ext cx="4815687" cy="409447"/>
-          </a:xfrm>
-          <a:prstGeom prst="rect">
-            <a:avLst/>
-          </a:prstGeom>
-          <a:noFill/>
-        </p:spPr>
-        <p:txBody>
-          <a:bodyPr wrap="square" lIns="0" rIns="0" tIns="0" bIns="0" anchor="t">
-            <a:spAutoFit/>
-          </a:bodyPr>
-          <a:lstStyle/>
-          <a:p>
-            <a:pPr algn="l">
-              <a:lnSpc>
-                <a:spcPct val="105000"/>
-              </a:lnSpc>
-            </a:pPr>
-            <a:r>
-              <a:rPr sz="2000" b="1" i="0">
-                <a:solidFill>
-                  <a:srgbClr val="173F33"/>
-                </a:solidFill>
-                <a:latin typeface="Archivo"/>
-              </a:rPr>
-              <a:t>Hemostasia</a:t>
-            </a:r>
-          </a:p>
-        </p:txBody>
-      </p:sp>
-      <p:sp>
-        <p:nvSpPr>
-          <p:cNvPr id="7" name="TextBox 6"/>
-          <p:cNvSpPr txBox="1"/>
-          <p:nvPr/>
-        </p:nvSpPr>
-        <p:spPr>
-          <a:xfrm>
-            <a:off x="896112" y="2951480"/>
-            <a:ext cx="4815687" cy="788416"/>
-          </a:xfrm>
-          <a:prstGeom prst="rect">
-            <a:avLst/>
-          </a:prstGeom>
-          <a:noFill/>
-        </p:spPr>
-        <p:txBody>
-          <a:bodyPr wrap="square" lIns="0" rIns="0" tIns="0" bIns="0" anchor="t">
-            <a:spAutoFit/>
-          </a:bodyPr>
-          <a:lstStyle/>
-          <a:p>
-            <a:pPr algn="l">
-              <a:lnSpc>
-                <a:spcPct val="115000"/>
-              </a:lnSpc>
-            </a:pPr>
-            <a:r>
-              <a:rPr sz="1600" b="0" i="0">
-                <a:solidFill>
-                  <a:srgbClr val="15261F"/>
-                </a:solidFill>
-                <a:latin typeface="Archivo"/>
-              </a:rPr>
-              <a:t>Se detiene el sangrado.</a:t>
-            </a:r>
-          </a:p>
-        </p:txBody>
-      </p:sp>
-      <p:sp>
-        <p:nvSpPr>
-          <p:cNvPr id="8" name="Rounded Rectangle 7"/>
-          <p:cNvSpPr/>
-          <p:nvPr/>
-        </p:nvSpPr>
-        <p:spPr>
-          <a:xfrm>
-            <a:off x="6223863" y="2240280"/>
-            <a:ext cx="5327751" cy="1700784"/>
-          </a:xfrm>
-          <a:prstGeom prst="roundRect">
-            <a:avLst>
-              <a:gd name="adj" fmla="val 4301"/>
-            </a:avLst>
-          </a:prstGeom>
-          <a:solidFill>
-            <a:srgbClr val="E4EDE7"/>
-          </a:solidFill>
-          <a:ln>
-            <a:noFill/>
-          </a:ln>
-          <a:effectLst/>
-        </p:spPr>
-        <p:style>
-          <a:lnRef idx="1">
-            <a:schemeClr val="accent1"/>
-          </a:lnRef>
-          <a:fillRef idx="3">
-            <a:schemeClr val="accent1"/>
-          </a:fillRef>
-          <a:effectRef idx="2">
-            <a:schemeClr val="accent1"/>
-          </a:effectRef>
-          <a:fontRef idx="minor">
-            <a:schemeClr val="lt1"/>
-          </a:fontRef>
-        </p:style>
-        <p:txBody>
-          <a:bodyPr rtlCol="0" anchor="ctr"/>
-          <a:lstStyle/>
-          <a:p>
-            <a:pPr algn="ctr"/>
-          </a:p>
-        </p:txBody>
-      </p:sp>
-      <p:sp>
-        <p:nvSpPr>
-          <p:cNvPr id="9" name="TextBox 8"/>
-          <p:cNvSpPr txBox="1"/>
-          <p:nvPr/>
-        </p:nvSpPr>
-        <p:spPr>
-          <a:xfrm>
-            <a:off x="6479895" y="2468880"/>
-            <a:ext cx="4815687" cy="409447"/>
-          </a:xfrm>
-          <a:prstGeom prst="rect">
-            <a:avLst/>
-          </a:prstGeom>
-          <a:noFill/>
-        </p:spPr>
-        <p:txBody>
-          <a:bodyPr wrap="square" lIns="0" rIns="0" tIns="0" bIns="0" anchor="t">
-            <a:spAutoFit/>
-          </a:bodyPr>
-          <a:lstStyle/>
-          <a:p>
-            <a:pPr algn="l">
-              <a:lnSpc>
-                <a:spcPct val="105000"/>
-              </a:lnSpc>
-            </a:pPr>
-            <a:r>
-              <a:rPr sz="2000" b="1" i="0">
-                <a:solidFill>
-                  <a:srgbClr val="173F33"/>
-                </a:solidFill>
-                <a:latin typeface="Archivo"/>
-              </a:rPr>
-              <a:t>Inflamación</a:t>
-            </a:r>
-          </a:p>
-        </p:txBody>
-      </p:sp>
-      <p:sp>
-        <p:nvSpPr>
-          <p:cNvPr id="10" name="TextBox 9"/>
-          <p:cNvSpPr txBox="1"/>
-          <p:nvPr/>
-        </p:nvSpPr>
-        <p:spPr>
-          <a:xfrm>
-            <a:off x="6479895" y="2951480"/>
-            <a:ext cx="4815687" cy="788416"/>
-          </a:xfrm>
-          <a:prstGeom prst="rect">
-            <a:avLst/>
-          </a:prstGeom>
-          <a:noFill/>
-        </p:spPr>
-        <p:txBody>
-          <a:bodyPr wrap="square" lIns="0" rIns="0" tIns="0" bIns="0" anchor="t">
-            <a:spAutoFit/>
-          </a:bodyPr>
-          <a:lstStyle/>
-          <a:p>
-            <a:pPr algn="l">
-              <a:lnSpc>
-                <a:spcPct val="115000"/>
-              </a:lnSpc>
-            </a:pPr>
-            <a:r>
-              <a:rPr sz="1600" b="0" i="0">
-                <a:solidFill>
-                  <a:srgbClr val="15261F"/>
-                </a:solidFill>
-                <a:latin typeface="Archivo"/>
-              </a:rPr>
-              <a:t>Limpia y alerta al tejido.</a:t>
-            </a:r>
-          </a:p>
-        </p:txBody>
-      </p:sp>
-      <p:sp>
-        <p:nvSpPr>
-          <p:cNvPr id="11" name="Rounded Rectangle 10"/>
-          <p:cNvSpPr/>
-          <p:nvPr/>
-        </p:nvSpPr>
-        <p:spPr>
-          <a:xfrm>
-            <a:off x="640080" y="4197096"/>
-            <a:ext cx="5327751" cy="1700784"/>
-          </a:xfrm>
-          <a:prstGeom prst="roundRect">
-            <a:avLst>
-              <a:gd name="adj" fmla="val 4301"/>
-            </a:avLst>
-          </a:prstGeom>
-          <a:solidFill>
-            <a:srgbClr val="E4EDE7"/>
-          </a:solidFill>
-          <a:ln>
-            <a:noFill/>
-          </a:ln>
-          <a:effectLst/>
-        </p:spPr>
-        <p:style>
-          <a:lnRef idx="1">
-            <a:schemeClr val="accent1"/>
-          </a:lnRef>
-          <a:fillRef idx="3">
-            <a:schemeClr val="accent1"/>
-          </a:fillRef>
-          <a:effectRef idx="2">
-            <a:schemeClr val="accent1"/>
-          </a:effectRef>
-          <a:fontRef idx="minor">
-            <a:schemeClr val="lt1"/>
-          </a:fontRef>
-        </p:style>
-        <p:txBody>
-          <a:bodyPr rtlCol="0" anchor="ctr"/>
-          <a:lstStyle/>
-          <a:p>
-            <a:pPr algn="ctr"/>
-          </a:p>
-        </p:txBody>
-      </p:sp>
-      <p:sp>
-        <p:nvSpPr>
-          <p:cNvPr id="12" name="TextBox 11"/>
-          <p:cNvSpPr txBox="1"/>
-          <p:nvPr/>
-        </p:nvSpPr>
-        <p:spPr>
-          <a:xfrm>
-            <a:off x="896112" y="4425696"/>
-            <a:ext cx="4815687" cy="409447"/>
-          </a:xfrm>
-          <a:prstGeom prst="rect">
-            <a:avLst/>
-          </a:prstGeom>
-          <a:noFill/>
-        </p:spPr>
-        <p:txBody>
-          <a:bodyPr wrap="square" lIns="0" rIns="0" tIns="0" bIns="0" anchor="t">
-            <a:spAutoFit/>
-          </a:bodyPr>
-          <a:lstStyle/>
-          <a:p>
-            <a:pPr algn="l">
-              <a:lnSpc>
-                <a:spcPct val="105000"/>
-              </a:lnSpc>
-            </a:pPr>
-            <a:r>
-              <a:rPr sz="2000" b="1" i="0">
-                <a:solidFill>
-                  <a:srgbClr val="173F33"/>
-                </a:solidFill>
-                <a:latin typeface="Archivo"/>
-              </a:rPr>
-              <a:t>Proliferación</a:t>
-            </a:r>
-          </a:p>
-        </p:txBody>
-      </p:sp>
-      <p:sp>
-        <p:nvSpPr>
-          <p:cNvPr id="13" name="TextBox 12"/>
-          <p:cNvSpPr txBox="1"/>
-          <p:nvPr/>
-        </p:nvSpPr>
-        <p:spPr>
-          <a:xfrm>
-            <a:off x="896112" y="4908296"/>
-            <a:ext cx="4815687" cy="788416"/>
-          </a:xfrm>
-          <a:prstGeom prst="rect">
-            <a:avLst/>
-          </a:prstGeom>
-          <a:noFill/>
-        </p:spPr>
-        <p:txBody>
-          <a:bodyPr wrap="square" lIns="0" rIns="0" tIns="0" bIns="0" anchor="t">
-            <a:spAutoFit/>
-          </a:bodyPr>
-          <a:lstStyle/>
-          <a:p>
-            <a:pPr algn="l">
-              <a:lnSpc>
-                <a:spcPct val="115000"/>
-              </a:lnSpc>
-            </a:pPr>
-            <a:r>
-              <a:rPr sz="1600" b="0" i="0">
-                <a:solidFill>
-                  <a:srgbClr val="15261F"/>
-                </a:solidFill>
-                <a:latin typeface="Archivo"/>
-              </a:rPr>
-              <a:t>Se forman vasos y tejido nuevo.</a:t>
-            </a:r>
-          </a:p>
-        </p:txBody>
-      </p:sp>
-      <p:sp>
-        <p:nvSpPr>
-          <p:cNvPr id="14" name="Rounded Rectangle 13"/>
-          <p:cNvSpPr/>
-          <p:nvPr/>
-        </p:nvSpPr>
-        <p:spPr>
-          <a:xfrm>
-            <a:off x="6223863" y="4197096"/>
-            <a:ext cx="5327751" cy="1700784"/>
-          </a:xfrm>
-          <a:prstGeom prst="roundRect">
-            <a:avLst>
-              <a:gd name="adj" fmla="val 4301"/>
-            </a:avLst>
-          </a:prstGeom>
-          <a:solidFill>
-            <a:srgbClr val="E4EDE7"/>
-          </a:solidFill>
-          <a:ln>
-            <a:noFill/>
-          </a:ln>
-          <a:effectLst/>
-        </p:spPr>
-        <p:style>
-          <a:lnRef idx="1">
-            <a:schemeClr val="accent1"/>
-          </a:lnRef>
-          <a:fillRef idx="3">
-            <a:schemeClr val="accent1"/>
-          </a:fillRef>
-          <a:effectRef idx="2">
-            <a:schemeClr val="accent1"/>
-          </a:effectRef>
-          <a:fontRef idx="minor">
-            <a:schemeClr val="lt1"/>
-          </a:fontRef>
-        </p:style>
-        <p:txBody>
-          <a:bodyPr rtlCol="0" anchor="ctr"/>
-          <a:lstStyle/>
-          <a:p>
-            <a:pPr algn="ctr"/>
-          </a:p>
-        </p:txBody>
-      </p:sp>
-      <p:sp>
-        <p:nvSpPr>
-          <p:cNvPr id="15" name="TextBox 14"/>
-          <p:cNvSpPr txBox="1"/>
-          <p:nvPr/>
-        </p:nvSpPr>
-        <p:spPr>
-          <a:xfrm>
-            <a:off x="6479895" y="4425696"/>
-            <a:ext cx="4815687" cy="409447"/>
-          </a:xfrm>
-          <a:prstGeom prst="rect">
-            <a:avLst/>
-          </a:prstGeom>
-          <a:noFill/>
-        </p:spPr>
-        <p:txBody>
-          <a:bodyPr wrap="square" lIns="0" rIns="0" tIns="0" bIns="0" anchor="t">
-            <a:spAutoFit/>
-          </a:bodyPr>
-          <a:lstStyle/>
-          <a:p>
-            <a:pPr algn="l">
-              <a:lnSpc>
-                <a:spcPct val="105000"/>
-              </a:lnSpc>
-            </a:pPr>
-            <a:r>
-              <a:rPr sz="2000" b="1" i="0">
-                <a:solidFill>
-                  <a:srgbClr val="173F33"/>
-                </a:solidFill>
-                <a:latin typeface="Archivo"/>
-              </a:rPr>
-              <a:t>Remodelación</a:t>
-            </a:r>
-          </a:p>
-        </p:txBody>
-      </p:sp>
-      <p:sp>
-        <p:nvSpPr>
-          <p:cNvPr id="16" name="TextBox 15"/>
-          <p:cNvSpPr txBox="1"/>
-          <p:nvPr/>
-        </p:nvSpPr>
-        <p:spPr>
-          <a:xfrm>
-            <a:off x="6479895" y="4908296"/>
-            <a:ext cx="4815687" cy="788416"/>
-          </a:xfrm>
-          <a:prstGeom prst="rect">
-            <a:avLst/>
-          </a:prstGeom>
-          <a:noFill/>
-        </p:spPr>
-        <p:txBody>
-          <a:bodyPr wrap="square" lIns="0" rIns="0" tIns="0" bIns="0" anchor="t">
-            <a:spAutoFit/>
-          </a:bodyPr>
-          <a:lstStyle/>
-          <a:p>
-            <a:pPr algn="l">
-              <a:lnSpc>
-                <a:spcPct val="115000"/>
-              </a:lnSpc>
-            </a:pPr>
-            <a:r>
-              <a:rPr sz="1600" b="0" i="0">
-                <a:solidFill>
-                  <a:srgbClr val="15261F"/>
-                </a:solidFill>
-                <a:latin typeface="Archivo"/>
-              </a:rPr>
-              <a:t>El tejido madura.</a:t>
-            </a:r>
-          </a:p>
-        </p:txBody>
-      </p:sp>
-      <p:sp>
-        <p:nvSpPr>
-          <p:cNvPr id="17" name="TextBox 16"/>
-          <p:cNvSpPr txBox="1"/>
-          <p:nvPr/>
-        </p:nvSpPr>
-        <p:spPr>
-          <a:xfrm>
-            <a:off x="640080" y="6053328"/>
-            <a:ext cx="10911535" cy="274320"/>
-          </a:xfrm>
-          <a:prstGeom prst="rect">
-            <a:avLst/>
-          </a:prstGeom>
-          <a:noFill/>
-        </p:spPr>
-        <p:txBody>
-          <a:bodyPr wrap="square" lIns="0" rIns="0" tIns="0" bIns="0" anchor="t">
-            <a:spAutoFit/>
-          </a:bodyPr>
-          <a:lstStyle/>
-          <a:p>
-            <a:pPr algn="l">
-              <a:lnSpc>
-                <a:spcPct val="100000"/>
-              </a:lnSpc>
-            </a:pPr>
-            <a:r>
-              <a:rPr sz="1000" b="0" i="0">
-                <a:solidFill>
-                  <a:srgbClr val="607E70"/>
-                </a:solidFill>
-                <a:latin typeface="Archivo"/>
-              </a:rPr>
-              <a:t>Fuente: presentación del Dr. Marco, diap. 111 y 112.</a:t>
-            </a:r>
-          </a:p>
-        </p:txBody>
-      </p:sp>
-      <p:cxnSp>
-        <p:nvCxnSpPr>
-          <p:cNvPr id="18" name="Connector 17"/>
-          <p:cNvCxnSpPr/>
-          <p:nvPr/>
-        </p:nvCxnSpPr>
-        <p:spPr>
-          <a:xfrm>
-            <a:off x="640080" y="6400800"/>
-            <a:ext cx="10911535" cy="0"/>
-          </a:xfrm>
-          <a:prstGeom prst="line">
-            <a:avLst/>
-          </a:prstGeom>
-          <a:ln w="6350">
-            <a:solidFill>
-              <a:srgbClr val="9BAFA4"/>
-            </a:solidFill>
-          </a:ln>
-        </p:spPr>
-        <p:style>
-          <a:lnRef idx="2">
-            <a:schemeClr val="accent1"/>
-          </a:lnRef>
-          <a:fillRef idx="0">
-            <a:schemeClr val="accent1"/>
-          </a:fillRef>
-          <a:effectRef idx="1">
-            <a:schemeClr val="accent1"/>
-          </a:effectRef>
-          <a:fontRef idx="minor">
-            <a:schemeClr val="tx1"/>
-          </a:fontRef>
-        </p:style>
-      </p:cxnSp>
-      <p:pic>
-        <p:nvPicPr>
-          <p:cNvPr id="19" name="Picture 18" descr="monograma.png"/>
-          <p:cNvPicPr>
-            <a:picLocks noChangeAspect="1"/>
-          </p:cNvPicPr>
-          <p:nvPr/>
-        </p:nvPicPr>
-        <p:blipFill>
-          <a:blip r:embed="rId2"/>
-          <a:stretch>
-            <a:fillRect/>
-          </a:stretch>
-        </p:blipFill>
-        <p:spPr>
-          <a:xfrm>
-            <a:off x="640080" y="6467557"/>
-            <a:ext cx="329184" cy="259677"/>
-          </a:xfrm>
-          <a:prstGeom prst="rect">
-            <a:avLst/>
-          </a:prstGeom>
-        </p:spPr>
-      </p:pic>
-      <p:sp>
-        <p:nvSpPr>
-          <p:cNvPr id="20" name="TextBox 19"/>
-          <p:cNvSpPr txBox="1"/>
-          <p:nvPr/>
-        </p:nvSpPr>
-        <p:spPr>
-          <a:xfrm>
-            <a:off x="1097280" y="6473952"/>
-            <a:ext cx="7772400" cy="256032"/>
-          </a:xfrm>
-          <a:prstGeom prst="rect">
-            <a:avLst/>
-          </a:prstGeom>
-          <a:noFill/>
-        </p:spPr>
-        <p:txBody>
-          <a:bodyPr wrap="square" lIns="0" rIns="0" tIns="0" bIns="0" anchor="ctr">
-            <a:spAutoFit/>
-          </a:bodyPr>
-          <a:lstStyle/>
-          <a:p>
-            <a:pPr algn="l">
-              <a:lnSpc>
-                <a:spcPct val="100000"/>
-              </a:lnSpc>
-            </a:pPr>
-            <a:r>
-              <a:rPr sz="950" b="0" i="0">
-                <a:solidFill>
-                  <a:srgbClr val="607E70"/>
-                </a:solidFill>
-                <a:latin typeface="Archivo"/>
-              </a:rPr>
-              <a:t>Dr. Marco Sosa · Péptidos: qué son y para qué se usan</a:t>
-            </a:r>
-          </a:p>
-        </p:txBody>
-      </p:sp>
-      <p:sp>
-        <p:nvSpPr>
-          <p:cNvPr id="21" name="TextBox 20"/>
-          <p:cNvSpPr txBox="1"/>
-          <p:nvPr/>
-        </p:nvSpPr>
-        <p:spPr>
-          <a:xfrm>
-            <a:off x="10454335" y="6473952"/>
-            <a:ext cx="1097280" cy="256032"/>
-          </a:xfrm>
-          <a:prstGeom prst="rect">
-            <a:avLst/>
-          </a:prstGeom>
-          <a:noFill/>
-        </p:spPr>
-        <p:txBody>
-          <a:bodyPr wrap="square" lIns="0" rIns="0" tIns="0" bIns="0" anchor="ctr">
-            <a:spAutoFit/>
-          </a:bodyPr>
-          <a:lstStyle/>
-          <a:p>
-            <a:pPr algn="r">
-              <a:lnSpc>
-                <a:spcPct val="100000"/>
-              </a:lnSpc>
-            </a:pPr>
-            <a:r>
-              <a:rPr sz="950" b="0" i="0">
-                <a:solidFill>
-                  <a:srgbClr val="607E70"/>
-                </a:solidFill>
-                <a:latin typeface="Archivo"/>
-              </a:rPr>
-              <a:t>41 / 49</a:t>
+              <a:t>41 / 51</a:t>
             </a:r>
           </a:p>
         </p:txBody>
@@ -31063,7 +30662,7 @@
         <p:spPr>
           <a:xfrm>
             <a:off x="640080" y="502920"/>
-            <a:ext cx="1727484" cy="310896"/>
+            <a:ext cx="1628912" cy="310896"/>
           </a:xfrm>
           <a:prstGeom prst="roundRect">
             <a:avLst>
@@ -31109,7 +30708,7 @@
         <p:spPr>
           <a:xfrm>
             <a:off x="640080" y="502920"/>
-            <a:ext cx="1727484" cy="310896"/>
+            <a:ext cx="1628912" cy="310896"/>
           </a:xfrm>
           <a:prstGeom prst="rect">
             <a:avLst/>
@@ -31134,7 +30733,7 @@
                 </a:solidFill>
                 <a:latin typeface="Archivo"/>
               </a:rPr>
-              <a:t>LO QUE SABEMOS</a:t>
+              <a:t>CICATRIZACIÓN</a:t>
             </a:r>
           </a:p>
         </p:txBody>
@@ -31173,7 +30772,7 @@
                 </a:solidFill>
                 <a:latin typeface="Fraunces"/>
               </a:rPr>
-              <a:t>Péptidos de reparación: evidencia y estatus</a:t>
+              <a:t>Cuatro fases superpuestas</a:t>
             </a:r>
           </a:p>
         </p:txBody>
@@ -31233,7 +30832,7 @@
         <p:spPr>
           <a:xfrm>
             <a:off x="896112" y="2468880"/>
-            <a:ext cx="4815687" cy="394462"/>
+            <a:ext cx="4815687" cy="409447"/>
           </a:xfrm>
           <a:prstGeom prst="rect">
             <a:avLst/>
@@ -31252,13 +30851,13 @@
               </a:lnSpc>
             </a:pPr>
             <a:r>
-              <a:rPr sz="1900" b="1" i="0">
+              <a:rPr sz="2000" b="1" i="0">
                 <a:solidFill>
                   <a:srgbClr val="173F33"/>
                 </a:solidFill>
                 <a:latin typeface="Archivo"/>
               </a:rPr>
-              <a:t>BPC-157 y TB-500</a:t>
+              <a:t>Hemostasia</a:t>
             </a:r>
           </a:p>
         </p:txBody>
@@ -31271,8 +30870,8 @@
         </p:nvSpPr>
         <p:spPr>
           <a:xfrm>
-            <a:off x="896112" y="2936494"/>
-            <a:ext cx="4815687" cy="803401"/>
+            <a:off x="896112" y="2951480"/>
+            <a:ext cx="4815687" cy="788416"/>
           </a:xfrm>
           <a:prstGeom prst="rect">
             <a:avLst/>
@@ -31291,13 +30890,13 @@
               </a:lnSpc>
             </a:pPr>
             <a:r>
-              <a:rPr sz="1500" b="0" i="0">
+              <a:rPr sz="1600" b="0" i="0">
                 <a:solidFill>
                   <a:srgbClr val="15261F"/>
                 </a:solidFill>
                 <a:latin typeface="Archivo"/>
               </a:rPr>
-              <a:t>Casi solo estudios en animales; sin ensayos de fase 3.</a:t>
+              <a:t>Se detiene el sangrado.</a:t>
             </a:r>
           </a:p>
         </p:txBody>
@@ -31357,7 +30956,7 @@
         <p:spPr>
           <a:xfrm>
             <a:off x="6479895" y="2468880"/>
-            <a:ext cx="4815687" cy="394462"/>
+            <a:ext cx="4815687" cy="409447"/>
           </a:xfrm>
           <a:prstGeom prst="rect">
             <a:avLst/>
@@ -31376,13 +30975,13 @@
               </a:lnSpc>
             </a:pPr>
             <a:r>
-              <a:rPr sz="1900" b="1" i="0">
+              <a:rPr sz="2000" b="1" i="0">
                 <a:solidFill>
                   <a:srgbClr val="173F33"/>
                 </a:solidFill>
                 <a:latin typeface="Archivo"/>
               </a:rPr>
-              <a:t>GHK-Cu</a:t>
+              <a:t>Inflamación</a:t>
             </a:r>
           </a:p>
         </p:txBody>
@@ -31395,8 +30994,8 @@
         </p:nvSpPr>
         <p:spPr>
           <a:xfrm>
-            <a:off x="6479895" y="2936494"/>
-            <a:ext cx="4815687" cy="803401"/>
+            <a:off x="6479895" y="2951480"/>
+            <a:ext cx="4815687" cy="788416"/>
           </a:xfrm>
           <a:prstGeom prst="rect">
             <a:avLst/>
@@ -31415,13 +31014,13 @@
               </a:lnSpc>
             </a:pPr>
             <a:r>
-              <a:rPr sz="1500" b="0" i="0">
+              <a:rPr sz="1600" b="0" i="0">
                 <a:solidFill>
                   <a:srgbClr val="15261F"/>
                 </a:solidFill>
                 <a:latin typeface="Archivo"/>
               </a:rPr>
-              <a:t>Cosmético tópico sí; inyectable no aprobado como fármaco.</a:t>
+              <a:t>Limpia y alerta al tejido.</a:t>
             </a:r>
           </a:p>
         </p:txBody>
@@ -31481,7 +31080,7 @@
         <p:spPr>
           <a:xfrm>
             <a:off x="896112" y="4425696"/>
-            <a:ext cx="4815687" cy="394462"/>
+            <a:ext cx="4815687" cy="409447"/>
           </a:xfrm>
           <a:prstGeom prst="rect">
             <a:avLst/>
@@ -31500,13 +31099,13 @@
               </a:lnSpc>
             </a:pPr>
             <a:r>
-              <a:rPr sz="1900" b="1" i="0">
+              <a:rPr sz="2000" b="1" i="0">
                 <a:solidFill>
                   <a:srgbClr val="173F33"/>
                 </a:solidFill>
                 <a:latin typeface="Archivo"/>
               </a:rPr>
-              <a:t>Timosina alfa-1</a:t>
+              <a:t>Proliferación</a:t>
             </a:r>
           </a:p>
         </p:txBody>
@@ -31519,8 +31118,8 @@
         </p:nvSpPr>
         <p:spPr>
           <a:xfrm>
-            <a:off x="896112" y="4893310"/>
-            <a:ext cx="4815687" cy="803401"/>
+            <a:off x="896112" y="4908296"/>
+            <a:ext cx="4815687" cy="788416"/>
           </a:xfrm>
           <a:prstGeom prst="rect">
             <a:avLst/>
@@ -31539,13 +31138,13 @@
               </a:lnSpc>
             </a:pPr>
             <a:r>
-              <a:rPr sz="1500" b="0" i="0">
+              <a:rPr sz="1600" b="0" i="0">
                 <a:solidFill>
                   <a:srgbClr val="15261F"/>
                 </a:solidFill>
                 <a:latin typeface="Archivo"/>
               </a:rPr>
-              <a:t>Aprobada en algunos países para otros usos.</a:t>
+              <a:t>Se forman vasos y tejido nuevo.</a:t>
             </a:r>
           </a:p>
         </p:txBody>
@@ -31605,7 +31204,7 @@
         <p:spPr>
           <a:xfrm>
             <a:off x="6479895" y="4425696"/>
-            <a:ext cx="4815687" cy="394462"/>
+            <a:ext cx="4815687" cy="409447"/>
           </a:xfrm>
           <a:prstGeom prst="rect">
             <a:avLst/>
@@ -31624,13 +31223,13 @@
               </a:lnSpc>
             </a:pPr>
             <a:r>
-              <a:rPr sz="1900" b="1" i="0">
+              <a:rPr sz="2000" b="1" i="0">
                 <a:solidFill>
                   <a:srgbClr val="173F33"/>
                 </a:solidFill>
                 <a:latin typeface="Archivo"/>
               </a:rPr>
-              <a:t>KPV</a:t>
+              <a:t>Remodelación</a:t>
             </a:r>
           </a:p>
         </p:txBody>
@@ -31643,8 +31242,8 @@
         </p:nvSpPr>
         <p:spPr>
           <a:xfrm>
-            <a:off x="6479895" y="4893310"/>
-            <a:ext cx="4815687" cy="803401"/>
+            <a:off x="6479895" y="4908296"/>
+            <a:ext cx="4815687" cy="788416"/>
           </a:xfrm>
           <a:prstGeom prst="rect">
             <a:avLst/>
@@ -31663,13 +31262,13 @@
               </a:lnSpc>
             </a:pPr>
             <a:r>
-              <a:rPr sz="1500" b="0" i="0">
+              <a:rPr sz="1600" b="0" i="0">
                 <a:solidFill>
                   <a:srgbClr val="15261F"/>
                 </a:solidFill>
                 <a:latin typeface="Archivo"/>
               </a:rPr>
-              <a:t>Evidencia preclínica; sin ensayos en humanos.</a:t>
+              <a:t>El tejido madura.</a:t>
             </a:r>
           </a:p>
         </p:txBody>
@@ -31708,7 +31307,7 @@
                 </a:solidFill>
                 <a:latin typeface="Archivo"/>
               </a:rPr>
-              <a:t>Fuente: presentación del Dr. Marco, diap. 94 a 120.</a:t>
+              <a:t>Fuente: presentación del Dr. Marco, diap. 111 y 112.</a:t>
             </a:r>
           </a:p>
         </p:txBody>
@@ -31845,7 +31444,7 @@
                 </a:solidFill>
                 <a:latin typeface="Archivo"/>
               </a:rPr>
-              <a:t>42 / 49</a:t>
+              <a:t>42 / 51</a:t>
             </a:r>
           </a:p>
         </p:txBody>
@@ -31885,7 +31484,7 @@
         <p:spPr>
           <a:xfrm>
             <a:off x="640080" y="502920"/>
-            <a:ext cx="2121773" cy="310896"/>
+            <a:ext cx="1727484" cy="310896"/>
           </a:xfrm>
           <a:prstGeom prst="roundRect">
             <a:avLst>
@@ -31931,7 +31530,7 @@
         <p:spPr>
           <a:xfrm>
             <a:off x="640080" y="502920"/>
-            <a:ext cx="2121773" cy="310896"/>
+            <a:ext cx="1727484" cy="310896"/>
           </a:xfrm>
           <a:prstGeom prst="rect">
             <a:avLst/>
@@ -31956,7 +31555,7 @@
                 </a:solidFill>
                 <a:latin typeface="Archivo"/>
               </a:rPr>
-              <a:t>POR QUÉ LA CAUTELA</a:t>
+              <a:t>LO QUE SABEMOS</a:t>
             </a:r>
           </a:p>
         </p:txBody>
@@ -31995,7 +31594,7 @@
                 </a:solidFill>
                 <a:latin typeface="Fraunces"/>
               </a:rPr>
-              <a:t>Cuatro razones</a:t>
+              <a:t>Péptidos de reparación: evidencia y estatus</a:t>
             </a:r>
           </a:p>
         </p:txBody>
@@ -32055,7 +31654,7 @@
         <p:spPr>
           <a:xfrm>
             <a:off x="896112" y="2468880"/>
-            <a:ext cx="4815687" cy="409447"/>
+            <a:ext cx="4815687" cy="394462"/>
           </a:xfrm>
           <a:prstGeom prst="rect">
             <a:avLst/>
@@ -32074,13 +31673,13 @@
               </a:lnSpc>
             </a:pPr>
             <a:r>
-              <a:rPr sz="2000" b="1" i="0">
+              <a:rPr sz="1900" b="1" i="0">
                 <a:solidFill>
                   <a:srgbClr val="173F33"/>
                 </a:solidFill>
                 <a:latin typeface="Archivo"/>
               </a:rPr>
-              <a:t>Datos humanos</a:t>
+              <a:t>BPC-157 y TB-500</a:t>
             </a:r>
           </a:p>
         </p:txBody>
@@ -32093,8 +31692,8 @@
         </p:nvSpPr>
         <p:spPr>
           <a:xfrm>
-            <a:off x="896112" y="2951480"/>
-            <a:ext cx="4815687" cy="788416"/>
+            <a:off x="896112" y="2936494"/>
+            <a:ext cx="4815687" cy="803401"/>
           </a:xfrm>
           <a:prstGeom prst="rect">
             <a:avLst/>
@@ -32113,13 +31712,13 @@
               </a:lnSpc>
             </a:pPr>
             <a:r>
-              <a:rPr sz="1600" b="0" i="0">
+              <a:rPr sz="1500" b="0" i="0">
                 <a:solidFill>
                   <a:srgbClr val="15261F"/>
                 </a:solidFill>
                 <a:latin typeface="Archivo"/>
               </a:rPr>
-              <a:t>Muy pocos y sin grupo control.</a:t>
+              <a:t>Casi solo estudios en animales; sin ensayos de fase 3.</a:t>
             </a:r>
           </a:p>
         </p:txBody>
@@ -32179,7 +31778,7 @@
         <p:spPr>
           <a:xfrm>
             <a:off x="6479895" y="2468880"/>
-            <a:ext cx="4815687" cy="409447"/>
+            <a:ext cx="4815687" cy="394462"/>
           </a:xfrm>
           <a:prstGeom prst="rect">
             <a:avLst/>
@@ -32198,13 +31797,13 @@
               </a:lnSpc>
             </a:pPr>
             <a:r>
-              <a:rPr sz="2000" b="1" i="0">
+              <a:rPr sz="1900" b="1" i="0">
                 <a:solidFill>
                   <a:srgbClr val="173F33"/>
                 </a:solidFill>
                 <a:latin typeface="Archivo"/>
               </a:rPr>
-              <a:t>Pureza</a:t>
+              <a:t>GHK-Cu</a:t>
             </a:r>
           </a:p>
         </p:txBody>
@@ -32217,8 +31816,8 @@
         </p:nvSpPr>
         <p:spPr>
           <a:xfrm>
-            <a:off x="6479895" y="2951480"/>
-            <a:ext cx="4815687" cy="788416"/>
+            <a:off x="6479895" y="2936494"/>
+            <a:ext cx="4815687" cy="803401"/>
           </a:xfrm>
           <a:prstGeom prst="rect">
             <a:avLst/>
@@ -32237,13 +31836,13 @@
               </a:lnSpc>
             </a:pPr>
             <a:r>
-              <a:rPr sz="1600" b="0" i="0">
+              <a:rPr sz="1500" b="0" i="0">
                 <a:solidFill>
                   <a:srgbClr val="15261F"/>
                 </a:solidFill>
                 <a:latin typeface="Archivo"/>
               </a:rPr>
-              <a:t>Variable entre proveedores.</a:t>
+              <a:t>Cosmético tópico sí; inyectable no aprobado como fármaco.</a:t>
             </a:r>
           </a:p>
         </p:txBody>
@@ -32303,7 +31902,7 @@
         <p:spPr>
           <a:xfrm>
             <a:off x="896112" y="4425696"/>
-            <a:ext cx="4815687" cy="409447"/>
+            <a:ext cx="4815687" cy="394462"/>
           </a:xfrm>
           <a:prstGeom prst="rect">
             <a:avLst/>
@@ -32322,13 +31921,13 @@
               </a:lnSpc>
             </a:pPr>
             <a:r>
-              <a:rPr sz="2000" b="1" i="0">
+              <a:rPr sz="1900" b="1" i="0">
                 <a:solidFill>
                   <a:srgbClr val="173F33"/>
                 </a:solidFill>
                 <a:latin typeface="Archivo"/>
               </a:rPr>
-              <a:t>Sin dosis aprobadas</a:t>
+              <a:t>Timosina alfa-1</a:t>
             </a:r>
           </a:p>
         </p:txBody>
@@ -32341,8 +31940,8 @@
         </p:nvSpPr>
         <p:spPr>
           <a:xfrm>
-            <a:off x="896112" y="4908296"/>
-            <a:ext cx="4815687" cy="788416"/>
+            <a:off x="896112" y="4893310"/>
+            <a:ext cx="4815687" cy="803401"/>
           </a:xfrm>
           <a:prstGeom prst="rect">
             <a:avLst/>
@@ -32361,13 +31960,13 @@
               </a:lnSpc>
             </a:pPr>
             <a:r>
-              <a:rPr sz="1600" b="0" i="0">
+              <a:rPr sz="1500" b="0" i="0">
                 <a:solidFill>
                   <a:srgbClr val="15261F"/>
                 </a:solidFill>
                 <a:latin typeface="Archivo"/>
               </a:rPr>
-              <a:t>Ninguna indicación oficial.</a:t>
+              <a:t>Aprobada en algunos países para otros usos.</a:t>
             </a:r>
           </a:p>
         </p:txBody>
@@ -32427,7 +32026,7 @@
         <p:spPr>
           <a:xfrm>
             <a:off x="6479895" y="4425696"/>
-            <a:ext cx="4815687" cy="409447"/>
+            <a:ext cx="4815687" cy="394462"/>
           </a:xfrm>
           <a:prstGeom prst="rect">
             <a:avLst/>
@@ -32446,13 +32045,13 @@
               </a:lnSpc>
             </a:pPr>
             <a:r>
-              <a:rPr sz="2000" b="1" i="0">
+              <a:rPr sz="1900" b="1" i="0">
                 <a:solidFill>
                   <a:srgbClr val="173F33"/>
                 </a:solidFill>
                 <a:latin typeface="Archivo"/>
               </a:rPr>
-              <a:t>Sin vigilancia</a:t>
+              <a:t>KPV</a:t>
             </a:r>
           </a:p>
         </p:txBody>
@@ -32465,8 +32064,8 @@
         </p:nvSpPr>
         <p:spPr>
           <a:xfrm>
-            <a:off x="6479895" y="4908296"/>
-            <a:ext cx="4815687" cy="788416"/>
+            <a:off x="6479895" y="4893310"/>
+            <a:ext cx="4815687" cy="803401"/>
           </a:xfrm>
           <a:prstGeom prst="rect">
             <a:avLst/>
@@ -32485,20 +32084,59 @@
               </a:lnSpc>
             </a:pPr>
             <a:r>
-              <a:rPr sz="1600" b="0" i="0">
+              <a:rPr sz="1500" b="0" i="0">
                 <a:solidFill>
                   <a:srgbClr val="15261F"/>
                 </a:solidFill>
                 <a:latin typeface="Archivo"/>
               </a:rPr>
-              <a:t>Producto no regulado.</a:t>
+              <a:t>Evidencia preclínica; sin ensayos en humanos.</a:t>
+            </a:r>
+          </a:p>
+        </p:txBody>
+      </p:sp>
+      <p:sp>
+        <p:nvSpPr>
+          <p:cNvPr id="17" name="TextBox 16"/>
+          <p:cNvSpPr txBox="1"/>
+          <p:nvPr/>
+        </p:nvSpPr>
+        <p:spPr>
+          <a:xfrm>
+            <a:off x="640080" y="6053328"/>
+            <a:ext cx="10911535" cy="274320"/>
+          </a:xfrm>
+          <a:prstGeom prst="rect">
+            <a:avLst/>
+          </a:prstGeom>
+          <a:noFill/>
+        </p:spPr>
+        <p:txBody>
+          <a:bodyPr wrap="square" lIns="0" rIns="0" tIns="0" bIns="0" anchor="t">
+            <a:spAutoFit/>
+          </a:bodyPr>
+          <a:lstStyle/>
+          <a:p>
+            <a:pPr algn="l">
+              <a:lnSpc>
+                <a:spcPct val="100000"/>
+              </a:lnSpc>
+            </a:pPr>
+            <a:r>
+              <a:rPr sz="1000" b="0" i="0">
+                <a:solidFill>
+                  <a:srgbClr val="607E70"/>
+                </a:solidFill>
+                <a:latin typeface="Archivo"/>
+              </a:rPr>
+              <a:t>Fuente: presentación del Dr. Marco, diap. 94 a 120.</a:t>
             </a:r>
           </a:p>
         </p:txBody>
       </p:sp>
       <p:cxnSp>
         <p:nvCxnSpPr>
-          <p:cNvPr id="17" name="Connector 16"/>
+          <p:cNvPr id="18" name="Connector 17"/>
           <p:cNvCxnSpPr/>
           <p:nvPr/>
         </p:nvCxnSpPr>
@@ -32533,7 +32171,7 @@
       </p:cxnSp>
       <p:pic>
         <p:nvPicPr>
-          <p:cNvPr id="18" name="Picture 17" descr="monograma.png"/>
+          <p:cNvPr id="19" name="Picture 18" descr="monograma.png"/>
           <p:cNvPicPr>
             <a:picLocks noChangeAspect="1"/>
           </p:cNvPicPr>
@@ -32557,7 +32195,7 @@
       </p:pic>
       <p:sp>
         <p:nvSpPr>
-          <p:cNvPr id="19" name="TextBox 18"/>
+          <p:cNvPr id="20" name="TextBox 19"/>
           <p:cNvSpPr txBox="1"/>
           <p:nvPr/>
         </p:nvSpPr>
@@ -32596,7 +32234,7 @@
       </p:sp>
       <p:sp>
         <p:nvSpPr>
-          <p:cNvPr id="20" name="TextBox 19"/>
+          <p:cNvPr id="21" name="TextBox 20"/>
           <p:cNvSpPr txBox="1"/>
           <p:nvPr/>
         </p:nvSpPr>
@@ -32628,7 +32266,7 @@
                 </a:solidFill>
                 <a:latin typeface="Archivo"/>
               </a:rPr>
-              <a:t>43 / 49</a:t>
+              <a:t>43 / 51</a:t>
             </a:r>
           </a:p>
         </p:txBody>
@@ -32661,14 +32299,58 @@
       <p:grpSpPr/>
       <p:sp>
         <p:nvSpPr>
-          <p:cNvPr id="2" name="TextBox 1"/>
-          <p:cNvSpPr txBox="1"/>
-          <p:nvPr/>
-        </p:nvSpPr>
-        <p:spPr>
-          <a:xfrm>
-            <a:off x="640080" y="1463040"/>
-            <a:ext cx="3291840" cy="3108960"/>
+          <p:cNvPr id="2" name="Rectangle 1"/>
+          <p:cNvSpPr/>
+          <p:nvPr/>
+        </p:nvSpPr>
+        <p:spPr>
+          <a:xfrm>
+            <a:off x="640080" y="1737360"/>
+            <a:ext cx="82296" cy="2743200"/>
+          </a:xfrm>
+          <a:prstGeom prst="rect">
+            <a:avLst/>
+          </a:prstGeom>
+          <a:solidFill>
+            <a:srgbClr val="E4AA18"/>
+          </a:solidFill>
+          <a:ln>
+            <a:noFill/>
+          </a:ln>
+          <a:effectLst/>
+        </p:spPr>
+        <p:style>
+          <a:lnRef idx="1">
+            <a:schemeClr val="accent1"/>
+          </a:lnRef>
+          <a:fillRef idx="3">
+            <a:schemeClr val="accent1"/>
+          </a:fillRef>
+          <a:effectRef idx="2">
+            <a:schemeClr val="accent1"/>
+          </a:effectRef>
+          <a:fontRef idx="minor">
+            <a:schemeClr val="lt1"/>
+          </a:fontRef>
+        </p:style>
+        <p:txBody>
+          <a:bodyPr rtlCol="0" anchor="ctr"/>
+          <a:lstStyle/>
+          <a:p>
+            <a:pPr algn="ctr"/>
+          </a:p>
+        </p:txBody>
+      </p:sp>
+      <p:sp>
+        <p:nvSpPr>
+          <p:cNvPr id="3" name="TextBox 2"/>
+          <p:cNvSpPr txBox="1"/>
+          <p:nvPr/>
+        </p:nvSpPr>
+        <p:spPr>
+          <a:xfrm>
+            <a:off x="1097280" y="1554480"/>
+            <a:ext cx="10241280" cy="3291840"/>
           </a:xfrm>
           <a:prstGeom prst="rect">
             <a:avLst/>
@@ -32683,36 +32365,93 @@
           <a:p>
             <a:pPr algn="l">
               <a:lnSpc>
-                <a:spcPct val="90000"/>
-              </a:lnSpc>
-            </a:pPr>
-            <a:r>
-              <a:rPr sz="19000" b="1" i="0">
+                <a:spcPct val="108000"/>
+              </a:lnSpc>
+            </a:pPr>
+            <a:r>
+              <a:rPr sz="4000" b="1" i="0">
+                <a:solidFill>
+                  <a:srgbClr val="FFF9EE"/>
+                </a:solidFill>
+                <a:latin typeface="Fraunces"/>
+              </a:rPr>
+              <a:t>Aquí el Dr. Marco </a:t>
+            </a:r>
+            <a:r>
+              <a:rPr sz="4000" b="1" i="0">
                 <a:solidFill>
                   <a:srgbClr val="E4AA18"/>
                 </a:solidFill>
                 <a:latin typeface="Fraunces"/>
               </a:rPr>
-              <a:t>5</a:t>
+              <a:t>proyecta sus propias diapositivas</a:t>
+            </a:r>
+            <a:r>
+              <a:rPr sz="4000" b="1" i="0">
+                <a:solidFill>
+                  <a:srgbClr val="FFF9EE"/>
+                </a:solidFill>
+                <a:latin typeface="Fraunces"/>
+              </a:rPr>
+              <a:t>.</a:t>
+            </a:r>
+          </a:p>
+        </p:txBody>
+      </p:sp>
+      <p:sp>
+        <p:nvSpPr>
+          <p:cNvPr id="4" name="TextBox 3"/>
+          <p:cNvSpPr txBox="1"/>
+          <p:nvPr/>
+        </p:nvSpPr>
+        <p:spPr>
+          <a:xfrm>
+            <a:off x="1097280" y="4983480"/>
+            <a:ext cx="9875520" cy="1005840"/>
+          </a:xfrm>
+          <a:prstGeom prst="rect">
+            <a:avLst/>
+          </a:prstGeom>
+          <a:noFill/>
+        </p:spPr>
+        <p:txBody>
+          <a:bodyPr wrap="square" lIns="0" rIns="0" tIns="0" bIns="0" anchor="t">
+            <a:spAutoFit/>
+          </a:bodyPr>
+          <a:lstStyle/>
+          <a:p>
+            <a:pPr algn="l">
+              <a:lnSpc>
+                <a:spcPct val="125000"/>
+              </a:lnSpc>
+            </a:pPr>
+            <a:r>
+              <a:rPr sz="1800" b="0" i="0">
+                <a:solidFill>
+                  <a:srgbClr val="9BAFA4"/>
+                </a:solidFill>
+                <a:latin typeface="Archivo"/>
+              </a:rPr>
+              <a:t>Péptidos de reparación sin registro: diapositivas 101 a 108, 116, 117 y 120 de su archivo.</a:t>
             </a:r>
           </a:p>
         </p:txBody>
       </p:sp>
       <p:cxnSp>
         <p:nvCxnSpPr>
-          <p:cNvPr id="3" name="Connector 2"/>
+          <p:cNvPr id="5" name="Connector 4"/>
           <p:cNvCxnSpPr/>
           <p:nvPr/>
         </p:nvCxnSpPr>
         <p:spPr>
           <a:xfrm>
-            <a:off x="4160520" y="1737360"/>
-            <a:ext cx="0" cy="3383280"/>
+            <a:off x="640080" y="6400800"/>
+            <a:ext cx="10911535" cy="0"/>
           </a:xfrm>
           <a:prstGeom prst="line">
             <a:avLst/>
           </a:prstGeom>
-          <a:ln w="19050">
+          <a:ln w="6350">
             <a:solidFill>
               <a:srgbClr val="607E70"/>
             </a:solidFill>
@@ -32735,120 +32474,7 @@
       </p:cxnSp>
       <p:sp>
         <p:nvSpPr>
-          <p:cNvPr id="4" name="TextBox 3"/>
-          <p:cNvSpPr txBox="1"/>
-          <p:nvPr/>
-        </p:nvSpPr>
-        <p:spPr>
-          <a:xfrm>
-            <a:off x="4572000" y="1737360"/>
-            <a:ext cx="6949440" cy="2194560"/>
-          </a:xfrm>
-          <a:prstGeom prst="rect">
-            <a:avLst/>
-          </a:prstGeom>
-          <a:noFill/>
-        </p:spPr>
-        <p:txBody>
-          <a:bodyPr wrap="square" lIns="0" rIns="0" tIns="0" bIns="0" anchor="ctr">
-            <a:spAutoFit/>
-          </a:bodyPr>
-          <a:lstStyle/>
-          <a:p>
-            <a:pPr algn="l">
-              <a:lnSpc>
-                <a:spcPct val="102000"/>
-              </a:lnSpc>
-            </a:pPr>
-            <a:r>
-              <a:rPr sz="4200" b="1" i="0">
-                <a:solidFill>
-                  <a:srgbClr val="FFF9EE"/>
-                </a:solidFill>
-                <a:latin typeface="Fraunces"/>
-              </a:rPr>
-              <a:t>Seguridad</a:t>
-            </a:r>
-          </a:p>
-        </p:txBody>
-      </p:sp>
-      <p:sp>
-        <p:nvSpPr>
-          <p:cNvPr id="5" name="TextBox 4"/>
-          <p:cNvSpPr txBox="1"/>
-          <p:nvPr/>
-        </p:nvSpPr>
-        <p:spPr>
-          <a:xfrm>
-            <a:off x="4572000" y="4069080"/>
-            <a:ext cx="6766560" cy="1280160"/>
-          </a:xfrm>
-          <a:prstGeom prst="rect">
-            <a:avLst/>
-          </a:prstGeom>
-          <a:noFill/>
-        </p:spPr>
-        <p:txBody>
-          <a:bodyPr wrap="square" lIns="0" rIns="0" tIns="0" bIns="0" anchor="t">
-            <a:spAutoFit/>
-          </a:bodyPr>
-          <a:lstStyle/>
-          <a:p>
-            <a:pPr algn="l">
-              <a:lnSpc>
-                <a:spcPct val="125000"/>
-              </a:lnSpc>
-            </a:pPr>
-            <a:r>
-              <a:rPr sz="1800" b="0" i="0">
-                <a:solidFill>
-                  <a:srgbClr val="9BAFA4"/>
-                </a:solidFill>
-                <a:latin typeface="Archivo"/>
-              </a:rPr>
-              <a:t>Antes, durante y después.</a:t>
-            </a:r>
-          </a:p>
-        </p:txBody>
-      </p:sp>
-      <p:cxnSp>
-        <p:nvCxnSpPr>
-          <p:cNvPr id="6" name="Connector 5"/>
-          <p:cNvCxnSpPr/>
-          <p:nvPr/>
-        </p:nvCxnSpPr>
-        <p:spPr>
-          <a:xfrm>
-            <a:off x="640080" y="6400800"/>
-            <a:ext cx="10911535" cy="0"/>
-          </a:xfrm>
-          <a:prstGeom prst="line">
-            <a:avLst/>
-          </a:prstGeom>
-          <a:ln w="6350">
-            <a:solidFill>
-              <a:srgbClr val="607E70"/>
-            </a:solidFill>
-          </a:ln>
-        </p:spPr>
-        <p:style>
-          <a:lnRef idx="2">
-            <a:schemeClr val="accent1"/>
-          </a:lnRef>
-          <a:fillRef idx="0">
-            <a:schemeClr val="accent1"/>
-          </a:fillRef>
-          <a:effectRef idx="1">
-            <a:schemeClr val="accent1"/>
-          </a:effectRef>
-          <a:fontRef idx="minor">
-            <a:schemeClr val="tx1"/>
-          </a:fontRef>
-        </p:style>
-      </p:cxnSp>
-      <p:sp>
-        <p:nvSpPr>
-          <p:cNvPr id="7" name="TextBox 6"/>
+          <p:cNvPr id="6" name="TextBox 5"/>
           <p:cNvSpPr txBox="1"/>
           <p:nvPr/>
         </p:nvSpPr>
@@ -32887,7 +32513,7 @@
       </p:sp>
       <p:sp>
         <p:nvSpPr>
-          <p:cNvPr id="8" name="TextBox 7"/>
+          <p:cNvPr id="7" name="TextBox 6"/>
           <p:cNvSpPr txBox="1"/>
           <p:nvPr/>
         </p:nvSpPr>
@@ -32919,7 +32545,7 @@
                 </a:solidFill>
                 <a:latin typeface="Archivo"/>
               </a:rPr>
-              <a:t>44 / 49</a:t>
+              <a:t>44 / 51</a:t>
             </a:r>
           </a:p>
         </p:txBody>
@@ -32959,7 +32585,7 @@
         <p:spPr>
           <a:xfrm>
             <a:off x="640080" y="502920"/>
-            <a:ext cx="1924629" cy="310896"/>
+            <a:ext cx="2121773" cy="310896"/>
           </a:xfrm>
           <a:prstGeom prst="roundRect">
             <a:avLst>
@@ -33005,7 +32631,7 @@
         <p:spPr>
           <a:xfrm>
             <a:off x="640080" y="502920"/>
-            <a:ext cx="1924629" cy="310896"/>
+            <a:ext cx="2121773" cy="310896"/>
           </a:xfrm>
           <a:prstGeom prst="rect">
             <a:avLst/>
@@ -33030,7 +32656,7 @@
                 </a:solidFill>
                 <a:latin typeface="Archivo"/>
               </a:rPr>
-              <a:t>ANTES DE EMPEZAR</a:t>
+              <a:t>POR QUÉ LA CAUTELA</a:t>
             </a:r>
           </a:p>
         </p:txBody>
@@ -33069,7 +32695,7 @@
                 </a:solidFill>
                 <a:latin typeface="Fraunces"/>
               </a:rPr>
-              <a:t>Evaluación previa</a:t>
+              <a:t>Cuatro razones</a:t>
             </a:r>
           </a:p>
         </p:txBody>
@@ -33083,11 +32709,11 @@
         <p:spPr>
           <a:xfrm>
             <a:off x="640080" y="2240280"/>
-            <a:ext cx="3466490" cy="1746503"/>
+            <a:ext cx="5327751" cy="1700784"/>
           </a:xfrm>
           <a:prstGeom prst="roundRect">
             <a:avLst>
-              <a:gd name="adj" fmla="val 4188"/>
+              <a:gd name="adj" fmla="val 4301"/>
             </a:avLst>
           </a:prstGeom>
           <a:solidFill>
@@ -33129,7 +32755,7 @@
         <p:spPr>
           <a:xfrm>
             <a:off x="896112" y="2468880"/>
-            <a:ext cx="2954426" cy="379476"/>
+            <a:ext cx="4815687" cy="409447"/>
           </a:xfrm>
           <a:prstGeom prst="rect">
             <a:avLst/>
@@ -33148,13 +32774,13 @@
               </a:lnSpc>
             </a:pPr>
             <a:r>
-              <a:rPr sz="1800" b="1" i="0">
+              <a:rPr sz="2000" b="1" i="0">
                 <a:solidFill>
                   <a:srgbClr val="173F33"/>
                 </a:solidFill>
                 <a:latin typeface="Archivo"/>
               </a:rPr>
-              <a:t>Sueño y ritmo</a:t>
+              <a:t>Datos humanos</a:t>
             </a:r>
           </a:p>
         </p:txBody>
@@ -33167,8 +32793,8 @@
         </p:nvSpPr>
         <p:spPr>
           <a:xfrm>
-            <a:off x="896112" y="2921508"/>
-            <a:ext cx="2954426" cy="864107"/>
+            <a:off x="896112" y="2951480"/>
+            <a:ext cx="4815687" cy="788416"/>
           </a:xfrm>
           <a:prstGeom prst="rect">
             <a:avLst/>
@@ -33187,13 +32813,13 @@
               </a:lnSpc>
             </a:pPr>
             <a:r>
-              <a:rPr sz="1400" b="0" i="0">
+              <a:rPr sz="1600" b="0" i="0">
                 <a:solidFill>
                   <a:srgbClr val="15261F"/>
                 </a:solidFill>
                 <a:latin typeface="Archivo"/>
               </a:rPr>
-              <a:t>Cómo duerme.</a:t>
+              <a:t>Muy pocos y sin grupo control.</a:t>
             </a:r>
           </a:p>
         </p:txBody>
@@ -33206,12 +32832,12 @@
         </p:nvSpPr>
         <p:spPr>
           <a:xfrm>
-            <a:off x="4362602" y="2240280"/>
-            <a:ext cx="3466490" cy="1746503"/>
+            <a:off x="6223863" y="2240280"/>
+            <a:ext cx="5327751" cy="1700784"/>
           </a:xfrm>
           <a:prstGeom prst="roundRect">
             <a:avLst>
-              <a:gd name="adj" fmla="val 4188"/>
+              <a:gd name="adj" fmla="val 4301"/>
             </a:avLst>
           </a:prstGeom>
           <a:solidFill>
@@ -33252,8 +32878,8 @@
         </p:nvSpPr>
         <p:spPr>
           <a:xfrm>
-            <a:off x="4618634" y="2468880"/>
-            <a:ext cx="2954426" cy="379476"/>
+            <a:off x="6479895" y="2468880"/>
+            <a:ext cx="4815687" cy="409447"/>
           </a:xfrm>
           <a:prstGeom prst="rect">
             <a:avLst/>
@@ -33272,13 +32898,13 @@
               </a:lnSpc>
             </a:pPr>
             <a:r>
-              <a:rPr sz="1800" b="1" i="0">
+              <a:rPr sz="2000" b="1" i="0">
                 <a:solidFill>
                   <a:srgbClr val="173F33"/>
                 </a:solidFill>
                 <a:latin typeface="Archivo"/>
               </a:rPr>
-              <a:t>Metabolismo</a:t>
+              <a:t>Pureza</a:t>
             </a:r>
           </a:p>
         </p:txBody>
@@ -33291,8 +32917,8 @@
         </p:nvSpPr>
         <p:spPr>
           <a:xfrm>
-            <a:off x="4618634" y="2921508"/>
-            <a:ext cx="2954426" cy="864107"/>
+            <a:off x="6479895" y="2951480"/>
+            <a:ext cx="4815687" cy="788416"/>
           </a:xfrm>
           <a:prstGeom prst="rect">
             <a:avLst/>
@@ -33311,13 +32937,13 @@
               </a:lnSpc>
             </a:pPr>
             <a:r>
-              <a:rPr sz="1400" b="0" i="0">
+              <a:rPr sz="1600" b="0" i="0">
                 <a:solidFill>
                   <a:srgbClr val="15261F"/>
                 </a:solidFill>
                 <a:latin typeface="Archivo"/>
               </a:rPr>
-              <a:t>Glucemia y HOMA-IR.</a:t>
+              <a:t>Variable entre proveedores.</a:t>
             </a:r>
           </a:p>
         </p:txBody>
@@ -33330,12 +32956,12 @@
         </p:nvSpPr>
         <p:spPr>
           <a:xfrm>
-            <a:off x="8085124" y="2240280"/>
-            <a:ext cx="3466490" cy="1746503"/>
+            <a:off x="640080" y="4197096"/>
+            <a:ext cx="5327751" cy="1700784"/>
           </a:xfrm>
           <a:prstGeom prst="roundRect">
             <a:avLst>
-              <a:gd name="adj" fmla="val 4188"/>
+              <a:gd name="adj" fmla="val 4301"/>
             </a:avLst>
           </a:prstGeom>
           <a:solidFill>
@@ -33376,8 +33002,8 @@
         </p:nvSpPr>
         <p:spPr>
           <a:xfrm>
-            <a:off x="8341156" y="2468880"/>
-            <a:ext cx="2954426" cy="379476"/>
+            <a:off x="896112" y="4425696"/>
+            <a:ext cx="4815687" cy="409447"/>
           </a:xfrm>
           <a:prstGeom prst="rect">
             <a:avLst/>
@@ -33396,13 +33022,13 @@
               </a:lnSpc>
             </a:pPr>
             <a:r>
-              <a:rPr sz="1800" b="1" i="0">
+              <a:rPr sz="2000" b="1" i="0">
                 <a:solidFill>
                   <a:srgbClr val="173F33"/>
                 </a:solidFill>
                 <a:latin typeface="Archivo"/>
               </a:rPr>
-              <a:t>Hígado y riñón</a:t>
+              <a:t>Sin dosis aprobadas</a:t>
             </a:r>
           </a:p>
         </p:txBody>
@@ -33415,8 +33041,8 @@
         </p:nvSpPr>
         <p:spPr>
           <a:xfrm>
-            <a:off x="8341156" y="2921508"/>
-            <a:ext cx="2954426" cy="864107"/>
+            <a:off x="896112" y="4908296"/>
+            <a:ext cx="4815687" cy="788416"/>
           </a:xfrm>
           <a:prstGeom prst="rect">
             <a:avLst/>
@@ -33435,13 +33061,13 @@
               </a:lnSpc>
             </a:pPr>
             <a:r>
-              <a:rPr sz="1400" b="0" i="0">
+              <a:rPr sz="1600" b="0" i="0">
                 <a:solidFill>
                   <a:srgbClr val="15261F"/>
                 </a:solidFill>
                 <a:latin typeface="Archivo"/>
               </a:rPr>
-              <a:t>Transaminasas, creatinina.</a:t>
+              <a:t>Ninguna indicación oficial.</a:t>
             </a:r>
           </a:p>
         </p:txBody>
@@ -33454,12 +33080,12 @@
         </p:nvSpPr>
         <p:spPr>
           <a:xfrm>
-            <a:off x="640080" y="4242816"/>
-            <a:ext cx="3466490" cy="1746503"/>
+            <a:off x="6223863" y="4197096"/>
+            <a:ext cx="5327751" cy="1700784"/>
           </a:xfrm>
           <a:prstGeom prst="roundRect">
             <a:avLst>
-              <a:gd name="adj" fmla="val 4188"/>
+              <a:gd name="adj" fmla="val 4301"/>
             </a:avLst>
           </a:prstGeom>
           <a:solidFill>
@@ -33500,8 +33126,8 @@
         </p:nvSpPr>
         <p:spPr>
           <a:xfrm>
-            <a:off x="896112" y="4471416"/>
-            <a:ext cx="2954426" cy="379476"/>
+            <a:off x="6479895" y="4425696"/>
+            <a:ext cx="4815687" cy="409447"/>
           </a:xfrm>
           <a:prstGeom prst="rect">
             <a:avLst/>
@@ -33520,13 +33146,13 @@
               </a:lnSpc>
             </a:pPr>
             <a:r>
-              <a:rPr sz="1800" b="1" i="0">
+              <a:rPr sz="2000" b="1" i="0">
                 <a:solidFill>
                   <a:srgbClr val="173F33"/>
                 </a:solidFill>
                 <a:latin typeface="Archivo"/>
               </a:rPr>
-              <a:t>Nutrición</a:t>
+              <a:t>Sin vigilancia</a:t>
             </a:r>
           </a:p>
         </p:txBody>
@@ -33539,8 +33165,8 @@
         </p:nvSpPr>
         <p:spPr>
           <a:xfrm>
-            <a:off x="896112" y="4924044"/>
-            <a:ext cx="2954426" cy="864107"/>
+            <a:off x="6479895" y="4908296"/>
+            <a:ext cx="4815687" cy="788416"/>
           </a:xfrm>
           <a:prstGeom prst="rect">
             <a:avLst/>
@@ -33559,307 +33185,20 @@
               </a:lnSpc>
             </a:pPr>
             <a:r>
-              <a:rPr sz="1400" b="0" i="0">
+              <a:rPr sz="1600" b="0" i="0">
                 <a:solidFill>
                   <a:srgbClr val="15261F"/>
                 </a:solidFill>
                 <a:latin typeface="Archivo"/>
               </a:rPr>
-              <a:t>Vitamina D, zinc, magnesio, IMC y composición.</a:t>
-            </a:r>
-          </a:p>
-        </p:txBody>
-      </p:sp>
-      <p:sp>
-        <p:nvSpPr>
-          <p:cNvPr id="17" name="Rounded Rectangle 16"/>
-          <p:cNvSpPr/>
-          <p:nvPr/>
-        </p:nvSpPr>
-        <p:spPr>
-          <a:xfrm>
-            <a:off x="4362602" y="4242816"/>
-            <a:ext cx="3466490" cy="1746503"/>
-          </a:xfrm>
-          <a:prstGeom prst="roundRect">
-            <a:avLst>
-              <a:gd name="adj" fmla="val 4188"/>
-            </a:avLst>
-          </a:prstGeom>
-          <a:solidFill>
-            <a:srgbClr val="E4EDE7"/>
-          </a:solidFill>
-          <a:ln>
-            <a:noFill/>
-          </a:ln>
-          <a:effectLst/>
-        </p:spPr>
-        <p:style>
-          <a:lnRef idx="1">
-            <a:schemeClr val="accent1"/>
-          </a:lnRef>
-          <a:fillRef idx="3">
-            <a:schemeClr val="accent1"/>
-          </a:fillRef>
-          <a:effectRef idx="2">
-            <a:schemeClr val="accent1"/>
-          </a:effectRef>
-          <a:fontRef idx="minor">
-            <a:schemeClr val="lt1"/>
-          </a:fontRef>
-        </p:style>
-        <p:txBody>
-          <a:bodyPr rtlCol="0" anchor="ctr"/>
-          <a:lstStyle/>
-          <a:p>
-            <a:pPr algn="ctr"/>
-          </a:p>
-        </p:txBody>
-      </p:sp>
-      <p:sp>
-        <p:nvSpPr>
-          <p:cNvPr id="18" name="TextBox 17"/>
-          <p:cNvSpPr txBox="1"/>
-          <p:nvPr/>
-        </p:nvSpPr>
-        <p:spPr>
-          <a:xfrm>
-            <a:off x="4618634" y="4471416"/>
-            <a:ext cx="2954426" cy="379476"/>
-          </a:xfrm>
-          <a:prstGeom prst="rect">
-            <a:avLst/>
-          </a:prstGeom>
-          <a:noFill/>
-        </p:spPr>
-        <p:txBody>
-          <a:bodyPr wrap="square" lIns="0" rIns="0" tIns="0" bIns="0" anchor="t">
-            <a:spAutoFit/>
-          </a:bodyPr>
-          <a:lstStyle/>
-          <a:p>
-            <a:pPr algn="l">
-              <a:lnSpc>
-                <a:spcPct val="105000"/>
-              </a:lnSpc>
-            </a:pPr>
-            <a:r>
-              <a:rPr sz="1800" b="1" i="0">
-                <a:solidFill>
-                  <a:srgbClr val="173F33"/>
-                </a:solidFill>
-                <a:latin typeface="Archivo"/>
-              </a:rPr>
-              <a:t>Salud mental</a:t>
-            </a:r>
-          </a:p>
-        </p:txBody>
-      </p:sp>
-      <p:sp>
-        <p:nvSpPr>
-          <p:cNvPr id="19" name="TextBox 18"/>
-          <p:cNvSpPr txBox="1"/>
-          <p:nvPr/>
-        </p:nvSpPr>
-        <p:spPr>
-          <a:xfrm>
-            <a:off x="4618634" y="4924044"/>
-            <a:ext cx="2954426" cy="864107"/>
-          </a:xfrm>
-          <a:prstGeom prst="rect">
-            <a:avLst/>
-          </a:prstGeom>
-          <a:noFill/>
-        </p:spPr>
-        <p:txBody>
-          <a:bodyPr wrap="square" lIns="0" rIns="0" tIns="0" bIns="0" anchor="t">
-            <a:spAutoFit/>
-          </a:bodyPr>
-          <a:lstStyle/>
-          <a:p>
-            <a:pPr algn="l">
-              <a:lnSpc>
-                <a:spcPct val="115000"/>
-              </a:lnSpc>
-            </a:pPr>
-            <a:r>
-              <a:rPr sz="1400" b="0" i="0">
-                <a:solidFill>
-                  <a:srgbClr val="15261F"/>
-                </a:solidFill>
-                <a:latin typeface="Archivo"/>
-              </a:rPr>
-              <a:t>Ansiedad y estrés.</a:t>
-            </a:r>
-          </a:p>
-        </p:txBody>
-      </p:sp>
-      <p:sp>
-        <p:nvSpPr>
-          <p:cNvPr id="20" name="Rounded Rectangle 19"/>
-          <p:cNvSpPr/>
-          <p:nvPr/>
-        </p:nvSpPr>
-        <p:spPr>
-          <a:xfrm>
-            <a:off x="8085124" y="4242816"/>
-            <a:ext cx="3466490" cy="1746503"/>
-          </a:xfrm>
-          <a:prstGeom prst="roundRect">
-            <a:avLst>
-              <a:gd name="adj" fmla="val 4188"/>
-            </a:avLst>
-          </a:prstGeom>
-          <a:solidFill>
-            <a:srgbClr val="E4EDE7"/>
-          </a:solidFill>
-          <a:ln>
-            <a:noFill/>
-          </a:ln>
-          <a:effectLst/>
-        </p:spPr>
-        <p:style>
-          <a:lnRef idx="1">
-            <a:schemeClr val="accent1"/>
-          </a:lnRef>
-          <a:fillRef idx="3">
-            <a:schemeClr val="accent1"/>
-          </a:fillRef>
-          <a:effectRef idx="2">
-            <a:schemeClr val="accent1"/>
-          </a:effectRef>
-          <a:fontRef idx="minor">
-            <a:schemeClr val="lt1"/>
-          </a:fontRef>
-        </p:style>
-        <p:txBody>
-          <a:bodyPr rtlCol="0" anchor="ctr"/>
-          <a:lstStyle/>
-          <a:p>
-            <a:pPr algn="ctr"/>
-          </a:p>
-        </p:txBody>
-      </p:sp>
-      <p:sp>
-        <p:nvSpPr>
-          <p:cNvPr id="21" name="TextBox 20"/>
-          <p:cNvSpPr txBox="1"/>
-          <p:nvPr/>
-        </p:nvSpPr>
-        <p:spPr>
-          <a:xfrm>
-            <a:off x="8341156" y="4471416"/>
-            <a:ext cx="2954426" cy="379476"/>
-          </a:xfrm>
-          <a:prstGeom prst="rect">
-            <a:avLst/>
-          </a:prstGeom>
-          <a:noFill/>
-        </p:spPr>
-        <p:txBody>
-          <a:bodyPr wrap="square" lIns="0" rIns="0" tIns="0" bIns="0" anchor="t">
-            <a:spAutoFit/>
-          </a:bodyPr>
-          <a:lstStyle/>
-          <a:p>
-            <a:pPr algn="l">
-              <a:lnSpc>
-                <a:spcPct val="105000"/>
-              </a:lnSpc>
-            </a:pPr>
-            <a:r>
-              <a:rPr sz="1800" b="1" i="0">
-                <a:solidFill>
-                  <a:srgbClr val="173F33"/>
-                </a:solidFill>
-                <a:latin typeface="Archivo"/>
-              </a:rPr>
-              <a:t>Otras condiciones</a:t>
-            </a:r>
-          </a:p>
-        </p:txBody>
-      </p:sp>
-      <p:sp>
-        <p:nvSpPr>
-          <p:cNvPr id="22" name="TextBox 21"/>
-          <p:cNvSpPr txBox="1"/>
-          <p:nvPr/>
-        </p:nvSpPr>
-        <p:spPr>
-          <a:xfrm>
-            <a:off x="8341156" y="4924044"/>
-            <a:ext cx="2954426" cy="864107"/>
-          </a:xfrm>
-          <a:prstGeom prst="rect">
-            <a:avLst/>
-          </a:prstGeom>
-          <a:noFill/>
-        </p:spPr>
-        <p:txBody>
-          <a:bodyPr wrap="square" lIns="0" rIns="0" tIns="0" bIns="0" anchor="t">
-            <a:spAutoFit/>
-          </a:bodyPr>
-          <a:lstStyle/>
-          <a:p>
-            <a:pPr algn="l">
-              <a:lnSpc>
-                <a:spcPct val="115000"/>
-              </a:lnSpc>
-            </a:pPr>
-            <a:r>
-              <a:rPr sz="1400" b="0" i="0">
-                <a:solidFill>
-                  <a:srgbClr val="15261F"/>
-                </a:solidFill>
-                <a:latin typeface="Archivo"/>
-              </a:rPr>
-              <a:t>Biomarcadores según la historia.</a:t>
-            </a:r>
-          </a:p>
-        </p:txBody>
-      </p:sp>
-      <p:sp>
-        <p:nvSpPr>
-          <p:cNvPr id="23" name="TextBox 22"/>
-          <p:cNvSpPr txBox="1"/>
-          <p:nvPr/>
-        </p:nvSpPr>
-        <p:spPr>
-          <a:xfrm>
-            <a:off x="640080" y="6053328"/>
-            <a:ext cx="10911535" cy="274320"/>
-          </a:xfrm>
-          <a:prstGeom prst="rect">
-            <a:avLst/>
-          </a:prstGeom>
-          <a:noFill/>
-        </p:spPr>
-        <p:txBody>
-          <a:bodyPr wrap="square" lIns="0" rIns="0" tIns="0" bIns="0" anchor="t">
-            <a:spAutoFit/>
-          </a:bodyPr>
-          <a:lstStyle/>
-          <a:p>
-            <a:pPr algn="l">
-              <a:lnSpc>
-                <a:spcPct val="100000"/>
-              </a:lnSpc>
-            </a:pPr>
-            <a:r>
-              <a:rPr sz="1000" b="0" i="0">
-                <a:solidFill>
-                  <a:srgbClr val="607E70"/>
-                </a:solidFill>
-                <a:latin typeface="Archivo"/>
-              </a:rPr>
-              <a:t>Fuente: presentación del Dr. Marco, diap. 47.</a:t>
+              <a:t>Producto no regulado.</a:t>
             </a:r>
           </a:p>
         </p:txBody>
       </p:sp>
       <p:cxnSp>
         <p:nvCxnSpPr>
-          <p:cNvPr id="24" name="Connector 23"/>
+          <p:cNvPr id="17" name="Connector 16"/>
           <p:cNvCxnSpPr/>
           <p:nvPr/>
         </p:nvCxnSpPr>
@@ -33894,7 +33233,7 @@
       </p:cxnSp>
       <p:pic>
         <p:nvPicPr>
-          <p:cNvPr id="25" name="Picture 24" descr="monograma.png"/>
+          <p:cNvPr id="18" name="Picture 17" descr="monograma.png"/>
           <p:cNvPicPr>
             <a:picLocks noChangeAspect="1"/>
           </p:cNvPicPr>
@@ -33918,7 +33257,7 @@
       </p:pic>
       <p:sp>
         <p:nvSpPr>
-          <p:cNvPr id="26" name="TextBox 25"/>
+          <p:cNvPr id="19" name="TextBox 18"/>
           <p:cNvSpPr txBox="1"/>
           <p:nvPr/>
         </p:nvSpPr>
@@ -33957,7 +33296,7 @@
       </p:sp>
       <p:sp>
         <p:nvSpPr>
-          <p:cNvPr id="27" name="TextBox 26"/>
+          <p:cNvPr id="20" name="TextBox 19"/>
           <p:cNvSpPr txBox="1"/>
           <p:nvPr/>
         </p:nvSpPr>
@@ -33989,7 +33328,7 @@
                 </a:solidFill>
                 <a:latin typeface="Archivo"/>
               </a:rPr>
-              <a:t>45 / 49</a:t>
+              <a:t>45 / 51</a:t>
             </a:r>
           </a:p>
         </p:txBody>
@@ -34022,60 +33361,14 @@
       <p:grpSpPr/>
       <p:sp>
         <p:nvSpPr>
-          <p:cNvPr id="2" name="Rounded Rectangle 1"/>
-          <p:cNvSpPr/>
-          <p:nvPr/>
-        </p:nvSpPr>
-        <p:spPr>
-          <a:xfrm>
-            <a:off x="640080" y="502920"/>
-            <a:ext cx="2121773" cy="310896"/>
-          </a:xfrm>
-          <a:prstGeom prst="roundRect">
-            <a:avLst>
-              <a:gd name="adj" fmla="val 11764"/>
-            </a:avLst>
-          </a:prstGeom>
-          <a:solidFill>
-            <a:srgbClr val="E4AA18"/>
-          </a:solidFill>
-          <a:ln>
-            <a:noFill/>
-          </a:ln>
-          <a:effectLst/>
-        </p:spPr>
-        <p:style>
-          <a:lnRef idx="1">
-            <a:schemeClr val="accent1"/>
-          </a:lnRef>
-          <a:fillRef idx="3">
-            <a:schemeClr val="accent1"/>
-          </a:fillRef>
-          <a:effectRef idx="2">
-            <a:schemeClr val="accent1"/>
-          </a:effectRef>
-          <a:fontRef idx="minor">
-            <a:schemeClr val="lt1"/>
-          </a:fontRef>
-        </p:style>
-        <p:txBody>
-          <a:bodyPr rtlCol="0" anchor="ctr"/>
-          <a:lstStyle/>
-          <a:p>
-            <a:pPr algn="ctr"/>
-          </a:p>
-        </p:txBody>
-      </p:sp>
-      <p:sp>
-        <p:nvSpPr>
-          <p:cNvPr id="3" name="TextBox 2"/>
-          <p:cNvSpPr txBox="1"/>
-          <p:nvPr/>
-        </p:nvSpPr>
-        <p:spPr>
-          <a:xfrm>
-            <a:off x="640080" y="502920"/>
-            <a:ext cx="2121773" cy="310896"/>
+          <p:cNvPr id="2" name="TextBox 1"/>
+          <p:cNvSpPr txBox="1"/>
+          <p:nvPr/>
+        </p:nvSpPr>
+        <p:spPr>
+          <a:xfrm>
+            <a:off x="640080" y="1463040"/>
+            <a:ext cx="3291840" cy="3108960"/>
           </a:xfrm>
           <a:prstGeom prst="rect">
             <a:avLst/>
@@ -34088,194 +33381,38 @@
           </a:bodyPr>
           <a:lstStyle/>
           <a:p>
-            <a:pPr algn="ctr">
-              <a:lnSpc>
-                <a:spcPct val="110000"/>
-              </a:lnSpc>
-            </a:pPr>
-            <a:r>
-              <a:rPr sz="1100" b="1" i="0" spc="80">
-                <a:solidFill>
-                  <a:srgbClr val="173F33"/>
-                </a:solidFill>
-                <a:latin typeface="Archivo"/>
-              </a:rPr>
-              <a:t>CONTRAINDICACIONES</a:t>
-            </a:r>
-          </a:p>
-        </p:txBody>
-      </p:sp>
-      <p:sp>
-        <p:nvSpPr>
-          <p:cNvPr id="4" name="TextBox 3"/>
-          <p:cNvSpPr txBox="1"/>
-          <p:nvPr/>
-        </p:nvSpPr>
-        <p:spPr>
-          <a:xfrm>
-            <a:off x="640080" y="932688"/>
-            <a:ext cx="10911535" cy="1097280"/>
-          </a:xfrm>
-          <a:prstGeom prst="rect">
-            <a:avLst/>
-          </a:prstGeom>
-          <a:noFill/>
-        </p:spPr>
-        <p:txBody>
-          <a:bodyPr wrap="square" lIns="0" rIns="0" tIns="0" bIns="0" anchor="t">
-            <a:spAutoFit/>
-          </a:bodyPr>
-          <a:lstStyle/>
-          <a:p>
-            <a:pPr algn="l">
-              <a:lnSpc>
-                <a:spcPct val="100000"/>
-              </a:lnSpc>
-            </a:pPr>
-            <a:r>
-              <a:rPr sz="3200" b="1" i="0">
-                <a:solidFill>
-                  <a:srgbClr val="FFF9EE"/>
+            <a:pPr algn="l">
+              <a:lnSpc>
+                <a:spcPct val="90000"/>
+              </a:lnSpc>
+            </a:pPr>
+            <a:r>
+              <a:rPr sz="19000" b="1" i="0">
+                <a:solidFill>
+                  <a:srgbClr val="E4AA18"/>
                 </a:solidFill>
                 <a:latin typeface="Fraunces"/>
               </a:rPr>
-              <a:t>Cuándo no</a:t>
-            </a:r>
-          </a:p>
-        </p:txBody>
-      </p:sp>
-      <p:sp>
-        <p:nvSpPr>
-          <p:cNvPr id="5" name="TextBox 4"/>
-          <p:cNvSpPr txBox="1"/>
-          <p:nvPr/>
-        </p:nvSpPr>
-        <p:spPr>
-          <a:xfrm>
-            <a:off x="640080" y="2194560"/>
-            <a:ext cx="822960" cy="640080"/>
-          </a:xfrm>
-          <a:prstGeom prst="rect">
-            <a:avLst/>
-          </a:prstGeom>
-          <a:noFill/>
-        </p:spPr>
-        <p:txBody>
-          <a:bodyPr wrap="square" lIns="0" rIns="0" tIns="0" bIns="0" anchor="t">
-            <a:spAutoFit/>
-          </a:bodyPr>
-          <a:lstStyle/>
-          <a:p>
-            <a:pPr algn="l">
-              <a:lnSpc>
-                <a:spcPct val="90000"/>
-              </a:lnSpc>
-            </a:pPr>
-            <a:r>
-              <a:rPr sz="3400" b="1" i="0">
-                <a:solidFill>
-                  <a:srgbClr val="E4AA18"/>
-                </a:solidFill>
-                <a:latin typeface="Fraunces"/>
-              </a:rPr>
-              <a:t>1</a:t>
-            </a:r>
-          </a:p>
-        </p:txBody>
-      </p:sp>
-      <p:sp>
-        <p:nvSpPr>
-          <p:cNvPr id="6" name="TextBox 5"/>
-          <p:cNvSpPr txBox="1"/>
-          <p:nvPr/>
-        </p:nvSpPr>
-        <p:spPr>
-          <a:xfrm>
-            <a:off x="1508760" y="2221991"/>
-            <a:ext cx="3383280" cy="777240"/>
-          </a:xfrm>
-          <a:prstGeom prst="rect">
-            <a:avLst/>
-          </a:prstGeom>
-          <a:noFill/>
-        </p:spPr>
-        <p:txBody>
-          <a:bodyPr wrap="square" lIns="0" rIns="0" tIns="0" bIns="0" anchor="t">
-            <a:spAutoFit/>
-          </a:bodyPr>
-          <a:lstStyle/>
-          <a:p>
-            <a:pPr algn="l">
-              <a:lnSpc>
-                <a:spcPct val="105000"/>
-              </a:lnSpc>
-            </a:pPr>
-            <a:r>
-              <a:rPr sz="2000" b="1" i="0">
-                <a:solidFill>
-                  <a:srgbClr val="FFF9EE"/>
-                </a:solidFill>
-                <a:latin typeface="Archivo"/>
-              </a:rPr>
-              <a:t>Cáncer activo</a:t>
-            </a:r>
-          </a:p>
-        </p:txBody>
-      </p:sp>
-      <p:sp>
-        <p:nvSpPr>
-          <p:cNvPr id="7" name="TextBox 6"/>
-          <p:cNvSpPr txBox="1"/>
-          <p:nvPr/>
-        </p:nvSpPr>
-        <p:spPr>
-          <a:xfrm>
-            <a:off x="5029200" y="2240279"/>
-            <a:ext cx="6522415" cy="777240"/>
-          </a:xfrm>
-          <a:prstGeom prst="rect">
-            <a:avLst/>
-          </a:prstGeom>
-          <a:noFill/>
-        </p:spPr>
-        <p:txBody>
-          <a:bodyPr wrap="square" lIns="0" rIns="0" tIns="0" bIns="0" anchor="t">
-            <a:spAutoFit/>
-          </a:bodyPr>
-          <a:lstStyle/>
-          <a:p>
-            <a:pPr algn="l">
-              <a:lnSpc>
-                <a:spcPct val="110000"/>
-              </a:lnSpc>
-            </a:pPr>
-            <a:r>
-              <a:rPr sz="1600" b="0" i="0">
-                <a:solidFill>
-                  <a:srgbClr val="9BAFA4"/>
-                </a:solidFill>
-                <a:latin typeface="Archivo"/>
-              </a:rPr>
-              <a:t>Cualquier neoplasia sin tratar.</a:t>
+              <a:t>5</a:t>
             </a:r>
           </a:p>
         </p:txBody>
       </p:sp>
       <p:cxnSp>
         <p:nvCxnSpPr>
-          <p:cNvPr id="8" name="Connector 7"/>
+          <p:cNvPr id="3" name="Connector 2"/>
           <p:cNvCxnSpPr/>
           <p:nvPr/>
         </p:nvCxnSpPr>
         <p:spPr>
           <a:xfrm>
-            <a:off x="640080" y="3008375"/>
-            <a:ext cx="10911535" cy="0"/>
+            <a:off x="4160520" y="1737360"/>
+            <a:ext cx="0" cy="3383280"/>
           </a:xfrm>
           <a:prstGeom prst="line">
             <a:avLst/>
           </a:prstGeom>
-          <a:ln w="6350">
+          <a:ln w="19050">
             <a:solidFill>
               <a:srgbClr val="607E70"/>
             </a:solidFill>
@@ -34298,14 +33435,53 @@
       </p:cxnSp>
       <p:sp>
         <p:nvSpPr>
-          <p:cNvPr id="9" name="TextBox 8"/>
-          <p:cNvSpPr txBox="1"/>
-          <p:nvPr/>
-        </p:nvSpPr>
-        <p:spPr>
-          <a:xfrm>
-            <a:off x="640080" y="3063239"/>
-            <a:ext cx="822960" cy="640080"/>
+          <p:cNvPr id="4" name="TextBox 3"/>
+          <p:cNvSpPr txBox="1"/>
+          <p:nvPr/>
+        </p:nvSpPr>
+        <p:spPr>
+          <a:xfrm>
+            <a:off x="4572000" y="1737360"/>
+            <a:ext cx="6949440" cy="2194560"/>
+          </a:xfrm>
+          <a:prstGeom prst="rect">
+            <a:avLst/>
+          </a:prstGeom>
+          <a:noFill/>
+        </p:spPr>
+        <p:txBody>
+          <a:bodyPr wrap="square" lIns="0" rIns="0" tIns="0" bIns="0" anchor="ctr">
+            <a:spAutoFit/>
+          </a:bodyPr>
+          <a:lstStyle/>
+          <a:p>
+            <a:pPr algn="l">
+              <a:lnSpc>
+                <a:spcPct val="102000"/>
+              </a:lnSpc>
+            </a:pPr>
+            <a:r>
+              <a:rPr sz="4200" b="1" i="0">
+                <a:solidFill>
+                  <a:srgbClr val="FFF9EE"/>
+                </a:solidFill>
+                <a:latin typeface="Fraunces"/>
+              </a:rPr>
+              <a:t>Seguridad</a:t>
+            </a:r>
+          </a:p>
+        </p:txBody>
+      </p:sp>
+      <p:sp>
+        <p:nvSpPr>
+          <p:cNvPr id="5" name="TextBox 4"/>
+          <p:cNvSpPr txBox="1"/>
+          <p:nvPr/>
+        </p:nvSpPr>
+        <p:spPr>
+          <a:xfrm>
+            <a:off x="4572000" y="4069080"/>
+            <a:ext cx="6766560" cy="1280160"/>
           </a:xfrm>
           <a:prstGeom prst="rect">
             <a:avLst/>
@@ -34320,108 +33496,30 @@
           <a:p>
             <a:pPr algn="l">
               <a:lnSpc>
-                <a:spcPct val="90000"/>
-              </a:lnSpc>
-            </a:pPr>
-            <a:r>
-              <a:rPr sz="3400" b="1" i="0">
-                <a:solidFill>
-                  <a:srgbClr val="E4AA18"/>
-                </a:solidFill>
-                <a:latin typeface="Fraunces"/>
-              </a:rPr>
-              <a:t>2</a:t>
-            </a:r>
-          </a:p>
-        </p:txBody>
-      </p:sp>
-      <p:sp>
-        <p:nvSpPr>
-          <p:cNvPr id="10" name="TextBox 9"/>
-          <p:cNvSpPr txBox="1"/>
-          <p:nvPr/>
-        </p:nvSpPr>
-        <p:spPr>
-          <a:xfrm>
-            <a:off x="1508760" y="3090671"/>
-            <a:ext cx="3383280" cy="777240"/>
-          </a:xfrm>
-          <a:prstGeom prst="rect">
-            <a:avLst/>
-          </a:prstGeom>
-          <a:noFill/>
-        </p:spPr>
-        <p:txBody>
-          <a:bodyPr wrap="square" lIns="0" rIns="0" tIns="0" bIns="0" anchor="t">
-            <a:spAutoFit/>
-          </a:bodyPr>
-          <a:lstStyle/>
-          <a:p>
-            <a:pPr algn="l">
-              <a:lnSpc>
-                <a:spcPct val="105000"/>
-              </a:lnSpc>
-            </a:pPr>
-            <a:r>
-              <a:rPr sz="2000" b="1" i="0">
-                <a:solidFill>
-                  <a:srgbClr val="FFF9EE"/>
-                </a:solidFill>
-                <a:latin typeface="Archivo"/>
-              </a:rPr>
-              <a:t>Embarazo y lactancia</a:t>
-            </a:r>
-          </a:p>
-        </p:txBody>
-      </p:sp>
-      <p:sp>
-        <p:nvSpPr>
-          <p:cNvPr id="11" name="TextBox 10"/>
-          <p:cNvSpPr txBox="1"/>
-          <p:nvPr/>
-        </p:nvSpPr>
-        <p:spPr>
-          <a:xfrm>
-            <a:off x="5029200" y="3108959"/>
-            <a:ext cx="6522415" cy="777240"/>
-          </a:xfrm>
-          <a:prstGeom prst="rect">
-            <a:avLst/>
-          </a:prstGeom>
-          <a:noFill/>
-        </p:spPr>
-        <p:txBody>
-          <a:bodyPr wrap="square" lIns="0" rIns="0" tIns="0" bIns="0" anchor="t">
-            <a:spAutoFit/>
-          </a:bodyPr>
-          <a:lstStyle/>
-          <a:p>
-            <a:pPr algn="l">
-              <a:lnSpc>
-                <a:spcPct val="110000"/>
-              </a:lnSpc>
-            </a:pPr>
-            <a:r>
-              <a:rPr sz="1600" b="0" i="0">
+                <a:spcPct val="125000"/>
+              </a:lnSpc>
+            </a:pPr>
+            <a:r>
+              <a:rPr sz="1800" b="0" i="0">
                 <a:solidFill>
                   <a:srgbClr val="9BAFA4"/>
                 </a:solidFill>
                 <a:latin typeface="Archivo"/>
               </a:rPr>
-              <a:t>No se recomienda.</a:t>
+              <a:t>Antes, durante y después.</a:t>
             </a:r>
           </a:p>
         </p:txBody>
       </p:sp>
       <p:cxnSp>
         <p:nvCxnSpPr>
-          <p:cNvPr id="12" name="Connector 11"/>
+          <p:cNvPr id="6" name="Connector 5"/>
           <p:cNvCxnSpPr/>
           <p:nvPr/>
         </p:nvCxnSpPr>
         <p:spPr>
           <a:xfrm>
-            <a:off x="640080" y="3877056"/>
+            <a:off x="640080" y="6400800"/>
             <a:ext cx="10911535" cy="0"/>
           </a:xfrm>
           <a:prstGeom prst="line">
@@ -34450,350 +33548,7 @@
       </p:cxnSp>
       <p:sp>
         <p:nvSpPr>
-          <p:cNvPr id="13" name="TextBox 12"/>
-          <p:cNvSpPr txBox="1"/>
-          <p:nvPr/>
-        </p:nvSpPr>
-        <p:spPr>
-          <a:xfrm>
-            <a:off x="640080" y="3931920"/>
-            <a:ext cx="822960" cy="640080"/>
-          </a:xfrm>
-          <a:prstGeom prst="rect">
-            <a:avLst/>
-          </a:prstGeom>
-          <a:noFill/>
-        </p:spPr>
-        <p:txBody>
-          <a:bodyPr wrap="square" lIns="0" rIns="0" tIns="0" bIns="0" anchor="t">
-            <a:spAutoFit/>
-          </a:bodyPr>
-          <a:lstStyle/>
-          <a:p>
-            <a:pPr algn="l">
-              <a:lnSpc>
-                <a:spcPct val="90000"/>
-              </a:lnSpc>
-            </a:pPr>
-            <a:r>
-              <a:rPr sz="3400" b="1" i="0">
-                <a:solidFill>
-                  <a:srgbClr val="E4AA18"/>
-                </a:solidFill>
-                <a:latin typeface="Fraunces"/>
-              </a:rPr>
-              <a:t>3</a:t>
-            </a:r>
-          </a:p>
-        </p:txBody>
-      </p:sp>
-      <p:sp>
-        <p:nvSpPr>
-          <p:cNvPr id="14" name="TextBox 13"/>
-          <p:cNvSpPr txBox="1"/>
-          <p:nvPr/>
-        </p:nvSpPr>
-        <p:spPr>
-          <a:xfrm>
-            <a:off x="1508760" y="3959352"/>
-            <a:ext cx="3383280" cy="777240"/>
-          </a:xfrm>
-          <a:prstGeom prst="rect">
-            <a:avLst/>
-          </a:prstGeom>
-          <a:noFill/>
-        </p:spPr>
-        <p:txBody>
-          <a:bodyPr wrap="square" lIns="0" rIns="0" tIns="0" bIns="0" anchor="t">
-            <a:spAutoFit/>
-          </a:bodyPr>
-          <a:lstStyle/>
-          <a:p>
-            <a:pPr algn="l">
-              <a:lnSpc>
-                <a:spcPct val="105000"/>
-              </a:lnSpc>
-            </a:pPr>
-            <a:r>
-              <a:rPr sz="2000" b="1" i="0">
-                <a:solidFill>
-                  <a:srgbClr val="FFF9EE"/>
-                </a:solidFill>
-                <a:latin typeface="Archivo"/>
-              </a:rPr>
-              <a:t>Autoinmunes</a:t>
-            </a:r>
-          </a:p>
-        </p:txBody>
-      </p:sp>
-      <p:sp>
-        <p:nvSpPr>
-          <p:cNvPr id="15" name="TextBox 14"/>
-          <p:cNvSpPr txBox="1"/>
-          <p:nvPr/>
-        </p:nvSpPr>
-        <p:spPr>
-          <a:xfrm>
-            <a:off x="5029200" y="3977639"/>
-            <a:ext cx="6522415" cy="777240"/>
-          </a:xfrm>
-          <a:prstGeom prst="rect">
-            <a:avLst/>
-          </a:prstGeom>
-          <a:noFill/>
-        </p:spPr>
-        <p:txBody>
-          <a:bodyPr wrap="square" lIns="0" rIns="0" tIns="0" bIns="0" anchor="t">
-            <a:spAutoFit/>
-          </a:bodyPr>
-          <a:lstStyle/>
-          <a:p>
-            <a:pPr algn="l">
-              <a:lnSpc>
-                <a:spcPct val="110000"/>
-              </a:lnSpc>
-            </a:pPr>
-            <a:r>
-              <a:rPr sz="1600" b="0" i="0">
-                <a:solidFill>
-                  <a:srgbClr val="9BAFA4"/>
-                </a:solidFill>
-                <a:latin typeface="Archivo"/>
-              </a:rPr>
-              <a:t>Enfermedades descompensadas.</a:t>
-            </a:r>
-          </a:p>
-        </p:txBody>
-      </p:sp>
-      <p:cxnSp>
-        <p:nvCxnSpPr>
-          <p:cNvPr id="16" name="Connector 15"/>
-          <p:cNvCxnSpPr/>
-          <p:nvPr/>
-        </p:nvCxnSpPr>
-        <p:spPr>
-          <a:xfrm>
-            <a:off x="640080" y="4745736"/>
-            <a:ext cx="10911535" cy="0"/>
-          </a:xfrm>
-          <a:prstGeom prst="line">
-            <a:avLst/>
-          </a:prstGeom>
-          <a:ln w="6350">
-            <a:solidFill>
-              <a:srgbClr val="607E70"/>
-            </a:solidFill>
-          </a:ln>
-        </p:spPr>
-        <p:style>
-          <a:lnRef idx="2">
-            <a:schemeClr val="accent1"/>
-          </a:lnRef>
-          <a:fillRef idx="0">
-            <a:schemeClr val="accent1"/>
-          </a:fillRef>
-          <a:effectRef idx="1">
-            <a:schemeClr val="accent1"/>
-          </a:effectRef>
-          <a:fontRef idx="minor">
-            <a:schemeClr val="tx1"/>
-          </a:fontRef>
-        </p:style>
-      </p:cxnSp>
-      <p:sp>
-        <p:nvSpPr>
-          <p:cNvPr id="17" name="TextBox 16"/>
-          <p:cNvSpPr txBox="1"/>
-          <p:nvPr/>
-        </p:nvSpPr>
-        <p:spPr>
-          <a:xfrm>
-            <a:off x="640080" y="4800600"/>
-            <a:ext cx="822960" cy="640080"/>
-          </a:xfrm>
-          <a:prstGeom prst="rect">
-            <a:avLst/>
-          </a:prstGeom>
-          <a:noFill/>
-        </p:spPr>
-        <p:txBody>
-          <a:bodyPr wrap="square" lIns="0" rIns="0" tIns="0" bIns="0" anchor="t">
-            <a:spAutoFit/>
-          </a:bodyPr>
-          <a:lstStyle/>
-          <a:p>
-            <a:pPr algn="l">
-              <a:lnSpc>
-                <a:spcPct val="90000"/>
-              </a:lnSpc>
-            </a:pPr>
-            <a:r>
-              <a:rPr sz="3400" b="1" i="0">
-                <a:solidFill>
-                  <a:srgbClr val="E4AA18"/>
-                </a:solidFill>
-                <a:latin typeface="Fraunces"/>
-              </a:rPr>
-              <a:t>4</a:t>
-            </a:r>
-          </a:p>
-        </p:txBody>
-      </p:sp>
-      <p:sp>
-        <p:nvSpPr>
-          <p:cNvPr id="18" name="TextBox 17"/>
-          <p:cNvSpPr txBox="1"/>
-          <p:nvPr/>
-        </p:nvSpPr>
-        <p:spPr>
-          <a:xfrm>
-            <a:off x="1508760" y="4828032"/>
-            <a:ext cx="3383280" cy="777240"/>
-          </a:xfrm>
-          <a:prstGeom prst="rect">
-            <a:avLst/>
-          </a:prstGeom>
-          <a:noFill/>
-        </p:spPr>
-        <p:txBody>
-          <a:bodyPr wrap="square" lIns="0" rIns="0" tIns="0" bIns="0" anchor="t">
-            <a:spAutoFit/>
-          </a:bodyPr>
-          <a:lstStyle/>
-          <a:p>
-            <a:pPr algn="l">
-              <a:lnSpc>
-                <a:spcPct val="105000"/>
-              </a:lnSpc>
-            </a:pPr>
-            <a:r>
-              <a:rPr sz="2000" b="1" i="0">
-                <a:solidFill>
-                  <a:srgbClr val="FFF9EE"/>
-                </a:solidFill>
-                <a:latin typeface="Archivo"/>
-              </a:rPr>
-              <a:t>Proliferativos</a:t>
-            </a:r>
-          </a:p>
-        </p:txBody>
-      </p:sp>
-      <p:sp>
-        <p:nvSpPr>
-          <p:cNvPr id="19" name="TextBox 18"/>
-          <p:cNvSpPr txBox="1"/>
-          <p:nvPr/>
-        </p:nvSpPr>
-        <p:spPr>
-          <a:xfrm>
-            <a:off x="5029200" y="4846320"/>
-            <a:ext cx="6522415" cy="777240"/>
-          </a:xfrm>
-          <a:prstGeom prst="rect">
-            <a:avLst/>
-          </a:prstGeom>
-          <a:noFill/>
-        </p:spPr>
-        <p:txBody>
-          <a:bodyPr wrap="square" lIns="0" rIns="0" tIns="0" bIns="0" anchor="t">
-            <a:spAutoFit/>
-          </a:bodyPr>
-          <a:lstStyle/>
-          <a:p>
-            <a:pPr algn="l">
-              <a:lnSpc>
-                <a:spcPct val="110000"/>
-              </a:lnSpc>
-            </a:pPr>
-            <a:r>
-              <a:rPr sz="1600" b="0" i="0">
-                <a:solidFill>
-                  <a:srgbClr val="9BAFA4"/>
-                </a:solidFill>
-                <a:latin typeface="Archivo"/>
-              </a:rPr>
-              <a:t>Estados activos sin control médico.</a:t>
-            </a:r>
-          </a:p>
-        </p:txBody>
-      </p:sp>
-      <p:sp>
-        <p:nvSpPr>
-          <p:cNvPr id="20" name="TextBox 19"/>
-          <p:cNvSpPr txBox="1"/>
-          <p:nvPr/>
-        </p:nvSpPr>
-        <p:spPr>
-          <a:xfrm>
-            <a:off x="640080" y="6053328"/>
-            <a:ext cx="10911535" cy="274320"/>
-          </a:xfrm>
-          <a:prstGeom prst="rect">
-            <a:avLst/>
-          </a:prstGeom>
-          <a:noFill/>
-        </p:spPr>
-        <p:txBody>
-          <a:bodyPr wrap="square" lIns="0" rIns="0" tIns="0" bIns="0" anchor="t">
-            <a:spAutoFit/>
-          </a:bodyPr>
-          <a:lstStyle/>
-          <a:p>
-            <a:pPr algn="l">
-              <a:lnSpc>
-                <a:spcPct val="100000"/>
-              </a:lnSpc>
-            </a:pPr>
-            <a:r>
-              <a:rPr sz="1000" b="0" i="0">
-                <a:solidFill>
-                  <a:srgbClr val="9BAFA4"/>
-                </a:solidFill>
-                <a:latin typeface="Archivo"/>
-              </a:rPr>
-              <a:t>Fuente: presentación del Dr. Marco, diap. 48.</a:t>
-            </a:r>
-          </a:p>
-        </p:txBody>
-      </p:sp>
-      <p:cxnSp>
-        <p:nvCxnSpPr>
-          <p:cNvPr id="21" name="Connector 20"/>
-          <p:cNvCxnSpPr/>
-          <p:nvPr/>
-        </p:nvCxnSpPr>
-        <p:spPr>
-          <a:xfrm>
-            <a:off x="640080" y="6400800"/>
-            <a:ext cx="10911535" cy="0"/>
-          </a:xfrm>
-          <a:prstGeom prst="line">
-            <a:avLst/>
-          </a:prstGeom>
-          <a:ln w="6350">
-            <a:solidFill>
-              <a:srgbClr val="607E70"/>
-            </a:solidFill>
-          </a:ln>
-        </p:spPr>
-        <p:style>
-          <a:lnRef idx="2">
-            <a:schemeClr val="accent1"/>
-          </a:lnRef>
-          <a:fillRef idx="0">
-            <a:schemeClr val="accent1"/>
-          </a:fillRef>
-          <a:effectRef idx="1">
-            <a:schemeClr val="accent1"/>
-          </a:effectRef>
-          <a:fontRef idx="minor">
-            <a:schemeClr val="tx1"/>
-          </a:fontRef>
-        </p:style>
-      </p:cxnSp>
-      <p:sp>
-        <p:nvSpPr>
-          <p:cNvPr id="22" name="TextBox 21"/>
+          <p:cNvPr id="7" name="TextBox 6"/>
           <p:cNvSpPr txBox="1"/>
           <p:nvPr/>
         </p:nvSpPr>
@@ -34832,7 +33587,7 @@
       </p:sp>
       <p:sp>
         <p:nvSpPr>
-          <p:cNvPr id="23" name="TextBox 22"/>
+          <p:cNvPr id="8" name="TextBox 7"/>
           <p:cNvSpPr txBox="1"/>
           <p:nvPr/>
         </p:nvSpPr>
@@ -34864,7 +33619,7 @@
                 </a:solidFill>
                 <a:latin typeface="Archivo"/>
               </a:rPr>
-              <a:t>46 / 49</a:t>
+              <a:t>46 / 51</a:t>
             </a:r>
           </a:p>
         </p:txBody>
@@ -34904,7 +33659,7 @@
         <p:spPr>
           <a:xfrm>
             <a:off x="640080" y="502920"/>
-            <a:ext cx="2023201" cy="310896"/>
+            <a:ext cx="1924629" cy="310896"/>
           </a:xfrm>
           <a:prstGeom prst="roundRect">
             <a:avLst>
@@ -34950,7 +33705,7 @@
         <p:spPr>
           <a:xfrm>
             <a:off x="640080" y="502920"/>
-            <a:ext cx="2023201" cy="310896"/>
+            <a:ext cx="1924629" cy="310896"/>
           </a:xfrm>
           <a:prstGeom prst="rect">
             <a:avLst/>
@@ -34975,7 +33730,7 @@
                 </a:solidFill>
                 <a:latin typeface="Archivo"/>
               </a:rPr>
-              <a:t>SEÑALES DE ALARMA</a:t>
+              <a:t>ANTES DE EMPEZAR</a:t>
             </a:r>
           </a:p>
         </p:txBody>
@@ -35014,7 +33769,7 @@
                 </a:solidFill>
                 <a:latin typeface="Fraunces"/>
               </a:rPr>
-              <a:t>Suspender y consultar si aparece</a:t>
+              <a:t>Evaluación previa</a:t>
             </a:r>
           </a:p>
         </p:txBody>
@@ -35074,7 +33829,7 @@
         <p:spPr>
           <a:xfrm>
             <a:off x="896112" y="2468880"/>
-            <a:ext cx="2954426" cy="649224"/>
+            <a:ext cx="2954426" cy="379476"/>
           </a:xfrm>
           <a:prstGeom prst="rect">
             <a:avLst/>
@@ -35099,7 +33854,7 @@
                 </a:solidFill>
                 <a:latin typeface="Archivo"/>
               </a:rPr>
-              <a:t>Alergia grave</a:t>
+              <a:t>Sueño y ritmo</a:t>
             </a:r>
           </a:p>
         </p:txBody>
@@ -35112,8 +33867,8 @@
         </p:nvSpPr>
         <p:spPr>
           <a:xfrm>
-            <a:off x="896112" y="3191256"/>
-            <a:ext cx="2954426" cy="594359"/>
+            <a:off x="896112" y="2921508"/>
+            <a:ext cx="2954426" cy="864107"/>
           </a:xfrm>
           <a:prstGeom prst="rect">
             <a:avLst/>
@@ -35138,7 +33893,7 @@
                 </a:solidFill>
                 <a:latin typeface="Archivo"/>
               </a:rPr>
-              <a:t>Hinchazón de cara o garganta, dificultad para respirar.</a:t>
+              <a:t>Cómo duerme.</a:t>
             </a:r>
           </a:p>
         </p:txBody>
@@ -35198,7 +33953,7 @@
         <p:spPr>
           <a:xfrm>
             <a:off x="4618634" y="2468880"/>
-            <a:ext cx="2954426" cy="649224"/>
+            <a:ext cx="2954426" cy="379476"/>
           </a:xfrm>
           <a:prstGeom prst="rect">
             <a:avLst/>
@@ -35223,7 +33978,7 @@
                 </a:solidFill>
                 <a:latin typeface="Archivo"/>
               </a:rPr>
-              <a:t>Dolor de pecho o desmayo</a:t>
+              <a:t>Metabolismo</a:t>
             </a:r>
           </a:p>
         </p:txBody>
@@ -35236,8 +33991,8 @@
         </p:nvSpPr>
         <p:spPr>
           <a:xfrm>
-            <a:off x="4618634" y="3191256"/>
-            <a:ext cx="2954426" cy="594359"/>
+            <a:off x="4618634" y="2921508"/>
+            <a:ext cx="2954426" cy="864107"/>
           </a:xfrm>
           <a:prstGeom prst="rect">
             <a:avLst/>
@@ -35262,7 +34017,7 @@
                 </a:solidFill>
                 <a:latin typeface="Archivo"/>
               </a:rPr>
-              <a:t>Posible evento cardiovascular.</a:t>
+              <a:t>Glucemia y HOMA-IR.</a:t>
             </a:r>
           </a:p>
         </p:txBody>
@@ -35322,7 +34077,7 @@
         <p:spPr>
           <a:xfrm>
             <a:off x="8341156" y="2468880"/>
-            <a:ext cx="2954426" cy="649224"/>
+            <a:ext cx="2954426" cy="379476"/>
           </a:xfrm>
           <a:prstGeom prst="rect">
             <a:avLst/>
@@ -35347,7 +34102,7 @@
                 </a:solidFill>
                 <a:latin typeface="Archivo"/>
               </a:rPr>
-              <a:t>Dolor de abdomen intenso</a:t>
+              <a:t>Hígado y riñón</a:t>
             </a:r>
           </a:p>
         </p:txBody>
@@ -35360,8 +34115,8 @@
         </p:nvSpPr>
         <p:spPr>
           <a:xfrm>
-            <a:off x="8341156" y="3191256"/>
-            <a:ext cx="2954426" cy="594359"/>
+            <a:off x="8341156" y="2921508"/>
+            <a:ext cx="2954426" cy="864107"/>
           </a:xfrm>
           <a:prstGeom prst="rect">
             <a:avLst/>
@@ -35386,7 +34141,7 @@
                 </a:solidFill>
                 <a:latin typeface="Archivo"/>
               </a:rPr>
-              <a:t>Posible complicación digestiva.</a:t>
+              <a:t>Transaminasas, creatinina.</a:t>
             </a:r>
           </a:p>
         </p:txBody>
@@ -35471,7 +34226,7 @@
                 </a:solidFill>
                 <a:latin typeface="Archivo"/>
               </a:rPr>
-              <a:t>Infección local</a:t>
+              <a:t>Nutrición</a:t>
             </a:r>
           </a:p>
         </p:txBody>
@@ -35510,7 +34265,7 @@
                 </a:solidFill>
                 <a:latin typeface="Archivo"/>
               </a:rPr>
-              <a:t>Enrojecimiento, calor, pus en el sitio.</a:t>
+              <a:t>Vitamina D, zinc, magnesio, IMC y composición.</a:t>
             </a:r>
           </a:p>
         </p:txBody>
@@ -35595,7 +34350,7 @@
                 </a:solidFill>
                 <a:latin typeface="Archivo"/>
               </a:rPr>
-              <a:t>Cambios visuales</a:t>
+              <a:t>Salud mental</a:t>
             </a:r>
           </a:p>
         </p:txBody>
@@ -35634,7 +34389,7 @@
                 </a:solidFill>
                 <a:latin typeface="Archivo"/>
               </a:rPr>
-              <a:t>Súbitos: posible daño del nervio óptico.</a:t>
+              <a:t>Ansiedad y estrés.</a:t>
             </a:r>
           </a:p>
         </p:txBody>
@@ -35719,7 +34474,7 @@
                 </a:solidFill>
                 <a:latin typeface="Archivo"/>
               </a:rPr>
-              <a:t>Dolor muscular fuerte</a:t>
+              <a:t>Otras condiciones</a:t>
             </a:r>
           </a:p>
         </p:txBody>
@@ -35758,7 +34513,7 @@
                 </a:solidFill>
                 <a:latin typeface="Archivo"/>
               </a:rPr>
-              <a:t>Posible daño del músculo.</a:t>
+              <a:t>Biomarcadores según la historia.</a:t>
             </a:r>
           </a:p>
         </p:txBody>
@@ -35797,7 +34552,7 @@
                 </a:solidFill>
                 <a:latin typeface="Archivo"/>
               </a:rPr>
-              <a:t>Fuente: presentación del Dr. Marco, diap. 40 y 41.</a:t>
+              <a:t>Fuente: presentación del Dr. Marco, diap. 47.</a:t>
             </a:r>
           </a:p>
         </p:txBody>
@@ -35934,7 +34689,7 @@
                 </a:solidFill>
                 <a:latin typeface="Archivo"/>
               </a:rPr>
-              <a:t>47 / 49</a:t>
+              <a:t>47 / 51</a:t>
             </a:r>
           </a:p>
         </p:txBody>
@@ -35953,7 +34708,7 @@
     <p:bg>
       <p:bgPr>
         <a:solidFill>
-          <a:srgbClr val="173F33"/>
+          <a:srgbClr val="1F5142"/>
         </a:solidFill>
         <a:effectLst/>
       </p:bgPr>
@@ -35974,7 +34729,7 @@
         <p:spPr>
           <a:xfrm>
             <a:off x="640080" y="502920"/>
-            <a:ext cx="1530339" cy="310896"/>
+            <a:ext cx="2121773" cy="310896"/>
           </a:xfrm>
           <a:prstGeom prst="roundRect">
             <a:avLst>
@@ -36020,7 +34775,7 @@
         <p:spPr>
           <a:xfrm>
             <a:off x="640080" y="502920"/>
-            <a:ext cx="1530339" cy="310896"/>
+            <a:ext cx="2121773" cy="310896"/>
           </a:xfrm>
           <a:prstGeom prst="rect">
             <a:avLst/>
@@ -36045,7 +34800,7 @@
                 </a:solidFill>
                 <a:latin typeface="Archivo"/>
               </a:rPr>
-              <a:t>CONCLUSIONES</a:t>
+              <a:t>CONTRAINDICACIONES</a:t>
             </a:r>
           </a:p>
         </p:txBody>
@@ -36084,7 +34839,7 @@
                 </a:solidFill>
                 <a:latin typeface="Fraunces"/>
               </a:rPr>
-              <a:t>Cuatro ideas para llevarte</a:t>
+              <a:t>Cuándo no</a:t>
             </a:r>
           </a:p>
         </p:txBody>
@@ -36156,13 +34911,13 @@
               </a:lnSpc>
             </a:pPr>
             <a:r>
-              <a:rPr sz="1800" b="1" i="0">
+              <a:rPr sz="2000" b="1" i="0">
                 <a:solidFill>
                   <a:srgbClr val="FFF9EE"/>
                 </a:solidFill>
                 <a:latin typeface="Archivo"/>
               </a:rPr>
-              <a:t>Péptido no es sinónimo de seguro</a:t>
+              <a:t>Cáncer activo</a:t>
             </a:r>
           </a:p>
         </p:txBody>
@@ -36195,13 +34950,13 @@
               </a:lnSpc>
             </a:pPr>
             <a:r>
-              <a:rPr sz="1500" b="0" i="0">
+              <a:rPr sz="1600" b="0" i="0">
                 <a:solidFill>
                   <a:srgbClr val="9BAFA4"/>
                 </a:solidFill>
                 <a:latin typeface="Archivo"/>
               </a:rPr>
-              <a:t>Cada molécula tiene su evidencia.</a:t>
+              <a:t>Cualquier neoplasia sin tratar.</a:t>
             </a:r>
           </a:p>
         </p:txBody>
@@ -36308,13 +35063,13 @@
               </a:lnSpc>
             </a:pPr>
             <a:r>
-              <a:rPr sz="1800" b="1" i="0">
+              <a:rPr sz="2000" b="1" i="0">
                 <a:solidFill>
                   <a:srgbClr val="FFF9EE"/>
                 </a:solidFill>
                 <a:latin typeface="Archivo"/>
               </a:rPr>
-              <a:t>Mira el estatus</a:t>
+              <a:t>Embarazo y lactancia</a:t>
             </a:r>
           </a:p>
         </p:txBody>
@@ -36347,13 +35102,13 @@
               </a:lnSpc>
             </a:pPr>
             <a:r>
-              <a:rPr sz="1500" b="0" i="0">
+              <a:rPr sz="1600" b="0" i="0">
                 <a:solidFill>
                   <a:srgbClr val="9BAFA4"/>
                 </a:solidFill>
                 <a:latin typeface="Archivo"/>
               </a:rPr>
-              <a:t>Aprobado, fuera de indicación o experimental.</a:t>
+              <a:t>No se recomienda.</a:t>
             </a:r>
           </a:p>
         </p:txBody>
@@ -36460,13 +35215,13 @@
               </a:lnSpc>
             </a:pPr>
             <a:r>
-              <a:rPr sz="1800" b="1" i="0">
+              <a:rPr sz="2000" b="1" i="0">
                 <a:solidFill>
                   <a:srgbClr val="FFF9EE"/>
                 </a:solidFill>
                 <a:latin typeface="Archivo"/>
               </a:rPr>
-              <a:t>Pide la fuente</a:t>
+              <a:t>Autoinmunes</a:t>
             </a:r>
           </a:p>
         </p:txBody>
@@ -36499,13 +35254,13 @@
               </a:lnSpc>
             </a:pPr>
             <a:r>
-              <a:rPr sz="1500" b="0" i="0">
+              <a:rPr sz="1600" b="0" i="0">
                 <a:solidFill>
                   <a:srgbClr val="9BAFA4"/>
                 </a:solidFill>
                 <a:latin typeface="Archivo"/>
               </a:rPr>
-              <a:t>Evidencia humana y producto con registro.</a:t>
+              <a:t>Enfermedades descompensadas.</a:t>
             </a:r>
           </a:p>
         </p:txBody>
@@ -36612,13 +35367,13 @@
               </a:lnSpc>
             </a:pPr>
             <a:r>
-              <a:rPr sz="1800" b="1" i="0">
+              <a:rPr sz="2000" b="1" i="0">
                 <a:solidFill>
                   <a:srgbClr val="FFF9EE"/>
                 </a:solidFill>
                 <a:latin typeface="Archivo"/>
               </a:rPr>
-              <a:t>Siempre con un médico</a:t>
+              <a:t>Proliferativos</a:t>
             </a:r>
           </a:p>
         </p:txBody>
@@ -36651,20 +35406,59 @@
               </a:lnSpc>
             </a:pPr>
             <a:r>
-              <a:rPr sz="1500" b="0" i="0">
+              <a:rPr sz="1600" b="0" i="0">
                 <a:solidFill>
                   <a:srgbClr val="9BAFA4"/>
                 </a:solidFill>
                 <a:latin typeface="Archivo"/>
               </a:rPr>
-              <a:t>Y con el plan de estilo de vida.</a:t>
+              <a:t>Estados activos sin control médico.</a:t>
+            </a:r>
+          </a:p>
+        </p:txBody>
+      </p:sp>
+      <p:sp>
+        <p:nvSpPr>
+          <p:cNvPr id="20" name="TextBox 19"/>
+          <p:cNvSpPr txBox="1"/>
+          <p:nvPr/>
+        </p:nvSpPr>
+        <p:spPr>
+          <a:xfrm>
+            <a:off x="640080" y="6053328"/>
+            <a:ext cx="10911535" cy="274320"/>
+          </a:xfrm>
+          <a:prstGeom prst="rect">
+            <a:avLst/>
+          </a:prstGeom>
+          <a:noFill/>
+        </p:spPr>
+        <p:txBody>
+          <a:bodyPr wrap="square" lIns="0" rIns="0" tIns="0" bIns="0" anchor="t">
+            <a:spAutoFit/>
+          </a:bodyPr>
+          <a:lstStyle/>
+          <a:p>
+            <a:pPr algn="l">
+              <a:lnSpc>
+                <a:spcPct val="100000"/>
+              </a:lnSpc>
+            </a:pPr>
+            <a:r>
+              <a:rPr sz="1000" b="0" i="0">
+                <a:solidFill>
+                  <a:srgbClr val="9BAFA4"/>
+                </a:solidFill>
+                <a:latin typeface="Archivo"/>
+              </a:rPr>
+              <a:t>Fuente: presentación del Dr. Marco, diap. 48.</a:t>
             </a:r>
           </a:p>
         </p:txBody>
       </p:sp>
       <p:cxnSp>
         <p:nvCxnSpPr>
-          <p:cNvPr id="20" name="Connector 19"/>
+          <p:cNvPr id="21" name="Connector 20"/>
           <p:cNvCxnSpPr/>
           <p:nvPr/>
         </p:nvCxnSpPr>
@@ -36699,7 +35493,7 @@
       </p:cxnSp>
       <p:sp>
         <p:nvSpPr>
-          <p:cNvPr id="21" name="TextBox 20"/>
+          <p:cNvPr id="22" name="TextBox 21"/>
           <p:cNvSpPr txBox="1"/>
           <p:nvPr/>
         </p:nvSpPr>
@@ -36738,7 +35532,7 @@
       </p:sp>
       <p:sp>
         <p:nvSpPr>
-          <p:cNvPr id="22" name="TextBox 21"/>
+          <p:cNvPr id="23" name="TextBox 22"/>
           <p:cNvSpPr txBox="1"/>
           <p:nvPr/>
         </p:nvSpPr>
@@ -36770,7 +35564,7 @@
                 </a:solidFill>
                 <a:latin typeface="Archivo"/>
               </a:rPr>
-              <a:t>48 / 49</a:t>
+              <a:t>48 / 51</a:t>
             </a:r>
           </a:p>
         </p:txBody>
@@ -36789,7 +35583,7 @@
     <p:bg>
       <p:bgPr>
         <a:solidFill>
-          <a:srgbClr val="173F33"/>
+          <a:srgbClr val="F7F1E5"/>
         </a:solidFill>
         <a:effectLst/>
       </p:bgPr>
@@ -36803,156 +35597,22 @@
       <p:grpSpPr/>
       <p:sp>
         <p:nvSpPr>
-          <p:cNvPr id="2" name="TextBox 1"/>
-          <p:cNvSpPr txBox="1"/>
-          <p:nvPr/>
-        </p:nvSpPr>
-        <p:spPr>
-          <a:xfrm>
-            <a:off x="640080" y="685800"/>
-            <a:ext cx="6949440" cy="1280160"/>
-          </a:xfrm>
-          <a:prstGeom prst="rect">
-            <a:avLst/>
-          </a:prstGeom>
-          <a:noFill/>
-        </p:spPr>
-        <p:txBody>
-          <a:bodyPr wrap="square" lIns="0" rIns="0" tIns="0" bIns="0" anchor="t">
-            <a:spAutoFit/>
-          </a:bodyPr>
-          <a:lstStyle/>
-          <a:p>
-            <a:pPr algn="l">
-              <a:lnSpc>
-                <a:spcPct val="102000"/>
-              </a:lnSpc>
-            </a:pPr>
-            <a:r>
-              <a:rPr sz="3800" b="1" i="0">
-                <a:solidFill>
-                  <a:srgbClr val="FFF9EE"/>
-                </a:solidFill>
-                <a:latin typeface="Fraunces"/>
-              </a:rPr>
-              <a:t>Gracias por acompañarnos</a:t>
-            </a:r>
-          </a:p>
-        </p:txBody>
-      </p:sp>
-      <p:sp>
-        <p:nvSpPr>
-          <p:cNvPr id="3" name="TextBox 2"/>
-          <p:cNvSpPr txBox="1"/>
-          <p:nvPr/>
-        </p:nvSpPr>
-        <p:spPr>
-          <a:xfrm>
-            <a:off x="640080" y="2057400"/>
-            <a:ext cx="6766560" cy="2194560"/>
-          </a:xfrm>
-          <a:prstGeom prst="rect">
-            <a:avLst/>
-          </a:prstGeom>
-          <a:noFill/>
-        </p:spPr>
-        <p:txBody>
-          <a:bodyPr wrap="square" lIns="0" rIns="0" tIns="0" bIns="0" anchor="t">
-            <a:spAutoFit/>
-          </a:bodyPr>
-          <a:lstStyle/>
-          <a:p>
-            <a:pPr algn="l" marL="256032" indent="-256032">
-              <a:lnSpc>
-                <a:spcPct val="115000"/>
-              </a:lnSpc>
-              <a:spcAft>
-                <a:spcPts val="1000"/>
-              </a:spcAft>
-              <a:buClr>
-                <a:srgbClr val="E4AA18"/>
-              </a:buClr>
-              <a:buFont typeface="Arial"/>
-              <a:buChar char="■"/>
-            </a:pPr>
-            <a:r>
-              <a:rPr sz="1800" b="0" i="0">
-                <a:solidFill>
-                  <a:srgbClr val="FFF9EE"/>
-                </a:solidFill>
-                <a:latin typeface="Archivo"/>
-              </a:rPr>
-              <a:t>Esta clase es informativa y educativa</a:t>
-            </a:r>
-          </a:p>
-          <a:p>
-            <a:pPr algn="l" marL="256032" indent="-256032">
-              <a:lnSpc>
-                <a:spcPct val="115000"/>
-              </a:lnSpc>
-              <a:spcAft>
-                <a:spcPts val="1000"/>
-              </a:spcAft>
-              <a:buClr>
-                <a:srgbClr val="E4AA18"/>
-              </a:buClr>
-              <a:buFont typeface="Arial"/>
-              <a:buChar char="■"/>
-            </a:pPr>
-            <a:r>
-              <a:rPr sz="1800" b="0" i="0">
-                <a:solidFill>
-                  <a:srgbClr val="FFF9EE"/>
-                </a:solidFill>
-                <a:latin typeface="Archivo"/>
-              </a:rPr>
-              <a:t>Los medicamentos mencionados son de prescripción</a:t>
-            </a:r>
-          </a:p>
-          <a:p>
-            <a:pPr algn="l" marL="256032" indent="-256032">
-              <a:lnSpc>
-                <a:spcPct val="115000"/>
-              </a:lnSpc>
-              <a:spcAft>
-                <a:spcPts val="1000"/>
-              </a:spcAft>
-              <a:buClr>
-                <a:srgbClr val="E4AA18"/>
-              </a:buClr>
-              <a:buFont typeface="Arial"/>
-              <a:buChar char="■"/>
-            </a:pPr>
-            <a:r>
-              <a:rPr sz="1800" b="0" i="0">
-                <a:solidFill>
-                  <a:srgbClr val="FFF9EE"/>
-                </a:solidFill>
-                <a:latin typeface="Archivo"/>
-              </a:rPr>
-              <a:t>Verifica siempre el registro en tu país</a:t>
-            </a:r>
-          </a:p>
-        </p:txBody>
-      </p:sp>
-      <p:sp>
-        <p:nvSpPr>
-          <p:cNvPr id="4" name="Rounded Rectangle 3"/>
+          <p:cNvPr id="2" name="Rounded Rectangle 1"/>
           <p:cNvSpPr/>
           <p:nvPr/>
         </p:nvSpPr>
         <p:spPr>
           <a:xfrm>
-            <a:off x="640080" y="4617720"/>
-            <a:ext cx="10911535" cy="1371600"/>
+            <a:off x="640080" y="502920"/>
+            <a:ext cx="2023201" cy="310896"/>
           </a:xfrm>
           <a:prstGeom prst="roundRect">
             <a:avLst>
-              <a:gd name="adj" fmla="val 5333"/>
+              <a:gd name="adj" fmla="val 11764"/>
             </a:avLst>
           </a:prstGeom>
           <a:solidFill>
-            <a:srgbClr val="1F5142"/>
+            <a:srgbClr val="E4AA18"/>
           </a:solidFill>
           <a:ln>
             <a:noFill/>
@@ -36983,14 +35643,14 @@
       </p:sp>
       <p:sp>
         <p:nvSpPr>
-          <p:cNvPr id="5" name="TextBox 4"/>
-          <p:cNvSpPr txBox="1"/>
-          <p:nvPr/>
-        </p:nvSpPr>
-        <p:spPr>
-          <a:xfrm>
-            <a:off x="914400" y="4709160"/>
-            <a:ext cx="9082735" cy="1188720"/>
+          <p:cNvPr id="3" name="TextBox 2"/>
+          <p:cNvSpPr txBox="1"/>
+          <p:nvPr/>
+        </p:nvSpPr>
+        <p:spPr>
+          <a:xfrm>
+            <a:off x="640080" y="502920"/>
+            <a:ext cx="2023201" cy="310896"/>
           </a:xfrm>
           <a:prstGeom prst="rect">
             <a:avLst/>
@@ -37003,39 +35663,80 @@
           </a:bodyPr>
           <a:lstStyle/>
           <a:p>
-            <a:pPr algn="l">
-              <a:lnSpc>
-                <a:spcPct val="120000"/>
-              </a:lnSpc>
-            </a:pPr>
-            <a:r>
-              <a:rPr sz="1150" b="0" i="0">
-                <a:solidFill>
-                  <a:srgbClr val="9BAFA4"/>
-                </a:solidFill>
-                <a:latin typeface="Archivo"/>
-              </a:rPr>
-              <a:t>Las masterclasses son informativas y educativas. No constituyen diagnóstico, tratamiento ni prescripción personalizada, y no reemplazan la consulta médica. El Dr. Marco Sosa es Director Científico de Lumineight y percibe una participación sobre sus ventas; se declara para que lo tengas en cuenta al valorar lo que escuches.</a:t>
-            </a:r>
-          </a:p>
-        </p:txBody>
-      </p:sp>
-      <p:sp>
-        <p:nvSpPr>
-          <p:cNvPr id="6" name="Oval 5"/>
+            <a:pPr algn="ctr">
+              <a:lnSpc>
+                <a:spcPct val="110000"/>
+              </a:lnSpc>
+            </a:pPr>
+            <a:r>
+              <a:rPr sz="1100" b="1" i="0" spc="80">
+                <a:solidFill>
+                  <a:srgbClr val="173F33"/>
+                </a:solidFill>
+                <a:latin typeface="Archivo"/>
+              </a:rPr>
+              <a:t>SEÑALES DE ALARMA</a:t>
+            </a:r>
+          </a:p>
+        </p:txBody>
+      </p:sp>
+      <p:sp>
+        <p:nvSpPr>
+          <p:cNvPr id="4" name="TextBox 3"/>
+          <p:cNvSpPr txBox="1"/>
+          <p:nvPr/>
+        </p:nvSpPr>
+        <p:spPr>
+          <a:xfrm>
+            <a:off x="640080" y="932688"/>
+            <a:ext cx="10911535" cy="1097280"/>
+          </a:xfrm>
+          <a:prstGeom prst="rect">
+            <a:avLst/>
+          </a:prstGeom>
+          <a:noFill/>
+        </p:spPr>
+        <p:txBody>
+          <a:bodyPr wrap="square" lIns="0" rIns="0" tIns="0" bIns="0" anchor="t">
+            <a:spAutoFit/>
+          </a:bodyPr>
+          <a:lstStyle/>
+          <a:p>
+            <a:pPr algn="l">
+              <a:lnSpc>
+                <a:spcPct val="100000"/>
+              </a:lnSpc>
+            </a:pPr>
+            <a:r>
+              <a:rPr sz="3200" b="1" i="0">
+                <a:solidFill>
+                  <a:srgbClr val="15261F"/>
+                </a:solidFill>
+                <a:latin typeface="Fraunces"/>
+              </a:rPr>
+              <a:t>Suspender y consultar si aparece</a:t>
+            </a:r>
+          </a:p>
+        </p:txBody>
+      </p:sp>
+      <p:sp>
+        <p:nvSpPr>
+          <p:cNvPr id="5" name="Rounded Rectangle 4"/>
           <p:cNvSpPr/>
           <p:nvPr/>
         </p:nvSpPr>
         <p:spPr>
           <a:xfrm>
-            <a:off x="10500055" y="4773168"/>
-            <a:ext cx="1051560" cy="1051560"/>
-          </a:xfrm>
-          <a:prstGeom prst="ellipse">
-            <a:avLst/>
+            <a:off x="640080" y="2240280"/>
+            <a:ext cx="3466490" cy="1746503"/>
+          </a:xfrm>
+          <a:prstGeom prst="roundRect">
+            <a:avLst>
+              <a:gd name="adj" fmla="val 4188"/>
+            </a:avLst>
           </a:prstGeom>
           <a:solidFill>
-            <a:srgbClr val="FFF9EE"/>
+            <a:srgbClr val="E4EDE7"/>
           </a:solidFill>
           <a:ln>
             <a:noFill/>
@@ -37064,9 +35765,781 @@
           </a:p>
         </p:txBody>
       </p:sp>
+      <p:sp>
+        <p:nvSpPr>
+          <p:cNvPr id="6" name="TextBox 5"/>
+          <p:cNvSpPr txBox="1"/>
+          <p:nvPr/>
+        </p:nvSpPr>
+        <p:spPr>
+          <a:xfrm>
+            <a:off x="896112" y="2468880"/>
+            <a:ext cx="2954426" cy="649224"/>
+          </a:xfrm>
+          <a:prstGeom prst="rect">
+            <a:avLst/>
+          </a:prstGeom>
+          <a:noFill/>
+        </p:spPr>
+        <p:txBody>
+          <a:bodyPr wrap="square" lIns="0" rIns="0" tIns="0" bIns="0" anchor="t">
+            <a:spAutoFit/>
+          </a:bodyPr>
+          <a:lstStyle/>
+          <a:p>
+            <a:pPr algn="l">
+              <a:lnSpc>
+                <a:spcPct val="105000"/>
+              </a:lnSpc>
+            </a:pPr>
+            <a:r>
+              <a:rPr sz="1800" b="1" i="0">
+                <a:solidFill>
+                  <a:srgbClr val="173F33"/>
+                </a:solidFill>
+                <a:latin typeface="Archivo"/>
+              </a:rPr>
+              <a:t>Alergia grave</a:t>
+            </a:r>
+          </a:p>
+        </p:txBody>
+      </p:sp>
+      <p:sp>
+        <p:nvSpPr>
+          <p:cNvPr id="7" name="TextBox 6"/>
+          <p:cNvSpPr txBox="1"/>
+          <p:nvPr/>
+        </p:nvSpPr>
+        <p:spPr>
+          <a:xfrm>
+            <a:off x="896112" y="3191256"/>
+            <a:ext cx="2954426" cy="594359"/>
+          </a:xfrm>
+          <a:prstGeom prst="rect">
+            <a:avLst/>
+          </a:prstGeom>
+          <a:noFill/>
+        </p:spPr>
+        <p:txBody>
+          <a:bodyPr wrap="square" lIns="0" rIns="0" tIns="0" bIns="0" anchor="t">
+            <a:spAutoFit/>
+          </a:bodyPr>
+          <a:lstStyle/>
+          <a:p>
+            <a:pPr algn="l">
+              <a:lnSpc>
+                <a:spcPct val="115000"/>
+              </a:lnSpc>
+            </a:pPr>
+            <a:r>
+              <a:rPr sz="1400" b="0" i="0">
+                <a:solidFill>
+                  <a:srgbClr val="15261F"/>
+                </a:solidFill>
+                <a:latin typeface="Archivo"/>
+              </a:rPr>
+              <a:t>Hinchazón de cara o garganta, dificultad para respirar.</a:t>
+            </a:r>
+          </a:p>
+        </p:txBody>
+      </p:sp>
+      <p:sp>
+        <p:nvSpPr>
+          <p:cNvPr id="8" name="Rounded Rectangle 7"/>
+          <p:cNvSpPr/>
+          <p:nvPr/>
+        </p:nvSpPr>
+        <p:spPr>
+          <a:xfrm>
+            <a:off x="4362602" y="2240280"/>
+            <a:ext cx="3466490" cy="1746503"/>
+          </a:xfrm>
+          <a:prstGeom prst="roundRect">
+            <a:avLst>
+              <a:gd name="adj" fmla="val 4188"/>
+            </a:avLst>
+          </a:prstGeom>
+          <a:solidFill>
+            <a:srgbClr val="E4EDE7"/>
+          </a:solidFill>
+          <a:ln>
+            <a:noFill/>
+          </a:ln>
+          <a:effectLst/>
+        </p:spPr>
+        <p:style>
+          <a:lnRef idx="1">
+            <a:schemeClr val="accent1"/>
+          </a:lnRef>
+          <a:fillRef idx="3">
+            <a:schemeClr val="accent1"/>
+          </a:fillRef>
+          <a:effectRef idx="2">
+            <a:schemeClr val="accent1"/>
+          </a:effectRef>
+          <a:fontRef idx="minor">
+            <a:schemeClr val="lt1"/>
+          </a:fontRef>
+        </p:style>
+        <p:txBody>
+          <a:bodyPr rtlCol="0" anchor="ctr"/>
+          <a:lstStyle/>
+          <a:p>
+            <a:pPr algn="ctr"/>
+          </a:p>
+        </p:txBody>
+      </p:sp>
+      <p:sp>
+        <p:nvSpPr>
+          <p:cNvPr id="9" name="TextBox 8"/>
+          <p:cNvSpPr txBox="1"/>
+          <p:nvPr/>
+        </p:nvSpPr>
+        <p:spPr>
+          <a:xfrm>
+            <a:off x="4618634" y="2468880"/>
+            <a:ext cx="2954426" cy="649224"/>
+          </a:xfrm>
+          <a:prstGeom prst="rect">
+            <a:avLst/>
+          </a:prstGeom>
+          <a:noFill/>
+        </p:spPr>
+        <p:txBody>
+          <a:bodyPr wrap="square" lIns="0" rIns="0" tIns="0" bIns="0" anchor="t">
+            <a:spAutoFit/>
+          </a:bodyPr>
+          <a:lstStyle/>
+          <a:p>
+            <a:pPr algn="l">
+              <a:lnSpc>
+                <a:spcPct val="105000"/>
+              </a:lnSpc>
+            </a:pPr>
+            <a:r>
+              <a:rPr sz="1800" b="1" i="0">
+                <a:solidFill>
+                  <a:srgbClr val="173F33"/>
+                </a:solidFill>
+                <a:latin typeface="Archivo"/>
+              </a:rPr>
+              <a:t>Dolor de pecho o desmayo</a:t>
+            </a:r>
+          </a:p>
+        </p:txBody>
+      </p:sp>
+      <p:sp>
+        <p:nvSpPr>
+          <p:cNvPr id="10" name="TextBox 9"/>
+          <p:cNvSpPr txBox="1"/>
+          <p:nvPr/>
+        </p:nvSpPr>
+        <p:spPr>
+          <a:xfrm>
+            <a:off x="4618634" y="3191256"/>
+            <a:ext cx="2954426" cy="594359"/>
+          </a:xfrm>
+          <a:prstGeom prst="rect">
+            <a:avLst/>
+          </a:prstGeom>
+          <a:noFill/>
+        </p:spPr>
+        <p:txBody>
+          <a:bodyPr wrap="square" lIns="0" rIns="0" tIns="0" bIns="0" anchor="t">
+            <a:spAutoFit/>
+          </a:bodyPr>
+          <a:lstStyle/>
+          <a:p>
+            <a:pPr algn="l">
+              <a:lnSpc>
+                <a:spcPct val="115000"/>
+              </a:lnSpc>
+            </a:pPr>
+            <a:r>
+              <a:rPr sz="1400" b="0" i="0">
+                <a:solidFill>
+                  <a:srgbClr val="15261F"/>
+                </a:solidFill>
+                <a:latin typeface="Archivo"/>
+              </a:rPr>
+              <a:t>Posible evento cardiovascular.</a:t>
+            </a:r>
+          </a:p>
+        </p:txBody>
+      </p:sp>
+      <p:sp>
+        <p:nvSpPr>
+          <p:cNvPr id="11" name="Rounded Rectangle 10"/>
+          <p:cNvSpPr/>
+          <p:nvPr/>
+        </p:nvSpPr>
+        <p:spPr>
+          <a:xfrm>
+            <a:off x="8085124" y="2240280"/>
+            <a:ext cx="3466490" cy="1746503"/>
+          </a:xfrm>
+          <a:prstGeom prst="roundRect">
+            <a:avLst>
+              <a:gd name="adj" fmla="val 4188"/>
+            </a:avLst>
+          </a:prstGeom>
+          <a:solidFill>
+            <a:srgbClr val="E4EDE7"/>
+          </a:solidFill>
+          <a:ln>
+            <a:noFill/>
+          </a:ln>
+          <a:effectLst/>
+        </p:spPr>
+        <p:style>
+          <a:lnRef idx="1">
+            <a:schemeClr val="accent1"/>
+          </a:lnRef>
+          <a:fillRef idx="3">
+            <a:schemeClr val="accent1"/>
+          </a:fillRef>
+          <a:effectRef idx="2">
+            <a:schemeClr val="accent1"/>
+          </a:effectRef>
+          <a:fontRef idx="minor">
+            <a:schemeClr val="lt1"/>
+          </a:fontRef>
+        </p:style>
+        <p:txBody>
+          <a:bodyPr rtlCol="0" anchor="ctr"/>
+          <a:lstStyle/>
+          <a:p>
+            <a:pPr algn="ctr"/>
+          </a:p>
+        </p:txBody>
+      </p:sp>
+      <p:sp>
+        <p:nvSpPr>
+          <p:cNvPr id="12" name="TextBox 11"/>
+          <p:cNvSpPr txBox="1"/>
+          <p:nvPr/>
+        </p:nvSpPr>
+        <p:spPr>
+          <a:xfrm>
+            <a:off x="8341156" y="2468880"/>
+            <a:ext cx="2954426" cy="649224"/>
+          </a:xfrm>
+          <a:prstGeom prst="rect">
+            <a:avLst/>
+          </a:prstGeom>
+          <a:noFill/>
+        </p:spPr>
+        <p:txBody>
+          <a:bodyPr wrap="square" lIns="0" rIns="0" tIns="0" bIns="0" anchor="t">
+            <a:spAutoFit/>
+          </a:bodyPr>
+          <a:lstStyle/>
+          <a:p>
+            <a:pPr algn="l">
+              <a:lnSpc>
+                <a:spcPct val="105000"/>
+              </a:lnSpc>
+            </a:pPr>
+            <a:r>
+              <a:rPr sz="1800" b="1" i="0">
+                <a:solidFill>
+                  <a:srgbClr val="173F33"/>
+                </a:solidFill>
+                <a:latin typeface="Archivo"/>
+              </a:rPr>
+              <a:t>Dolor de abdomen intenso</a:t>
+            </a:r>
+          </a:p>
+        </p:txBody>
+      </p:sp>
+      <p:sp>
+        <p:nvSpPr>
+          <p:cNvPr id="13" name="TextBox 12"/>
+          <p:cNvSpPr txBox="1"/>
+          <p:nvPr/>
+        </p:nvSpPr>
+        <p:spPr>
+          <a:xfrm>
+            <a:off x="8341156" y="3191256"/>
+            <a:ext cx="2954426" cy="594359"/>
+          </a:xfrm>
+          <a:prstGeom prst="rect">
+            <a:avLst/>
+          </a:prstGeom>
+          <a:noFill/>
+        </p:spPr>
+        <p:txBody>
+          <a:bodyPr wrap="square" lIns="0" rIns="0" tIns="0" bIns="0" anchor="t">
+            <a:spAutoFit/>
+          </a:bodyPr>
+          <a:lstStyle/>
+          <a:p>
+            <a:pPr algn="l">
+              <a:lnSpc>
+                <a:spcPct val="115000"/>
+              </a:lnSpc>
+            </a:pPr>
+            <a:r>
+              <a:rPr sz="1400" b="0" i="0">
+                <a:solidFill>
+                  <a:srgbClr val="15261F"/>
+                </a:solidFill>
+                <a:latin typeface="Archivo"/>
+              </a:rPr>
+              <a:t>Posible complicación digestiva.</a:t>
+            </a:r>
+          </a:p>
+        </p:txBody>
+      </p:sp>
+      <p:sp>
+        <p:nvSpPr>
+          <p:cNvPr id="14" name="Rounded Rectangle 13"/>
+          <p:cNvSpPr/>
+          <p:nvPr/>
+        </p:nvSpPr>
+        <p:spPr>
+          <a:xfrm>
+            <a:off x="640080" y="4242816"/>
+            <a:ext cx="3466490" cy="1746503"/>
+          </a:xfrm>
+          <a:prstGeom prst="roundRect">
+            <a:avLst>
+              <a:gd name="adj" fmla="val 4188"/>
+            </a:avLst>
+          </a:prstGeom>
+          <a:solidFill>
+            <a:srgbClr val="E4EDE7"/>
+          </a:solidFill>
+          <a:ln>
+            <a:noFill/>
+          </a:ln>
+          <a:effectLst/>
+        </p:spPr>
+        <p:style>
+          <a:lnRef idx="1">
+            <a:schemeClr val="accent1"/>
+          </a:lnRef>
+          <a:fillRef idx="3">
+            <a:schemeClr val="accent1"/>
+          </a:fillRef>
+          <a:effectRef idx="2">
+            <a:schemeClr val="accent1"/>
+          </a:effectRef>
+          <a:fontRef idx="minor">
+            <a:schemeClr val="lt1"/>
+          </a:fontRef>
+        </p:style>
+        <p:txBody>
+          <a:bodyPr rtlCol="0" anchor="ctr"/>
+          <a:lstStyle/>
+          <a:p>
+            <a:pPr algn="ctr"/>
+          </a:p>
+        </p:txBody>
+      </p:sp>
+      <p:sp>
+        <p:nvSpPr>
+          <p:cNvPr id="15" name="TextBox 14"/>
+          <p:cNvSpPr txBox="1"/>
+          <p:nvPr/>
+        </p:nvSpPr>
+        <p:spPr>
+          <a:xfrm>
+            <a:off x="896112" y="4471416"/>
+            <a:ext cx="2954426" cy="379476"/>
+          </a:xfrm>
+          <a:prstGeom prst="rect">
+            <a:avLst/>
+          </a:prstGeom>
+          <a:noFill/>
+        </p:spPr>
+        <p:txBody>
+          <a:bodyPr wrap="square" lIns="0" rIns="0" tIns="0" bIns="0" anchor="t">
+            <a:spAutoFit/>
+          </a:bodyPr>
+          <a:lstStyle/>
+          <a:p>
+            <a:pPr algn="l">
+              <a:lnSpc>
+                <a:spcPct val="105000"/>
+              </a:lnSpc>
+            </a:pPr>
+            <a:r>
+              <a:rPr sz="1800" b="1" i="0">
+                <a:solidFill>
+                  <a:srgbClr val="173F33"/>
+                </a:solidFill>
+                <a:latin typeface="Archivo"/>
+              </a:rPr>
+              <a:t>Infección local</a:t>
+            </a:r>
+          </a:p>
+        </p:txBody>
+      </p:sp>
+      <p:sp>
+        <p:nvSpPr>
+          <p:cNvPr id="16" name="TextBox 15"/>
+          <p:cNvSpPr txBox="1"/>
+          <p:nvPr/>
+        </p:nvSpPr>
+        <p:spPr>
+          <a:xfrm>
+            <a:off x="896112" y="4924044"/>
+            <a:ext cx="2954426" cy="864107"/>
+          </a:xfrm>
+          <a:prstGeom prst="rect">
+            <a:avLst/>
+          </a:prstGeom>
+          <a:noFill/>
+        </p:spPr>
+        <p:txBody>
+          <a:bodyPr wrap="square" lIns="0" rIns="0" tIns="0" bIns="0" anchor="t">
+            <a:spAutoFit/>
+          </a:bodyPr>
+          <a:lstStyle/>
+          <a:p>
+            <a:pPr algn="l">
+              <a:lnSpc>
+                <a:spcPct val="115000"/>
+              </a:lnSpc>
+            </a:pPr>
+            <a:r>
+              <a:rPr sz="1400" b="0" i="0">
+                <a:solidFill>
+                  <a:srgbClr val="15261F"/>
+                </a:solidFill>
+                <a:latin typeface="Archivo"/>
+              </a:rPr>
+              <a:t>Enrojecimiento, calor, pus en el sitio.</a:t>
+            </a:r>
+          </a:p>
+        </p:txBody>
+      </p:sp>
+      <p:sp>
+        <p:nvSpPr>
+          <p:cNvPr id="17" name="Rounded Rectangle 16"/>
+          <p:cNvSpPr/>
+          <p:nvPr/>
+        </p:nvSpPr>
+        <p:spPr>
+          <a:xfrm>
+            <a:off x="4362602" y="4242816"/>
+            <a:ext cx="3466490" cy="1746503"/>
+          </a:xfrm>
+          <a:prstGeom prst="roundRect">
+            <a:avLst>
+              <a:gd name="adj" fmla="val 4188"/>
+            </a:avLst>
+          </a:prstGeom>
+          <a:solidFill>
+            <a:srgbClr val="E4EDE7"/>
+          </a:solidFill>
+          <a:ln>
+            <a:noFill/>
+          </a:ln>
+          <a:effectLst/>
+        </p:spPr>
+        <p:style>
+          <a:lnRef idx="1">
+            <a:schemeClr val="accent1"/>
+          </a:lnRef>
+          <a:fillRef idx="3">
+            <a:schemeClr val="accent1"/>
+          </a:fillRef>
+          <a:effectRef idx="2">
+            <a:schemeClr val="accent1"/>
+          </a:effectRef>
+          <a:fontRef idx="minor">
+            <a:schemeClr val="lt1"/>
+          </a:fontRef>
+        </p:style>
+        <p:txBody>
+          <a:bodyPr rtlCol="0" anchor="ctr"/>
+          <a:lstStyle/>
+          <a:p>
+            <a:pPr algn="ctr"/>
+          </a:p>
+        </p:txBody>
+      </p:sp>
+      <p:sp>
+        <p:nvSpPr>
+          <p:cNvPr id="18" name="TextBox 17"/>
+          <p:cNvSpPr txBox="1"/>
+          <p:nvPr/>
+        </p:nvSpPr>
+        <p:spPr>
+          <a:xfrm>
+            <a:off x="4618634" y="4471416"/>
+            <a:ext cx="2954426" cy="379476"/>
+          </a:xfrm>
+          <a:prstGeom prst="rect">
+            <a:avLst/>
+          </a:prstGeom>
+          <a:noFill/>
+        </p:spPr>
+        <p:txBody>
+          <a:bodyPr wrap="square" lIns="0" rIns="0" tIns="0" bIns="0" anchor="t">
+            <a:spAutoFit/>
+          </a:bodyPr>
+          <a:lstStyle/>
+          <a:p>
+            <a:pPr algn="l">
+              <a:lnSpc>
+                <a:spcPct val="105000"/>
+              </a:lnSpc>
+            </a:pPr>
+            <a:r>
+              <a:rPr sz="1800" b="1" i="0">
+                <a:solidFill>
+                  <a:srgbClr val="173F33"/>
+                </a:solidFill>
+                <a:latin typeface="Archivo"/>
+              </a:rPr>
+              <a:t>Cambios visuales</a:t>
+            </a:r>
+          </a:p>
+        </p:txBody>
+      </p:sp>
+      <p:sp>
+        <p:nvSpPr>
+          <p:cNvPr id="19" name="TextBox 18"/>
+          <p:cNvSpPr txBox="1"/>
+          <p:nvPr/>
+        </p:nvSpPr>
+        <p:spPr>
+          <a:xfrm>
+            <a:off x="4618634" y="4924044"/>
+            <a:ext cx="2954426" cy="864107"/>
+          </a:xfrm>
+          <a:prstGeom prst="rect">
+            <a:avLst/>
+          </a:prstGeom>
+          <a:noFill/>
+        </p:spPr>
+        <p:txBody>
+          <a:bodyPr wrap="square" lIns="0" rIns="0" tIns="0" bIns="0" anchor="t">
+            <a:spAutoFit/>
+          </a:bodyPr>
+          <a:lstStyle/>
+          <a:p>
+            <a:pPr algn="l">
+              <a:lnSpc>
+                <a:spcPct val="115000"/>
+              </a:lnSpc>
+            </a:pPr>
+            <a:r>
+              <a:rPr sz="1400" b="0" i="0">
+                <a:solidFill>
+                  <a:srgbClr val="15261F"/>
+                </a:solidFill>
+                <a:latin typeface="Archivo"/>
+              </a:rPr>
+              <a:t>Súbitos: posible daño del nervio óptico.</a:t>
+            </a:r>
+          </a:p>
+        </p:txBody>
+      </p:sp>
+      <p:sp>
+        <p:nvSpPr>
+          <p:cNvPr id="20" name="Rounded Rectangle 19"/>
+          <p:cNvSpPr/>
+          <p:nvPr/>
+        </p:nvSpPr>
+        <p:spPr>
+          <a:xfrm>
+            <a:off x="8085124" y="4242816"/>
+            <a:ext cx="3466490" cy="1746503"/>
+          </a:xfrm>
+          <a:prstGeom prst="roundRect">
+            <a:avLst>
+              <a:gd name="adj" fmla="val 4188"/>
+            </a:avLst>
+          </a:prstGeom>
+          <a:solidFill>
+            <a:srgbClr val="E4EDE7"/>
+          </a:solidFill>
+          <a:ln>
+            <a:noFill/>
+          </a:ln>
+          <a:effectLst/>
+        </p:spPr>
+        <p:style>
+          <a:lnRef idx="1">
+            <a:schemeClr val="accent1"/>
+          </a:lnRef>
+          <a:fillRef idx="3">
+            <a:schemeClr val="accent1"/>
+          </a:fillRef>
+          <a:effectRef idx="2">
+            <a:schemeClr val="accent1"/>
+          </a:effectRef>
+          <a:fontRef idx="minor">
+            <a:schemeClr val="lt1"/>
+          </a:fontRef>
+        </p:style>
+        <p:txBody>
+          <a:bodyPr rtlCol="0" anchor="ctr"/>
+          <a:lstStyle/>
+          <a:p>
+            <a:pPr algn="ctr"/>
+          </a:p>
+        </p:txBody>
+      </p:sp>
+      <p:sp>
+        <p:nvSpPr>
+          <p:cNvPr id="21" name="TextBox 20"/>
+          <p:cNvSpPr txBox="1"/>
+          <p:nvPr/>
+        </p:nvSpPr>
+        <p:spPr>
+          <a:xfrm>
+            <a:off x="8341156" y="4471416"/>
+            <a:ext cx="2954426" cy="379476"/>
+          </a:xfrm>
+          <a:prstGeom prst="rect">
+            <a:avLst/>
+          </a:prstGeom>
+          <a:noFill/>
+        </p:spPr>
+        <p:txBody>
+          <a:bodyPr wrap="square" lIns="0" rIns="0" tIns="0" bIns="0" anchor="t">
+            <a:spAutoFit/>
+          </a:bodyPr>
+          <a:lstStyle/>
+          <a:p>
+            <a:pPr algn="l">
+              <a:lnSpc>
+                <a:spcPct val="105000"/>
+              </a:lnSpc>
+            </a:pPr>
+            <a:r>
+              <a:rPr sz="1800" b="1" i="0">
+                <a:solidFill>
+                  <a:srgbClr val="173F33"/>
+                </a:solidFill>
+                <a:latin typeface="Archivo"/>
+              </a:rPr>
+              <a:t>Dolor muscular fuerte</a:t>
+            </a:r>
+          </a:p>
+        </p:txBody>
+      </p:sp>
+      <p:sp>
+        <p:nvSpPr>
+          <p:cNvPr id="22" name="TextBox 21"/>
+          <p:cNvSpPr txBox="1"/>
+          <p:nvPr/>
+        </p:nvSpPr>
+        <p:spPr>
+          <a:xfrm>
+            <a:off x="8341156" y="4924044"/>
+            <a:ext cx="2954426" cy="864107"/>
+          </a:xfrm>
+          <a:prstGeom prst="rect">
+            <a:avLst/>
+          </a:prstGeom>
+          <a:noFill/>
+        </p:spPr>
+        <p:txBody>
+          <a:bodyPr wrap="square" lIns="0" rIns="0" tIns="0" bIns="0" anchor="t">
+            <a:spAutoFit/>
+          </a:bodyPr>
+          <a:lstStyle/>
+          <a:p>
+            <a:pPr algn="l">
+              <a:lnSpc>
+                <a:spcPct val="115000"/>
+              </a:lnSpc>
+            </a:pPr>
+            <a:r>
+              <a:rPr sz="1400" b="0" i="0">
+                <a:solidFill>
+                  <a:srgbClr val="15261F"/>
+                </a:solidFill>
+                <a:latin typeface="Archivo"/>
+              </a:rPr>
+              <a:t>Posible daño del músculo.</a:t>
+            </a:r>
+          </a:p>
+        </p:txBody>
+      </p:sp>
+      <p:sp>
+        <p:nvSpPr>
+          <p:cNvPr id="23" name="TextBox 22"/>
+          <p:cNvSpPr txBox="1"/>
+          <p:nvPr/>
+        </p:nvSpPr>
+        <p:spPr>
+          <a:xfrm>
+            <a:off x="640080" y="6053328"/>
+            <a:ext cx="10911535" cy="274320"/>
+          </a:xfrm>
+          <a:prstGeom prst="rect">
+            <a:avLst/>
+          </a:prstGeom>
+          <a:noFill/>
+        </p:spPr>
+        <p:txBody>
+          <a:bodyPr wrap="square" lIns="0" rIns="0" tIns="0" bIns="0" anchor="t">
+            <a:spAutoFit/>
+          </a:bodyPr>
+          <a:lstStyle/>
+          <a:p>
+            <a:pPr algn="l">
+              <a:lnSpc>
+                <a:spcPct val="100000"/>
+              </a:lnSpc>
+            </a:pPr>
+            <a:r>
+              <a:rPr sz="1000" b="0" i="0">
+                <a:solidFill>
+                  <a:srgbClr val="607E70"/>
+                </a:solidFill>
+                <a:latin typeface="Archivo"/>
+              </a:rPr>
+              <a:t>Fuente: presentación del Dr. Marco, diap. 40 y 41.</a:t>
+            </a:r>
+          </a:p>
+        </p:txBody>
+      </p:sp>
+      <p:cxnSp>
+        <p:nvCxnSpPr>
+          <p:cNvPr id="24" name="Connector 23"/>
+          <p:cNvCxnSpPr/>
+          <p:nvPr/>
+        </p:nvCxnSpPr>
+        <p:spPr>
+          <a:xfrm>
+            <a:off x="640080" y="6400800"/>
+            <a:ext cx="10911535" cy="0"/>
+          </a:xfrm>
+          <a:prstGeom prst="line">
+            <a:avLst/>
+          </a:prstGeom>
+          <a:ln w="6350">
+            <a:solidFill>
+              <a:srgbClr val="9BAFA4"/>
+            </a:solidFill>
+          </a:ln>
+        </p:spPr>
+        <p:style>
+          <a:lnRef idx="2">
+            <a:schemeClr val="accent1"/>
+          </a:lnRef>
+          <a:fillRef idx="0">
+            <a:schemeClr val="accent1"/>
+          </a:fillRef>
+          <a:effectRef idx="1">
+            <a:schemeClr val="accent1"/>
+          </a:effectRef>
+          <a:fontRef idx="minor">
+            <a:schemeClr val="tx1"/>
+          </a:fontRef>
+        </p:style>
+      </p:cxnSp>
       <p:pic>
         <p:nvPicPr>
-          <p:cNvPr id="7" name="Picture 6" descr="sello-redondo.png"/>
+          <p:cNvPr id="25" name="Picture 24" descr="monograma.png"/>
           <p:cNvPicPr>
             <a:picLocks noChangeAspect="1"/>
           </p:cNvPicPr>
@@ -37080,58 +36553,23 @@
         </p:blipFill>
         <p:spPr>
           <a:xfrm>
-            <a:off x="10658932" y="4809744"/>
-            <a:ext cx="733806" cy="978408"/>
+            <a:off x="640080" y="6467557"/>
+            <a:ext cx="329184" cy="259677"/>
           </a:xfrm>
           <a:prstGeom prst="rect">
             <a:avLst/>
           </a:prstGeom>
         </p:spPr>
       </p:pic>
-      <p:cxnSp>
-        <p:nvCxnSpPr>
-          <p:cNvPr id="8" name="Connector 7"/>
-          <p:cNvCxnSpPr/>
-          <p:nvPr/>
-        </p:nvCxnSpPr>
-        <p:spPr>
-          <a:xfrm>
-            <a:off x="640080" y="6400800"/>
-            <a:ext cx="10911535" cy="0"/>
-          </a:xfrm>
-          <a:prstGeom prst="line">
-            <a:avLst/>
-          </a:prstGeom>
-          <a:ln w="6350">
-            <a:solidFill>
-              <a:srgbClr val="607E70"/>
-            </a:solidFill>
-          </a:ln>
-        </p:spPr>
-        <p:style>
-          <a:lnRef idx="2">
-            <a:schemeClr val="accent1"/>
-          </a:lnRef>
-          <a:fillRef idx="0">
-            <a:schemeClr val="accent1"/>
-          </a:fillRef>
-          <a:effectRef idx="1">
-            <a:schemeClr val="accent1"/>
-          </a:effectRef>
-          <a:fontRef idx="minor">
-            <a:schemeClr val="tx1"/>
-          </a:fontRef>
-        </p:style>
-      </p:cxnSp>
-      <p:sp>
-        <p:nvSpPr>
-          <p:cNvPr id="9" name="TextBox 8"/>
-          <p:cNvSpPr txBox="1"/>
-          <p:nvPr/>
-        </p:nvSpPr>
-        <p:spPr>
-          <a:xfrm>
-            <a:off x="640080" y="6473952"/>
+      <p:sp>
+        <p:nvSpPr>
+          <p:cNvPr id="26" name="TextBox 25"/>
+          <p:cNvSpPr txBox="1"/>
+          <p:nvPr/>
+        </p:nvSpPr>
+        <p:spPr>
+          <a:xfrm>
+            <a:off x="1097280" y="6473952"/>
             <a:ext cx="7772400" cy="256032"/>
           </a:xfrm>
           <a:prstGeom prst="rect">
@@ -37153,7 +36591,7 @@
             <a:r>
               <a:rPr sz="950" b="0" i="0">
                 <a:solidFill>
-                  <a:srgbClr val="9BAFA4"/>
+                  <a:srgbClr val="607E70"/>
                 </a:solidFill>
                 <a:latin typeface="Archivo"/>
               </a:rPr>
@@ -37164,7 +36602,7 @@
       </p:sp>
       <p:sp>
         <p:nvSpPr>
-          <p:cNvPr id="10" name="TextBox 9"/>
+          <p:cNvPr id="27" name="TextBox 26"/>
           <p:cNvSpPr txBox="1"/>
           <p:nvPr/>
         </p:nvSpPr>
@@ -37192,11 +36630,11 @@
             <a:r>
               <a:rPr sz="950" b="0" i="0">
                 <a:solidFill>
-                  <a:srgbClr val="9BAFA4"/>
-                </a:solidFill>
-                <a:latin typeface="Archivo"/>
-              </a:rPr>
-              <a:t>49 / 49</a:t>
+                  <a:srgbClr val="607E70"/>
+                </a:solidFill>
+                <a:latin typeface="Archivo"/>
+              </a:rPr>
+              <a:t>49 / 51</a:t>
             </a:r>
           </a:p>
         </p:txBody>
@@ -37487,7 +36925,1269 @@
                 </a:solidFill>
                 <a:latin typeface="Archivo"/>
               </a:rPr>
-              <a:t>5 / 49</a:t>
+              <a:t>5 / 51</a:t>
+            </a:r>
+          </a:p>
+        </p:txBody>
+      </p:sp>
+    </p:spTree>
+  </p:cSld>
+  <p:clrMapOvr>
+    <a:masterClrMapping/>
+  </p:clrMapOvr>
+</p:sld>
+</file>
+
+<file path=ppt/slides/slide50.xml><?xml version="1.0" encoding="utf-8"?>
+<p:sld xmlns:a="http://schemas.openxmlformats.org/drawingml/2006/main" xmlns:p="http://schemas.openxmlformats.org/presentationml/2006/main" xmlns:r="http://schemas.openxmlformats.org/officeDocument/2006/relationships">
+  <p:cSld>
+    <p:bg>
+      <p:bgPr>
+        <a:solidFill>
+          <a:srgbClr val="173F33"/>
+        </a:solidFill>
+        <a:effectLst/>
+      </p:bgPr>
+    </p:bg>
+    <p:spTree>
+      <p:nvGrpSpPr>
+        <p:cNvPr id="1" name=""/>
+        <p:cNvGrpSpPr/>
+        <p:nvPr/>
+      </p:nvGrpSpPr>
+      <p:grpSpPr/>
+      <p:sp>
+        <p:nvSpPr>
+          <p:cNvPr id="2" name="Rounded Rectangle 1"/>
+          <p:cNvSpPr/>
+          <p:nvPr/>
+        </p:nvSpPr>
+        <p:spPr>
+          <a:xfrm>
+            <a:off x="640080" y="502920"/>
+            <a:ext cx="1530339" cy="310896"/>
+          </a:xfrm>
+          <a:prstGeom prst="roundRect">
+            <a:avLst>
+              <a:gd name="adj" fmla="val 11764"/>
+            </a:avLst>
+          </a:prstGeom>
+          <a:solidFill>
+            <a:srgbClr val="E4AA18"/>
+          </a:solidFill>
+          <a:ln>
+            <a:noFill/>
+          </a:ln>
+          <a:effectLst/>
+        </p:spPr>
+        <p:style>
+          <a:lnRef idx="1">
+            <a:schemeClr val="accent1"/>
+          </a:lnRef>
+          <a:fillRef idx="3">
+            <a:schemeClr val="accent1"/>
+          </a:fillRef>
+          <a:effectRef idx="2">
+            <a:schemeClr val="accent1"/>
+          </a:effectRef>
+          <a:fontRef idx="minor">
+            <a:schemeClr val="lt1"/>
+          </a:fontRef>
+        </p:style>
+        <p:txBody>
+          <a:bodyPr rtlCol="0" anchor="ctr"/>
+          <a:lstStyle/>
+          <a:p>
+            <a:pPr algn="ctr"/>
+          </a:p>
+        </p:txBody>
+      </p:sp>
+      <p:sp>
+        <p:nvSpPr>
+          <p:cNvPr id="3" name="TextBox 2"/>
+          <p:cNvSpPr txBox="1"/>
+          <p:nvPr/>
+        </p:nvSpPr>
+        <p:spPr>
+          <a:xfrm>
+            <a:off x="640080" y="502920"/>
+            <a:ext cx="1530339" cy="310896"/>
+          </a:xfrm>
+          <a:prstGeom prst="rect">
+            <a:avLst/>
+          </a:prstGeom>
+          <a:noFill/>
+        </p:spPr>
+        <p:txBody>
+          <a:bodyPr wrap="square" lIns="0" rIns="0" tIns="0" bIns="0" anchor="ctr">
+            <a:spAutoFit/>
+          </a:bodyPr>
+          <a:lstStyle/>
+          <a:p>
+            <a:pPr algn="ctr">
+              <a:lnSpc>
+                <a:spcPct val="110000"/>
+              </a:lnSpc>
+            </a:pPr>
+            <a:r>
+              <a:rPr sz="1100" b="1" i="0" spc="80">
+                <a:solidFill>
+                  <a:srgbClr val="173F33"/>
+                </a:solidFill>
+                <a:latin typeface="Archivo"/>
+              </a:rPr>
+              <a:t>CONCLUSIONES</a:t>
+            </a:r>
+          </a:p>
+        </p:txBody>
+      </p:sp>
+      <p:sp>
+        <p:nvSpPr>
+          <p:cNvPr id="4" name="TextBox 3"/>
+          <p:cNvSpPr txBox="1"/>
+          <p:nvPr/>
+        </p:nvSpPr>
+        <p:spPr>
+          <a:xfrm>
+            <a:off x="640080" y="932688"/>
+            <a:ext cx="10911535" cy="1097280"/>
+          </a:xfrm>
+          <a:prstGeom prst="rect">
+            <a:avLst/>
+          </a:prstGeom>
+          <a:noFill/>
+        </p:spPr>
+        <p:txBody>
+          <a:bodyPr wrap="square" lIns="0" rIns="0" tIns="0" bIns="0" anchor="t">
+            <a:spAutoFit/>
+          </a:bodyPr>
+          <a:lstStyle/>
+          <a:p>
+            <a:pPr algn="l">
+              <a:lnSpc>
+                <a:spcPct val="100000"/>
+              </a:lnSpc>
+            </a:pPr>
+            <a:r>
+              <a:rPr sz="3200" b="1" i="0">
+                <a:solidFill>
+                  <a:srgbClr val="FFF9EE"/>
+                </a:solidFill>
+                <a:latin typeface="Fraunces"/>
+              </a:rPr>
+              <a:t>Cuatro ideas para llevarte</a:t>
+            </a:r>
+          </a:p>
+        </p:txBody>
+      </p:sp>
+      <p:sp>
+        <p:nvSpPr>
+          <p:cNvPr id="5" name="TextBox 4"/>
+          <p:cNvSpPr txBox="1"/>
+          <p:nvPr/>
+        </p:nvSpPr>
+        <p:spPr>
+          <a:xfrm>
+            <a:off x="640080" y="2194560"/>
+            <a:ext cx="822960" cy="640080"/>
+          </a:xfrm>
+          <a:prstGeom prst="rect">
+            <a:avLst/>
+          </a:prstGeom>
+          <a:noFill/>
+        </p:spPr>
+        <p:txBody>
+          <a:bodyPr wrap="square" lIns="0" rIns="0" tIns="0" bIns="0" anchor="t">
+            <a:spAutoFit/>
+          </a:bodyPr>
+          <a:lstStyle/>
+          <a:p>
+            <a:pPr algn="l">
+              <a:lnSpc>
+                <a:spcPct val="90000"/>
+              </a:lnSpc>
+            </a:pPr>
+            <a:r>
+              <a:rPr sz="3400" b="1" i="0">
+                <a:solidFill>
+                  <a:srgbClr val="E4AA18"/>
+                </a:solidFill>
+                <a:latin typeface="Fraunces"/>
+              </a:rPr>
+              <a:t>1</a:t>
+            </a:r>
+          </a:p>
+        </p:txBody>
+      </p:sp>
+      <p:sp>
+        <p:nvSpPr>
+          <p:cNvPr id="6" name="TextBox 5"/>
+          <p:cNvSpPr txBox="1"/>
+          <p:nvPr/>
+        </p:nvSpPr>
+        <p:spPr>
+          <a:xfrm>
+            <a:off x="1508760" y="2221991"/>
+            <a:ext cx="3383280" cy="777240"/>
+          </a:xfrm>
+          <a:prstGeom prst="rect">
+            <a:avLst/>
+          </a:prstGeom>
+          <a:noFill/>
+        </p:spPr>
+        <p:txBody>
+          <a:bodyPr wrap="square" lIns="0" rIns="0" tIns="0" bIns="0" anchor="t">
+            <a:spAutoFit/>
+          </a:bodyPr>
+          <a:lstStyle/>
+          <a:p>
+            <a:pPr algn="l">
+              <a:lnSpc>
+                <a:spcPct val="105000"/>
+              </a:lnSpc>
+            </a:pPr>
+            <a:r>
+              <a:rPr sz="1800" b="1" i="0">
+                <a:solidFill>
+                  <a:srgbClr val="FFF9EE"/>
+                </a:solidFill>
+                <a:latin typeface="Archivo"/>
+              </a:rPr>
+              <a:t>Péptido no es sinónimo de seguro</a:t>
+            </a:r>
+          </a:p>
+        </p:txBody>
+      </p:sp>
+      <p:sp>
+        <p:nvSpPr>
+          <p:cNvPr id="7" name="TextBox 6"/>
+          <p:cNvSpPr txBox="1"/>
+          <p:nvPr/>
+        </p:nvSpPr>
+        <p:spPr>
+          <a:xfrm>
+            <a:off x="5029200" y="2240279"/>
+            <a:ext cx="6522415" cy="777240"/>
+          </a:xfrm>
+          <a:prstGeom prst="rect">
+            <a:avLst/>
+          </a:prstGeom>
+          <a:noFill/>
+        </p:spPr>
+        <p:txBody>
+          <a:bodyPr wrap="square" lIns="0" rIns="0" tIns="0" bIns="0" anchor="t">
+            <a:spAutoFit/>
+          </a:bodyPr>
+          <a:lstStyle/>
+          <a:p>
+            <a:pPr algn="l">
+              <a:lnSpc>
+                <a:spcPct val="110000"/>
+              </a:lnSpc>
+            </a:pPr>
+            <a:r>
+              <a:rPr sz="1500" b="0" i="0">
+                <a:solidFill>
+                  <a:srgbClr val="9BAFA4"/>
+                </a:solidFill>
+                <a:latin typeface="Archivo"/>
+              </a:rPr>
+              <a:t>Cada molécula tiene su evidencia.</a:t>
+            </a:r>
+          </a:p>
+        </p:txBody>
+      </p:sp>
+      <p:cxnSp>
+        <p:nvCxnSpPr>
+          <p:cNvPr id="8" name="Connector 7"/>
+          <p:cNvCxnSpPr/>
+          <p:nvPr/>
+        </p:nvCxnSpPr>
+        <p:spPr>
+          <a:xfrm>
+            <a:off x="640080" y="3008375"/>
+            <a:ext cx="10911535" cy="0"/>
+          </a:xfrm>
+          <a:prstGeom prst="line">
+            <a:avLst/>
+          </a:prstGeom>
+          <a:ln w="6350">
+            <a:solidFill>
+              <a:srgbClr val="607E70"/>
+            </a:solidFill>
+          </a:ln>
+        </p:spPr>
+        <p:style>
+          <a:lnRef idx="2">
+            <a:schemeClr val="accent1"/>
+          </a:lnRef>
+          <a:fillRef idx="0">
+            <a:schemeClr val="accent1"/>
+          </a:fillRef>
+          <a:effectRef idx="1">
+            <a:schemeClr val="accent1"/>
+          </a:effectRef>
+          <a:fontRef idx="minor">
+            <a:schemeClr val="tx1"/>
+          </a:fontRef>
+        </p:style>
+      </p:cxnSp>
+      <p:sp>
+        <p:nvSpPr>
+          <p:cNvPr id="9" name="TextBox 8"/>
+          <p:cNvSpPr txBox="1"/>
+          <p:nvPr/>
+        </p:nvSpPr>
+        <p:spPr>
+          <a:xfrm>
+            <a:off x="640080" y="3063239"/>
+            <a:ext cx="822960" cy="640080"/>
+          </a:xfrm>
+          <a:prstGeom prst="rect">
+            <a:avLst/>
+          </a:prstGeom>
+          <a:noFill/>
+        </p:spPr>
+        <p:txBody>
+          <a:bodyPr wrap="square" lIns="0" rIns="0" tIns="0" bIns="0" anchor="t">
+            <a:spAutoFit/>
+          </a:bodyPr>
+          <a:lstStyle/>
+          <a:p>
+            <a:pPr algn="l">
+              <a:lnSpc>
+                <a:spcPct val="90000"/>
+              </a:lnSpc>
+            </a:pPr>
+            <a:r>
+              <a:rPr sz="3400" b="1" i="0">
+                <a:solidFill>
+                  <a:srgbClr val="E4AA18"/>
+                </a:solidFill>
+                <a:latin typeface="Fraunces"/>
+              </a:rPr>
+              <a:t>2</a:t>
+            </a:r>
+          </a:p>
+        </p:txBody>
+      </p:sp>
+      <p:sp>
+        <p:nvSpPr>
+          <p:cNvPr id="10" name="TextBox 9"/>
+          <p:cNvSpPr txBox="1"/>
+          <p:nvPr/>
+        </p:nvSpPr>
+        <p:spPr>
+          <a:xfrm>
+            <a:off x="1508760" y="3090671"/>
+            <a:ext cx="3383280" cy="777240"/>
+          </a:xfrm>
+          <a:prstGeom prst="rect">
+            <a:avLst/>
+          </a:prstGeom>
+          <a:noFill/>
+        </p:spPr>
+        <p:txBody>
+          <a:bodyPr wrap="square" lIns="0" rIns="0" tIns="0" bIns="0" anchor="t">
+            <a:spAutoFit/>
+          </a:bodyPr>
+          <a:lstStyle/>
+          <a:p>
+            <a:pPr algn="l">
+              <a:lnSpc>
+                <a:spcPct val="105000"/>
+              </a:lnSpc>
+            </a:pPr>
+            <a:r>
+              <a:rPr sz="1800" b="1" i="0">
+                <a:solidFill>
+                  <a:srgbClr val="FFF9EE"/>
+                </a:solidFill>
+                <a:latin typeface="Archivo"/>
+              </a:rPr>
+              <a:t>Mira el estatus</a:t>
+            </a:r>
+          </a:p>
+        </p:txBody>
+      </p:sp>
+      <p:sp>
+        <p:nvSpPr>
+          <p:cNvPr id="11" name="TextBox 10"/>
+          <p:cNvSpPr txBox="1"/>
+          <p:nvPr/>
+        </p:nvSpPr>
+        <p:spPr>
+          <a:xfrm>
+            <a:off x="5029200" y="3108959"/>
+            <a:ext cx="6522415" cy="777240"/>
+          </a:xfrm>
+          <a:prstGeom prst="rect">
+            <a:avLst/>
+          </a:prstGeom>
+          <a:noFill/>
+        </p:spPr>
+        <p:txBody>
+          <a:bodyPr wrap="square" lIns="0" rIns="0" tIns="0" bIns="0" anchor="t">
+            <a:spAutoFit/>
+          </a:bodyPr>
+          <a:lstStyle/>
+          <a:p>
+            <a:pPr algn="l">
+              <a:lnSpc>
+                <a:spcPct val="110000"/>
+              </a:lnSpc>
+            </a:pPr>
+            <a:r>
+              <a:rPr sz="1500" b="0" i="0">
+                <a:solidFill>
+                  <a:srgbClr val="9BAFA4"/>
+                </a:solidFill>
+                <a:latin typeface="Archivo"/>
+              </a:rPr>
+              <a:t>Aprobado, fuera de indicación o experimental.</a:t>
+            </a:r>
+          </a:p>
+        </p:txBody>
+      </p:sp>
+      <p:cxnSp>
+        <p:nvCxnSpPr>
+          <p:cNvPr id="12" name="Connector 11"/>
+          <p:cNvCxnSpPr/>
+          <p:nvPr/>
+        </p:nvCxnSpPr>
+        <p:spPr>
+          <a:xfrm>
+            <a:off x="640080" y="3877056"/>
+            <a:ext cx="10911535" cy="0"/>
+          </a:xfrm>
+          <a:prstGeom prst="line">
+            <a:avLst/>
+          </a:prstGeom>
+          <a:ln w="6350">
+            <a:solidFill>
+              <a:srgbClr val="607E70"/>
+            </a:solidFill>
+          </a:ln>
+        </p:spPr>
+        <p:style>
+          <a:lnRef idx="2">
+            <a:schemeClr val="accent1"/>
+          </a:lnRef>
+          <a:fillRef idx="0">
+            <a:schemeClr val="accent1"/>
+          </a:fillRef>
+          <a:effectRef idx="1">
+            <a:schemeClr val="accent1"/>
+          </a:effectRef>
+          <a:fontRef idx="minor">
+            <a:schemeClr val="tx1"/>
+          </a:fontRef>
+        </p:style>
+      </p:cxnSp>
+      <p:sp>
+        <p:nvSpPr>
+          <p:cNvPr id="13" name="TextBox 12"/>
+          <p:cNvSpPr txBox="1"/>
+          <p:nvPr/>
+        </p:nvSpPr>
+        <p:spPr>
+          <a:xfrm>
+            <a:off x="640080" y="3931920"/>
+            <a:ext cx="822960" cy="640080"/>
+          </a:xfrm>
+          <a:prstGeom prst="rect">
+            <a:avLst/>
+          </a:prstGeom>
+          <a:noFill/>
+        </p:spPr>
+        <p:txBody>
+          <a:bodyPr wrap="square" lIns="0" rIns="0" tIns="0" bIns="0" anchor="t">
+            <a:spAutoFit/>
+          </a:bodyPr>
+          <a:lstStyle/>
+          <a:p>
+            <a:pPr algn="l">
+              <a:lnSpc>
+                <a:spcPct val="90000"/>
+              </a:lnSpc>
+            </a:pPr>
+            <a:r>
+              <a:rPr sz="3400" b="1" i="0">
+                <a:solidFill>
+                  <a:srgbClr val="E4AA18"/>
+                </a:solidFill>
+                <a:latin typeface="Fraunces"/>
+              </a:rPr>
+              <a:t>3</a:t>
+            </a:r>
+          </a:p>
+        </p:txBody>
+      </p:sp>
+      <p:sp>
+        <p:nvSpPr>
+          <p:cNvPr id="14" name="TextBox 13"/>
+          <p:cNvSpPr txBox="1"/>
+          <p:nvPr/>
+        </p:nvSpPr>
+        <p:spPr>
+          <a:xfrm>
+            <a:off x="1508760" y="3959352"/>
+            <a:ext cx="3383280" cy="777240"/>
+          </a:xfrm>
+          <a:prstGeom prst="rect">
+            <a:avLst/>
+          </a:prstGeom>
+          <a:noFill/>
+        </p:spPr>
+        <p:txBody>
+          <a:bodyPr wrap="square" lIns="0" rIns="0" tIns="0" bIns="0" anchor="t">
+            <a:spAutoFit/>
+          </a:bodyPr>
+          <a:lstStyle/>
+          <a:p>
+            <a:pPr algn="l">
+              <a:lnSpc>
+                <a:spcPct val="105000"/>
+              </a:lnSpc>
+            </a:pPr>
+            <a:r>
+              <a:rPr sz="1800" b="1" i="0">
+                <a:solidFill>
+                  <a:srgbClr val="FFF9EE"/>
+                </a:solidFill>
+                <a:latin typeface="Archivo"/>
+              </a:rPr>
+              <a:t>Pide la fuente</a:t>
+            </a:r>
+          </a:p>
+        </p:txBody>
+      </p:sp>
+      <p:sp>
+        <p:nvSpPr>
+          <p:cNvPr id="15" name="TextBox 14"/>
+          <p:cNvSpPr txBox="1"/>
+          <p:nvPr/>
+        </p:nvSpPr>
+        <p:spPr>
+          <a:xfrm>
+            <a:off x="5029200" y="3977639"/>
+            <a:ext cx="6522415" cy="777240"/>
+          </a:xfrm>
+          <a:prstGeom prst="rect">
+            <a:avLst/>
+          </a:prstGeom>
+          <a:noFill/>
+        </p:spPr>
+        <p:txBody>
+          <a:bodyPr wrap="square" lIns="0" rIns="0" tIns="0" bIns="0" anchor="t">
+            <a:spAutoFit/>
+          </a:bodyPr>
+          <a:lstStyle/>
+          <a:p>
+            <a:pPr algn="l">
+              <a:lnSpc>
+                <a:spcPct val="110000"/>
+              </a:lnSpc>
+            </a:pPr>
+            <a:r>
+              <a:rPr sz="1500" b="0" i="0">
+                <a:solidFill>
+                  <a:srgbClr val="9BAFA4"/>
+                </a:solidFill>
+                <a:latin typeface="Archivo"/>
+              </a:rPr>
+              <a:t>Evidencia humana y producto con registro.</a:t>
+            </a:r>
+          </a:p>
+        </p:txBody>
+      </p:sp>
+      <p:cxnSp>
+        <p:nvCxnSpPr>
+          <p:cNvPr id="16" name="Connector 15"/>
+          <p:cNvCxnSpPr/>
+          <p:nvPr/>
+        </p:nvCxnSpPr>
+        <p:spPr>
+          <a:xfrm>
+            <a:off x="640080" y="4745736"/>
+            <a:ext cx="10911535" cy="0"/>
+          </a:xfrm>
+          <a:prstGeom prst="line">
+            <a:avLst/>
+          </a:prstGeom>
+          <a:ln w="6350">
+            <a:solidFill>
+              <a:srgbClr val="607E70"/>
+            </a:solidFill>
+          </a:ln>
+        </p:spPr>
+        <p:style>
+          <a:lnRef idx="2">
+            <a:schemeClr val="accent1"/>
+          </a:lnRef>
+          <a:fillRef idx="0">
+            <a:schemeClr val="accent1"/>
+          </a:fillRef>
+          <a:effectRef idx="1">
+            <a:schemeClr val="accent1"/>
+          </a:effectRef>
+          <a:fontRef idx="minor">
+            <a:schemeClr val="tx1"/>
+          </a:fontRef>
+        </p:style>
+      </p:cxnSp>
+      <p:sp>
+        <p:nvSpPr>
+          <p:cNvPr id="17" name="TextBox 16"/>
+          <p:cNvSpPr txBox="1"/>
+          <p:nvPr/>
+        </p:nvSpPr>
+        <p:spPr>
+          <a:xfrm>
+            <a:off x="640080" y="4800600"/>
+            <a:ext cx="822960" cy="640080"/>
+          </a:xfrm>
+          <a:prstGeom prst="rect">
+            <a:avLst/>
+          </a:prstGeom>
+          <a:noFill/>
+        </p:spPr>
+        <p:txBody>
+          <a:bodyPr wrap="square" lIns="0" rIns="0" tIns="0" bIns="0" anchor="t">
+            <a:spAutoFit/>
+          </a:bodyPr>
+          <a:lstStyle/>
+          <a:p>
+            <a:pPr algn="l">
+              <a:lnSpc>
+                <a:spcPct val="90000"/>
+              </a:lnSpc>
+            </a:pPr>
+            <a:r>
+              <a:rPr sz="3400" b="1" i="0">
+                <a:solidFill>
+                  <a:srgbClr val="E4AA18"/>
+                </a:solidFill>
+                <a:latin typeface="Fraunces"/>
+              </a:rPr>
+              <a:t>4</a:t>
+            </a:r>
+          </a:p>
+        </p:txBody>
+      </p:sp>
+      <p:sp>
+        <p:nvSpPr>
+          <p:cNvPr id="18" name="TextBox 17"/>
+          <p:cNvSpPr txBox="1"/>
+          <p:nvPr/>
+        </p:nvSpPr>
+        <p:spPr>
+          <a:xfrm>
+            <a:off x="1508760" y="4828032"/>
+            <a:ext cx="3383280" cy="777240"/>
+          </a:xfrm>
+          <a:prstGeom prst="rect">
+            <a:avLst/>
+          </a:prstGeom>
+          <a:noFill/>
+        </p:spPr>
+        <p:txBody>
+          <a:bodyPr wrap="square" lIns="0" rIns="0" tIns="0" bIns="0" anchor="t">
+            <a:spAutoFit/>
+          </a:bodyPr>
+          <a:lstStyle/>
+          <a:p>
+            <a:pPr algn="l">
+              <a:lnSpc>
+                <a:spcPct val="105000"/>
+              </a:lnSpc>
+            </a:pPr>
+            <a:r>
+              <a:rPr sz="1800" b="1" i="0">
+                <a:solidFill>
+                  <a:srgbClr val="FFF9EE"/>
+                </a:solidFill>
+                <a:latin typeface="Archivo"/>
+              </a:rPr>
+              <a:t>Siempre con un médico</a:t>
+            </a:r>
+          </a:p>
+        </p:txBody>
+      </p:sp>
+      <p:sp>
+        <p:nvSpPr>
+          <p:cNvPr id="19" name="TextBox 18"/>
+          <p:cNvSpPr txBox="1"/>
+          <p:nvPr/>
+        </p:nvSpPr>
+        <p:spPr>
+          <a:xfrm>
+            <a:off x="5029200" y="4846320"/>
+            <a:ext cx="6522415" cy="777240"/>
+          </a:xfrm>
+          <a:prstGeom prst="rect">
+            <a:avLst/>
+          </a:prstGeom>
+          <a:noFill/>
+        </p:spPr>
+        <p:txBody>
+          <a:bodyPr wrap="square" lIns="0" rIns="0" tIns="0" bIns="0" anchor="t">
+            <a:spAutoFit/>
+          </a:bodyPr>
+          <a:lstStyle/>
+          <a:p>
+            <a:pPr algn="l">
+              <a:lnSpc>
+                <a:spcPct val="110000"/>
+              </a:lnSpc>
+            </a:pPr>
+            <a:r>
+              <a:rPr sz="1500" b="0" i="0">
+                <a:solidFill>
+                  <a:srgbClr val="9BAFA4"/>
+                </a:solidFill>
+                <a:latin typeface="Archivo"/>
+              </a:rPr>
+              <a:t>Y con el plan de estilo de vida.</a:t>
+            </a:r>
+          </a:p>
+        </p:txBody>
+      </p:sp>
+      <p:cxnSp>
+        <p:nvCxnSpPr>
+          <p:cNvPr id="20" name="Connector 19"/>
+          <p:cNvCxnSpPr/>
+          <p:nvPr/>
+        </p:nvCxnSpPr>
+        <p:spPr>
+          <a:xfrm>
+            <a:off x="640080" y="6400800"/>
+            <a:ext cx="10911535" cy="0"/>
+          </a:xfrm>
+          <a:prstGeom prst="line">
+            <a:avLst/>
+          </a:prstGeom>
+          <a:ln w="6350">
+            <a:solidFill>
+              <a:srgbClr val="607E70"/>
+            </a:solidFill>
+          </a:ln>
+        </p:spPr>
+        <p:style>
+          <a:lnRef idx="2">
+            <a:schemeClr val="accent1"/>
+          </a:lnRef>
+          <a:fillRef idx="0">
+            <a:schemeClr val="accent1"/>
+          </a:fillRef>
+          <a:effectRef idx="1">
+            <a:schemeClr val="accent1"/>
+          </a:effectRef>
+          <a:fontRef idx="minor">
+            <a:schemeClr val="tx1"/>
+          </a:fontRef>
+        </p:style>
+      </p:cxnSp>
+      <p:sp>
+        <p:nvSpPr>
+          <p:cNvPr id="21" name="TextBox 20"/>
+          <p:cNvSpPr txBox="1"/>
+          <p:nvPr/>
+        </p:nvSpPr>
+        <p:spPr>
+          <a:xfrm>
+            <a:off x="640080" y="6473952"/>
+            <a:ext cx="7772400" cy="256032"/>
+          </a:xfrm>
+          <a:prstGeom prst="rect">
+            <a:avLst/>
+          </a:prstGeom>
+          <a:noFill/>
+        </p:spPr>
+        <p:txBody>
+          <a:bodyPr wrap="square" lIns="0" rIns="0" tIns="0" bIns="0" anchor="ctr">
+            <a:spAutoFit/>
+          </a:bodyPr>
+          <a:lstStyle/>
+          <a:p>
+            <a:pPr algn="l">
+              <a:lnSpc>
+                <a:spcPct val="100000"/>
+              </a:lnSpc>
+            </a:pPr>
+            <a:r>
+              <a:rPr sz="950" b="0" i="0">
+                <a:solidFill>
+                  <a:srgbClr val="9BAFA4"/>
+                </a:solidFill>
+                <a:latin typeface="Archivo"/>
+              </a:rPr>
+              <a:t>Dr. Marco Sosa · Péptidos: qué son y para qué se usan</a:t>
+            </a:r>
+          </a:p>
+        </p:txBody>
+      </p:sp>
+      <p:sp>
+        <p:nvSpPr>
+          <p:cNvPr id="22" name="TextBox 21"/>
+          <p:cNvSpPr txBox="1"/>
+          <p:nvPr/>
+        </p:nvSpPr>
+        <p:spPr>
+          <a:xfrm>
+            <a:off x="10454335" y="6473952"/>
+            <a:ext cx="1097280" cy="256032"/>
+          </a:xfrm>
+          <a:prstGeom prst="rect">
+            <a:avLst/>
+          </a:prstGeom>
+          <a:noFill/>
+        </p:spPr>
+        <p:txBody>
+          <a:bodyPr wrap="square" lIns="0" rIns="0" tIns="0" bIns="0" anchor="ctr">
+            <a:spAutoFit/>
+          </a:bodyPr>
+          <a:lstStyle/>
+          <a:p>
+            <a:pPr algn="r">
+              <a:lnSpc>
+                <a:spcPct val="100000"/>
+              </a:lnSpc>
+            </a:pPr>
+            <a:r>
+              <a:rPr sz="950" b="0" i="0">
+                <a:solidFill>
+                  <a:srgbClr val="9BAFA4"/>
+                </a:solidFill>
+                <a:latin typeface="Archivo"/>
+              </a:rPr>
+              <a:t>50 / 51</a:t>
+            </a:r>
+          </a:p>
+        </p:txBody>
+      </p:sp>
+    </p:spTree>
+  </p:cSld>
+  <p:clrMapOvr>
+    <a:masterClrMapping/>
+  </p:clrMapOvr>
+</p:sld>
+</file>
+
+<file path=ppt/slides/slide51.xml><?xml version="1.0" encoding="utf-8"?>
+<p:sld xmlns:a="http://schemas.openxmlformats.org/drawingml/2006/main" xmlns:p="http://schemas.openxmlformats.org/presentationml/2006/main" xmlns:r="http://schemas.openxmlformats.org/officeDocument/2006/relationships">
+  <p:cSld>
+    <p:bg>
+      <p:bgPr>
+        <a:solidFill>
+          <a:srgbClr val="173F33"/>
+        </a:solidFill>
+        <a:effectLst/>
+      </p:bgPr>
+    </p:bg>
+    <p:spTree>
+      <p:nvGrpSpPr>
+        <p:cNvPr id="1" name=""/>
+        <p:cNvGrpSpPr/>
+        <p:nvPr/>
+      </p:nvGrpSpPr>
+      <p:grpSpPr/>
+      <p:sp>
+        <p:nvSpPr>
+          <p:cNvPr id="2" name="TextBox 1"/>
+          <p:cNvSpPr txBox="1"/>
+          <p:nvPr/>
+        </p:nvSpPr>
+        <p:spPr>
+          <a:xfrm>
+            <a:off x="640080" y="685800"/>
+            <a:ext cx="6949440" cy="1280160"/>
+          </a:xfrm>
+          <a:prstGeom prst="rect">
+            <a:avLst/>
+          </a:prstGeom>
+          <a:noFill/>
+        </p:spPr>
+        <p:txBody>
+          <a:bodyPr wrap="square" lIns="0" rIns="0" tIns="0" bIns="0" anchor="t">
+            <a:spAutoFit/>
+          </a:bodyPr>
+          <a:lstStyle/>
+          <a:p>
+            <a:pPr algn="l">
+              <a:lnSpc>
+                <a:spcPct val="102000"/>
+              </a:lnSpc>
+            </a:pPr>
+            <a:r>
+              <a:rPr sz="3800" b="1" i="0">
+                <a:solidFill>
+                  <a:srgbClr val="FFF9EE"/>
+                </a:solidFill>
+                <a:latin typeface="Fraunces"/>
+              </a:rPr>
+              <a:t>Gracias por acompañarnos</a:t>
+            </a:r>
+          </a:p>
+        </p:txBody>
+      </p:sp>
+      <p:sp>
+        <p:nvSpPr>
+          <p:cNvPr id="3" name="TextBox 2"/>
+          <p:cNvSpPr txBox="1"/>
+          <p:nvPr/>
+        </p:nvSpPr>
+        <p:spPr>
+          <a:xfrm>
+            <a:off x="640080" y="2057400"/>
+            <a:ext cx="6766560" cy="2194560"/>
+          </a:xfrm>
+          <a:prstGeom prst="rect">
+            <a:avLst/>
+          </a:prstGeom>
+          <a:noFill/>
+        </p:spPr>
+        <p:txBody>
+          <a:bodyPr wrap="square" lIns="0" rIns="0" tIns="0" bIns="0" anchor="t">
+            <a:spAutoFit/>
+          </a:bodyPr>
+          <a:lstStyle/>
+          <a:p>
+            <a:pPr algn="l" marL="256032" indent="-256032">
+              <a:lnSpc>
+                <a:spcPct val="115000"/>
+              </a:lnSpc>
+              <a:spcAft>
+                <a:spcPts val="1000"/>
+              </a:spcAft>
+              <a:buClr>
+                <a:srgbClr val="E4AA18"/>
+              </a:buClr>
+              <a:buFont typeface="Arial"/>
+              <a:buChar char="■"/>
+            </a:pPr>
+            <a:r>
+              <a:rPr sz="1800" b="0" i="0">
+                <a:solidFill>
+                  <a:srgbClr val="FFF9EE"/>
+                </a:solidFill>
+                <a:latin typeface="Archivo"/>
+              </a:rPr>
+              <a:t>Esta clase es informativa y educativa</a:t>
+            </a:r>
+          </a:p>
+          <a:p>
+            <a:pPr algn="l" marL="256032" indent="-256032">
+              <a:lnSpc>
+                <a:spcPct val="115000"/>
+              </a:lnSpc>
+              <a:spcAft>
+                <a:spcPts val="1000"/>
+              </a:spcAft>
+              <a:buClr>
+                <a:srgbClr val="E4AA18"/>
+              </a:buClr>
+              <a:buFont typeface="Arial"/>
+              <a:buChar char="■"/>
+            </a:pPr>
+            <a:r>
+              <a:rPr sz="1800" b="0" i="0">
+                <a:solidFill>
+                  <a:srgbClr val="FFF9EE"/>
+                </a:solidFill>
+                <a:latin typeface="Archivo"/>
+              </a:rPr>
+              <a:t>Los medicamentos mencionados son de prescripción</a:t>
+            </a:r>
+          </a:p>
+          <a:p>
+            <a:pPr algn="l" marL="256032" indent="-256032">
+              <a:lnSpc>
+                <a:spcPct val="115000"/>
+              </a:lnSpc>
+              <a:spcAft>
+                <a:spcPts val="1000"/>
+              </a:spcAft>
+              <a:buClr>
+                <a:srgbClr val="E4AA18"/>
+              </a:buClr>
+              <a:buFont typeface="Arial"/>
+              <a:buChar char="■"/>
+            </a:pPr>
+            <a:r>
+              <a:rPr sz="1800" b="0" i="0">
+                <a:solidFill>
+                  <a:srgbClr val="FFF9EE"/>
+                </a:solidFill>
+                <a:latin typeface="Archivo"/>
+              </a:rPr>
+              <a:t>Verifica siempre el registro en tu país</a:t>
+            </a:r>
+          </a:p>
+        </p:txBody>
+      </p:sp>
+      <p:sp>
+        <p:nvSpPr>
+          <p:cNvPr id="4" name="Rounded Rectangle 3"/>
+          <p:cNvSpPr/>
+          <p:nvPr/>
+        </p:nvSpPr>
+        <p:spPr>
+          <a:xfrm>
+            <a:off x="640080" y="4617720"/>
+            <a:ext cx="10911535" cy="1371600"/>
+          </a:xfrm>
+          <a:prstGeom prst="roundRect">
+            <a:avLst>
+              <a:gd name="adj" fmla="val 5333"/>
+            </a:avLst>
+          </a:prstGeom>
+          <a:solidFill>
+            <a:srgbClr val="1F5142"/>
+          </a:solidFill>
+          <a:ln>
+            <a:noFill/>
+          </a:ln>
+          <a:effectLst/>
+        </p:spPr>
+        <p:style>
+          <a:lnRef idx="1">
+            <a:schemeClr val="accent1"/>
+          </a:lnRef>
+          <a:fillRef idx="3">
+            <a:schemeClr val="accent1"/>
+          </a:fillRef>
+          <a:effectRef idx="2">
+            <a:schemeClr val="accent1"/>
+          </a:effectRef>
+          <a:fontRef idx="minor">
+            <a:schemeClr val="lt1"/>
+          </a:fontRef>
+        </p:style>
+        <p:txBody>
+          <a:bodyPr rtlCol="0" anchor="ctr"/>
+          <a:lstStyle/>
+          <a:p>
+            <a:pPr algn="ctr"/>
+          </a:p>
+        </p:txBody>
+      </p:sp>
+      <p:sp>
+        <p:nvSpPr>
+          <p:cNvPr id="5" name="TextBox 4"/>
+          <p:cNvSpPr txBox="1"/>
+          <p:nvPr/>
+        </p:nvSpPr>
+        <p:spPr>
+          <a:xfrm>
+            <a:off x="914400" y="4709160"/>
+            <a:ext cx="9082735" cy="1188720"/>
+          </a:xfrm>
+          <a:prstGeom prst="rect">
+            <a:avLst/>
+          </a:prstGeom>
+          <a:noFill/>
+        </p:spPr>
+        <p:txBody>
+          <a:bodyPr wrap="square" lIns="0" rIns="0" tIns="0" bIns="0" anchor="ctr">
+            <a:spAutoFit/>
+          </a:bodyPr>
+          <a:lstStyle/>
+          <a:p>
+            <a:pPr algn="l">
+              <a:lnSpc>
+                <a:spcPct val="120000"/>
+              </a:lnSpc>
+            </a:pPr>
+            <a:r>
+              <a:rPr sz="1150" b="0" i="0">
+                <a:solidFill>
+                  <a:srgbClr val="9BAFA4"/>
+                </a:solidFill>
+                <a:latin typeface="Archivo"/>
+              </a:rPr>
+              <a:t>Las masterclasses son informativas y educativas. No constituyen diagnóstico, tratamiento ni prescripción personalizada, y no reemplazan la consulta médica. El Dr. Marco Sosa es Director Científico de Lumineight y percibe una participación sobre sus ventas; se declara para que lo tengas en cuenta al valorar lo que escuches.</a:t>
+            </a:r>
+          </a:p>
+        </p:txBody>
+      </p:sp>
+      <p:sp>
+        <p:nvSpPr>
+          <p:cNvPr id="6" name="Oval 5"/>
+          <p:cNvSpPr/>
+          <p:nvPr/>
+        </p:nvSpPr>
+        <p:spPr>
+          <a:xfrm>
+            <a:off x="10500055" y="4773168"/>
+            <a:ext cx="1051560" cy="1051560"/>
+          </a:xfrm>
+          <a:prstGeom prst="ellipse">
+            <a:avLst/>
+          </a:prstGeom>
+          <a:solidFill>
+            <a:srgbClr val="FFF9EE"/>
+          </a:solidFill>
+          <a:ln>
+            <a:noFill/>
+          </a:ln>
+          <a:effectLst/>
+        </p:spPr>
+        <p:style>
+          <a:lnRef idx="1">
+            <a:schemeClr val="accent1"/>
+          </a:lnRef>
+          <a:fillRef idx="3">
+            <a:schemeClr val="accent1"/>
+          </a:fillRef>
+          <a:effectRef idx="2">
+            <a:schemeClr val="accent1"/>
+          </a:effectRef>
+          <a:fontRef idx="minor">
+            <a:schemeClr val="lt1"/>
+          </a:fontRef>
+        </p:style>
+        <p:txBody>
+          <a:bodyPr rtlCol="0" anchor="ctr"/>
+          <a:lstStyle/>
+          <a:p>
+            <a:pPr algn="ctr"/>
+          </a:p>
+        </p:txBody>
+      </p:sp>
+      <p:pic>
+        <p:nvPicPr>
+          <p:cNvPr id="7" name="Picture 6" descr="sello-redondo.png"/>
+          <p:cNvPicPr>
+            <a:picLocks noChangeAspect="1"/>
+          </p:cNvPicPr>
+          <p:nvPr/>
+        </p:nvPicPr>
+        <p:blipFill>
+          <a:blip r:embed="rId2"/>
+          <a:stretch>
+            <a:fillRect/>
+          </a:stretch>
+        </p:blipFill>
+        <p:spPr>
+          <a:xfrm>
+            <a:off x="10658932" y="4809744"/>
+            <a:ext cx="733806" cy="978408"/>
+          </a:xfrm>
+          <a:prstGeom prst="rect">
+            <a:avLst/>
+          </a:prstGeom>
+        </p:spPr>
+      </p:pic>
+      <p:cxnSp>
+        <p:nvCxnSpPr>
+          <p:cNvPr id="8" name="Connector 7"/>
+          <p:cNvCxnSpPr/>
+          <p:nvPr/>
+        </p:nvCxnSpPr>
+        <p:spPr>
+          <a:xfrm>
+            <a:off x="640080" y="6400800"/>
+            <a:ext cx="10911535" cy="0"/>
+          </a:xfrm>
+          <a:prstGeom prst="line">
+            <a:avLst/>
+          </a:prstGeom>
+          <a:ln w="6350">
+            <a:solidFill>
+              <a:srgbClr val="607E70"/>
+            </a:solidFill>
+          </a:ln>
+        </p:spPr>
+        <p:style>
+          <a:lnRef idx="2">
+            <a:schemeClr val="accent1"/>
+          </a:lnRef>
+          <a:fillRef idx="0">
+            <a:schemeClr val="accent1"/>
+          </a:fillRef>
+          <a:effectRef idx="1">
+            <a:schemeClr val="accent1"/>
+          </a:effectRef>
+          <a:fontRef idx="minor">
+            <a:schemeClr val="tx1"/>
+          </a:fontRef>
+        </p:style>
+      </p:cxnSp>
+      <p:sp>
+        <p:nvSpPr>
+          <p:cNvPr id="9" name="TextBox 8"/>
+          <p:cNvSpPr txBox="1"/>
+          <p:nvPr/>
+        </p:nvSpPr>
+        <p:spPr>
+          <a:xfrm>
+            <a:off x="640080" y="6473952"/>
+            <a:ext cx="7772400" cy="256032"/>
+          </a:xfrm>
+          <a:prstGeom prst="rect">
+            <a:avLst/>
+          </a:prstGeom>
+          <a:noFill/>
+        </p:spPr>
+        <p:txBody>
+          <a:bodyPr wrap="square" lIns="0" rIns="0" tIns="0" bIns="0" anchor="ctr">
+            <a:spAutoFit/>
+          </a:bodyPr>
+          <a:lstStyle/>
+          <a:p>
+            <a:pPr algn="l">
+              <a:lnSpc>
+                <a:spcPct val="100000"/>
+              </a:lnSpc>
+            </a:pPr>
+            <a:r>
+              <a:rPr sz="950" b="0" i="0">
+                <a:solidFill>
+                  <a:srgbClr val="9BAFA4"/>
+                </a:solidFill>
+                <a:latin typeface="Archivo"/>
+              </a:rPr>
+              <a:t>Dr. Marco Sosa · Péptidos: qué son y para qué se usan</a:t>
+            </a:r>
+          </a:p>
+        </p:txBody>
+      </p:sp>
+      <p:sp>
+        <p:nvSpPr>
+          <p:cNvPr id="10" name="TextBox 9"/>
+          <p:cNvSpPr txBox="1"/>
+          <p:nvPr/>
+        </p:nvSpPr>
+        <p:spPr>
+          <a:xfrm>
+            <a:off x="10454335" y="6473952"/>
+            <a:ext cx="1097280" cy="256032"/>
+          </a:xfrm>
+          <a:prstGeom prst="rect">
+            <a:avLst/>
+          </a:prstGeom>
+          <a:noFill/>
+        </p:spPr>
+        <p:txBody>
+          <a:bodyPr wrap="square" lIns="0" rIns="0" tIns="0" bIns="0" anchor="ctr">
+            <a:spAutoFit/>
+          </a:bodyPr>
+          <a:lstStyle/>
+          <a:p>
+            <a:pPr algn="r">
+              <a:lnSpc>
+                <a:spcPct val="100000"/>
+              </a:lnSpc>
+            </a:pPr>
+            <a:r>
+              <a:rPr sz="950" b="0" i="0">
+                <a:solidFill>
+                  <a:srgbClr val="9BAFA4"/>
+                </a:solidFill>
+                <a:latin typeface="Archivo"/>
+              </a:rPr>
+              <a:t>51 / 51</a:t>
             </a:r>
           </a:p>
         </p:txBody>
@@ -38347,7 +39047,7 @@
                 </a:solidFill>
                 <a:latin typeface="Archivo"/>
               </a:rPr>
-              <a:t>6 / 49</a:t>
+              <a:t>6 / 51</a:t>
             </a:r>
           </a:p>
         </p:txBody>
@@ -38801,7 +39501,7 @@
                 </a:solidFill>
                 <a:latin typeface="Archivo"/>
               </a:rPr>
-              <a:t>7 / 49</a:t>
+              <a:t>7 / 51</a:t>
             </a:r>
           </a:p>
         </p:txBody>
@@ -39460,7 +40160,7 @@
                 </a:solidFill>
                 <a:latin typeface="Archivo"/>
               </a:rPr>
-              <a:t>8 / 49</a:t>
+              <a:t>8 / 51</a:t>
             </a:r>
           </a:p>
         </p:txBody>
@@ -40005,7 +40705,7 @@
                 </a:solidFill>
                 <a:latin typeface="Archivo"/>
               </a:rPr>
-              <a:t>9 / 49</a:t>
+              <a:t>9 / 51</a:t>
             </a:r>
           </a:p>
         </p:txBody>
